--- a/云电脑平台架构.pptx
+++ b/云电脑平台架构.pptx
@@ -5,16 +5,17 @@
     <p:sldMasterId id="2147483648" r:id="rId1"/>
   </p:sldMasterIdLst>
   <p:sldIdLst>
-    <p:sldId id="257" r:id="rId2"/>
-    <p:sldId id="256" r:id="rId3"/>
-    <p:sldId id="258" r:id="rId4"/>
-    <p:sldId id="259" r:id="rId5"/>
-    <p:sldId id="260" r:id="rId6"/>
-    <p:sldId id="261" r:id="rId7"/>
-    <p:sldId id="262" r:id="rId8"/>
-    <p:sldId id="263" r:id="rId9"/>
-    <p:sldId id="264" r:id="rId10"/>
-    <p:sldId id="265" r:id="rId11"/>
+    <p:sldId id="257" r:id="rId3"/>
+    <p:sldId id="256" r:id="rId4"/>
+    <p:sldId id="258" r:id="rId5"/>
+    <p:sldId id="259" r:id="rId6"/>
+    <p:sldId id="260" r:id="rId7"/>
+    <p:sldId id="261" r:id="rId8"/>
+    <p:sldId id="262" r:id="rId9"/>
+    <p:sldId id="266" r:id="rId10"/>
+    <p:sldId id="263" r:id="rId11"/>
+    <p:sldId id="264" r:id="rId12"/>
+    <p:sldId id="265" r:id="rId13"/>
   </p:sldIdLst>
   <p:sldSz cx="12192000" cy="6858000"/>
   <p:notesSz cx="6858000" cy="9144000"/>
@@ -134,13 +135,7 @@
 
 <file path=ppt/commentAuthors.xml><?xml version="1.0" encoding="utf-8"?>
 <p:cmAuthorLst xmlns:a="http://schemas.openxmlformats.org/drawingml/2006/main" xmlns:r="http://schemas.openxmlformats.org/officeDocument/2006/relationships" xmlns:p="http://schemas.openxmlformats.org/presentationml/2006/main">
-  <p:cmAuthor id="1" name="chensong" initials="c" lastIdx="2" clrIdx="0">
-    <p:extLst>
-      <p:ext uri="{19B8F6BF-5375-455C-9EA6-DF929625EA0E}">
-        <p15:presenceInfo xmlns:p15="http://schemas.microsoft.com/office/powerpoint/2012/main" userId="chensong" providerId="None"/>
-      </p:ext>
-    </p:extLst>
-  </p:cmAuthor>
+  <p:cmAuthor id="1" name="chensong" initials="c" lastIdx="2" clrIdx="0"/>
 </p:cmAuthorLst>
 </file>
 
@@ -149,11 +144,6 @@
   <p:cm authorId="1" dt="2025-11-16T13:07:17.375" idx="2">
     <p:pos x="10" y="10"/>
     <p:text/>
-    <p:extLst>
-      <p:ext uri="{C676402C-5697-4E1C-873F-D02D1690AC5C}">
-        <p15:threadingInfo xmlns:p15="http://schemas.microsoft.com/office/powerpoint/2012/main" timeZoneBias="-480"/>
-      </p:ext>
-    </p:extLst>
   </p:cm>
 </p:cmLst>
 </file>
@@ -289,7 +279,6 @@
           <a:p>
             <a:fld id="{63A1C593-65D0-4073-BCC9-577B9352EA97}" type="datetimeFigureOut">
               <a:rPr lang="en-US" smtClean="0"/>
-              <a:t>2025-11-19</a:t>
             </a:fld>
             <a:endParaRPr lang="en-US"/>
           </a:p>
@@ -331,7 +320,6 @@
           <a:p>
             <a:fld id="{9B618960-8005-486C-9A75-10CB2AAC16F9}" type="slidenum">
               <a:rPr lang="en-US" smtClean="0"/>
-              <a:t>‹#›</a:t>
             </a:fld>
             <a:endParaRPr lang="en-US"/>
           </a:p>
@@ -405,6 +393,7 @@
               <a:rPr lang="en-US" smtClean="0"/>
               <a:t>Click to edit Master text styles</a:t>
             </a:r>
+            <a:endParaRPr lang="en-US" smtClean="0"/>
           </a:p>
           <a:p>
             <a:pPr lvl="1"/>
@@ -412,6 +401,7 @@
               <a:rPr lang="en-US" smtClean="0"/>
               <a:t>Second level</a:t>
             </a:r>
+            <a:endParaRPr lang="en-US" smtClean="0"/>
           </a:p>
           <a:p>
             <a:pPr lvl="2"/>
@@ -419,6 +409,7 @@
               <a:rPr lang="en-US" smtClean="0"/>
               <a:t>Third level</a:t>
             </a:r>
+            <a:endParaRPr lang="en-US" smtClean="0"/>
           </a:p>
           <a:p>
             <a:pPr lvl="3"/>
@@ -426,6 +417,7 @@
               <a:rPr lang="en-US" smtClean="0"/>
               <a:t>Fourth level</a:t>
             </a:r>
+            <a:endParaRPr lang="en-US" smtClean="0"/>
           </a:p>
           <a:p>
             <a:pPr lvl="4"/>
@@ -454,7 +446,6 @@
           <a:p>
             <a:fld id="{63A1C593-65D0-4073-BCC9-577B9352EA97}" type="datetimeFigureOut">
               <a:rPr lang="en-US" smtClean="0"/>
-              <a:t>2025-11-19</a:t>
             </a:fld>
             <a:endParaRPr lang="en-US"/>
           </a:p>
@@ -496,7 +487,6 @@
           <a:p>
             <a:fld id="{9B618960-8005-486C-9A75-10CB2AAC16F9}" type="slidenum">
               <a:rPr lang="en-US" smtClean="0"/>
-              <a:t>‹#›</a:t>
             </a:fld>
             <a:endParaRPr lang="en-US"/>
           </a:p>
@@ -580,6 +570,7 @@
               <a:rPr lang="en-US" smtClean="0"/>
               <a:t>Click to edit Master text styles</a:t>
             </a:r>
+            <a:endParaRPr lang="en-US" smtClean="0"/>
           </a:p>
           <a:p>
             <a:pPr lvl="1"/>
@@ -587,6 +578,7 @@
               <a:rPr lang="en-US" smtClean="0"/>
               <a:t>Second level</a:t>
             </a:r>
+            <a:endParaRPr lang="en-US" smtClean="0"/>
           </a:p>
           <a:p>
             <a:pPr lvl="2"/>
@@ -594,6 +586,7 @@
               <a:rPr lang="en-US" smtClean="0"/>
               <a:t>Third level</a:t>
             </a:r>
+            <a:endParaRPr lang="en-US" smtClean="0"/>
           </a:p>
           <a:p>
             <a:pPr lvl="3"/>
@@ -601,6 +594,7 @@
               <a:rPr lang="en-US" smtClean="0"/>
               <a:t>Fourth level</a:t>
             </a:r>
+            <a:endParaRPr lang="en-US" smtClean="0"/>
           </a:p>
           <a:p>
             <a:pPr lvl="4"/>
@@ -629,7 +623,6 @@
           <a:p>
             <a:fld id="{63A1C593-65D0-4073-BCC9-577B9352EA97}" type="datetimeFigureOut">
               <a:rPr lang="en-US" smtClean="0"/>
-              <a:t>2025-11-19</a:t>
             </a:fld>
             <a:endParaRPr lang="en-US"/>
           </a:p>
@@ -671,7 +664,6 @@
           <a:p>
             <a:fld id="{9B618960-8005-486C-9A75-10CB2AAC16F9}" type="slidenum">
               <a:rPr lang="en-US" smtClean="0"/>
-              <a:t>‹#›</a:t>
             </a:fld>
             <a:endParaRPr lang="en-US"/>
           </a:p>
@@ -745,6 +737,7 @@
               <a:rPr lang="en-US" smtClean="0"/>
               <a:t>Click to edit Master text styles</a:t>
             </a:r>
+            <a:endParaRPr lang="en-US" smtClean="0"/>
           </a:p>
           <a:p>
             <a:pPr lvl="1"/>
@@ -752,6 +745,7 @@
               <a:rPr lang="en-US" smtClean="0"/>
               <a:t>Second level</a:t>
             </a:r>
+            <a:endParaRPr lang="en-US" smtClean="0"/>
           </a:p>
           <a:p>
             <a:pPr lvl="2"/>
@@ -759,6 +753,7 @@
               <a:rPr lang="en-US" smtClean="0"/>
               <a:t>Third level</a:t>
             </a:r>
+            <a:endParaRPr lang="en-US" smtClean="0"/>
           </a:p>
           <a:p>
             <a:pPr lvl="3"/>
@@ -766,6 +761,7 @@
               <a:rPr lang="en-US" smtClean="0"/>
               <a:t>Fourth level</a:t>
             </a:r>
+            <a:endParaRPr lang="en-US" smtClean="0"/>
           </a:p>
           <a:p>
             <a:pPr lvl="4"/>
@@ -794,7 +790,6 @@
           <a:p>
             <a:fld id="{63A1C593-65D0-4073-BCC9-577B9352EA97}" type="datetimeFigureOut">
               <a:rPr lang="en-US" smtClean="0"/>
-              <a:t>2025-11-19</a:t>
             </a:fld>
             <a:endParaRPr lang="en-US"/>
           </a:p>
@@ -836,7 +831,6 @@
           <a:p>
             <a:fld id="{9B618960-8005-486C-9A75-10CB2AAC16F9}" type="slidenum">
               <a:rPr lang="en-US" smtClean="0"/>
-              <a:t>‹#›</a:t>
             </a:fld>
             <a:endParaRPr lang="en-US"/>
           </a:p>
@@ -1015,6 +1009,7 @@
               <a:rPr lang="en-US" smtClean="0"/>
               <a:t>Click to edit Master text styles</a:t>
             </a:r>
+            <a:endParaRPr lang="en-US" smtClean="0"/>
           </a:p>
         </p:txBody>
       </p:sp>
@@ -1035,7 +1030,6 @@
           <a:p>
             <a:fld id="{63A1C593-65D0-4073-BCC9-577B9352EA97}" type="datetimeFigureOut">
               <a:rPr lang="en-US" smtClean="0"/>
-              <a:t>2025-11-19</a:t>
             </a:fld>
             <a:endParaRPr lang="en-US"/>
           </a:p>
@@ -1077,7 +1071,6 @@
           <a:p>
             <a:fld id="{9B618960-8005-486C-9A75-10CB2AAC16F9}" type="slidenum">
               <a:rPr lang="en-US" smtClean="0"/>
-              <a:t>‹#›</a:t>
             </a:fld>
             <a:endParaRPr lang="en-US"/>
           </a:p>
@@ -1156,6 +1149,7 @@
               <a:rPr lang="en-US" smtClean="0"/>
               <a:t>Click to edit Master text styles</a:t>
             </a:r>
+            <a:endParaRPr lang="en-US" smtClean="0"/>
           </a:p>
           <a:p>
             <a:pPr lvl="1"/>
@@ -1163,6 +1157,7 @@
               <a:rPr lang="en-US" smtClean="0"/>
               <a:t>Second level</a:t>
             </a:r>
+            <a:endParaRPr lang="en-US" smtClean="0"/>
           </a:p>
           <a:p>
             <a:pPr lvl="2"/>
@@ -1170,6 +1165,7 @@
               <a:rPr lang="en-US" smtClean="0"/>
               <a:t>Third level</a:t>
             </a:r>
+            <a:endParaRPr lang="en-US" smtClean="0"/>
           </a:p>
           <a:p>
             <a:pPr lvl="3"/>
@@ -1177,6 +1173,7 @@
               <a:rPr lang="en-US" smtClean="0"/>
               <a:t>Fourth level</a:t>
             </a:r>
+            <a:endParaRPr lang="en-US" smtClean="0"/>
           </a:p>
           <a:p>
             <a:pPr lvl="4"/>
@@ -1213,6 +1210,7 @@
               <a:rPr lang="en-US" smtClean="0"/>
               <a:t>Click to edit Master text styles</a:t>
             </a:r>
+            <a:endParaRPr lang="en-US" smtClean="0"/>
           </a:p>
           <a:p>
             <a:pPr lvl="1"/>
@@ -1220,6 +1218,7 @@
               <a:rPr lang="en-US" smtClean="0"/>
               <a:t>Second level</a:t>
             </a:r>
+            <a:endParaRPr lang="en-US" smtClean="0"/>
           </a:p>
           <a:p>
             <a:pPr lvl="2"/>
@@ -1227,6 +1226,7 @@
               <a:rPr lang="en-US" smtClean="0"/>
               <a:t>Third level</a:t>
             </a:r>
+            <a:endParaRPr lang="en-US" smtClean="0"/>
           </a:p>
           <a:p>
             <a:pPr lvl="3"/>
@@ -1234,6 +1234,7 @@
               <a:rPr lang="en-US" smtClean="0"/>
               <a:t>Fourth level</a:t>
             </a:r>
+            <a:endParaRPr lang="en-US" smtClean="0"/>
           </a:p>
           <a:p>
             <a:pPr lvl="4"/>
@@ -1262,7 +1263,6 @@
           <a:p>
             <a:fld id="{63A1C593-65D0-4073-BCC9-577B9352EA97}" type="datetimeFigureOut">
               <a:rPr lang="en-US" smtClean="0"/>
-              <a:t>2025-11-19</a:t>
             </a:fld>
             <a:endParaRPr lang="en-US"/>
           </a:p>
@@ -1304,7 +1304,6 @@
           <a:p>
             <a:fld id="{9B618960-8005-486C-9A75-10CB2AAC16F9}" type="slidenum">
               <a:rPr lang="en-US" smtClean="0"/>
-              <a:t>‹#›</a:t>
             </a:fld>
             <a:endParaRPr lang="en-US"/>
           </a:p>
@@ -1425,6 +1424,7 @@
               <a:rPr lang="en-US" smtClean="0"/>
               <a:t>Click to edit Master text styles</a:t>
             </a:r>
+            <a:endParaRPr lang="en-US" smtClean="0"/>
           </a:p>
         </p:txBody>
       </p:sp>
@@ -1453,6 +1453,7 @@
               <a:rPr lang="en-US" smtClean="0"/>
               <a:t>Click to edit Master text styles</a:t>
             </a:r>
+            <a:endParaRPr lang="en-US" smtClean="0"/>
           </a:p>
           <a:p>
             <a:pPr lvl="1"/>
@@ -1460,6 +1461,7 @@
               <a:rPr lang="en-US" smtClean="0"/>
               <a:t>Second level</a:t>
             </a:r>
+            <a:endParaRPr lang="en-US" smtClean="0"/>
           </a:p>
           <a:p>
             <a:pPr lvl="2"/>
@@ -1467,6 +1469,7 @@
               <a:rPr lang="en-US" smtClean="0"/>
               <a:t>Third level</a:t>
             </a:r>
+            <a:endParaRPr lang="en-US" smtClean="0"/>
           </a:p>
           <a:p>
             <a:pPr lvl="3"/>
@@ -1474,6 +1477,7 @@
               <a:rPr lang="en-US" smtClean="0"/>
               <a:t>Fourth level</a:t>
             </a:r>
+            <a:endParaRPr lang="en-US" smtClean="0"/>
           </a:p>
           <a:p>
             <a:pPr lvl="4"/>
@@ -1547,6 +1551,7 @@
               <a:rPr lang="en-US" smtClean="0"/>
               <a:t>Click to edit Master text styles</a:t>
             </a:r>
+            <a:endParaRPr lang="en-US" smtClean="0"/>
           </a:p>
         </p:txBody>
       </p:sp>
@@ -1575,6 +1580,7 @@
               <a:rPr lang="en-US" smtClean="0"/>
               <a:t>Click to edit Master text styles</a:t>
             </a:r>
+            <a:endParaRPr lang="en-US" smtClean="0"/>
           </a:p>
           <a:p>
             <a:pPr lvl="1"/>
@@ -1582,6 +1588,7 @@
               <a:rPr lang="en-US" smtClean="0"/>
               <a:t>Second level</a:t>
             </a:r>
+            <a:endParaRPr lang="en-US" smtClean="0"/>
           </a:p>
           <a:p>
             <a:pPr lvl="2"/>
@@ -1589,6 +1596,7 @@
               <a:rPr lang="en-US" smtClean="0"/>
               <a:t>Third level</a:t>
             </a:r>
+            <a:endParaRPr lang="en-US" smtClean="0"/>
           </a:p>
           <a:p>
             <a:pPr lvl="3"/>
@@ -1596,6 +1604,7 @@
               <a:rPr lang="en-US" smtClean="0"/>
               <a:t>Fourth level</a:t>
             </a:r>
+            <a:endParaRPr lang="en-US" smtClean="0"/>
           </a:p>
           <a:p>
             <a:pPr lvl="4"/>
@@ -1624,7 +1633,6 @@
           <a:p>
             <a:fld id="{63A1C593-65D0-4073-BCC9-577B9352EA97}" type="datetimeFigureOut">
               <a:rPr lang="en-US" smtClean="0"/>
-              <a:t>2025-11-19</a:t>
             </a:fld>
             <a:endParaRPr lang="en-US"/>
           </a:p>
@@ -1666,7 +1674,6 @@
           <a:p>
             <a:fld id="{9B618960-8005-486C-9A75-10CB2AAC16F9}" type="slidenum">
               <a:rPr lang="en-US" smtClean="0"/>
-              <a:t>‹#›</a:t>
             </a:fld>
             <a:endParaRPr lang="en-US"/>
           </a:p>
@@ -1737,7 +1744,6 @@
           <a:p>
             <a:fld id="{63A1C593-65D0-4073-BCC9-577B9352EA97}" type="datetimeFigureOut">
               <a:rPr lang="en-US" smtClean="0"/>
-              <a:t>2025-11-19</a:t>
             </a:fld>
             <a:endParaRPr lang="en-US"/>
           </a:p>
@@ -1779,7 +1785,6 @@
           <a:p>
             <a:fld id="{9B618960-8005-486C-9A75-10CB2AAC16F9}" type="slidenum">
               <a:rPr lang="en-US" smtClean="0"/>
-              <a:t>‹#›</a:t>
             </a:fld>
             <a:endParaRPr lang="en-US"/>
           </a:p>
@@ -1827,7 +1832,6 @@
           <a:p>
             <a:fld id="{63A1C593-65D0-4073-BCC9-577B9352EA97}" type="datetimeFigureOut">
               <a:rPr lang="en-US" smtClean="0"/>
-              <a:t>2025-11-19</a:t>
             </a:fld>
             <a:endParaRPr lang="en-US"/>
           </a:p>
@@ -1869,7 +1873,6 @@
           <a:p>
             <a:fld id="{9B618960-8005-486C-9A75-10CB2AAC16F9}" type="slidenum">
               <a:rPr lang="en-US" smtClean="0"/>
-              <a:t>‹#›</a:t>
             </a:fld>
             <a:endParaRPr lang="en-US"/>
           </a:p>
@@ -1985,6 +1988,7 @@
               <a:rPr lang="en-US" smtClean="0"/>
               <a:t>Click to edit Master text styles</a:t>
             </a:r>
+            <a:endParaRPr lang="en-US" smtClean="0"/>
           </a:p>
           <a:p>
             <a:pPr lvl="1"/>
@@ -1992,6 +1996,7 @@
               <a:rPr lang="en-US" smtClean="0"/>
               <a:t>Second level</a:t>
             </a:r>
+            <a:endParaRPr lang="en-US" smtClean="0"/>
           </a:p>
           <a:p>
             <a:pPr lvl="2"/>
@@ -1999,6 +2004,7 @@
               <a:rPr lang="en-US" smtClean="0"/>
               <a:t>Third level</a:t>
             </a:r>
+            <a:endParaRPr lang="en-US" smtClean="0"/>
           </a:p>
           <a:p>
             <a:pPr lvl="3"/>
@@ -2006,6 +2012,7 @@
               <a:rPr lang="en-US" smtClean="0"/>
               <a:t>Fourth level</a:t>
             </a:r>
+            <a:endParaRPr lang="en-US" smtClean="0"/>
           </a:p>
           <a:p>
             <a:pPr lvl="4"/>
@@ -2079,6 +2086,7 @@
               <a:rPr lang="en-US" smtClean="0"/>
               <a:t>Click to edit Master text styles</a:t>
             </a:r>
+            <a:endParaRPr lang="en-US" smtClean="0"/>
           </a:p>
         </p:txBody>
       </p:sp>
@@ -2099,7 +2107,6 @@
           <a:p>
             <a:fld id="{63A1C593-65D0-4073-BCC9-577B9352EA97}" type="datetimeFigureOut">
               <a:rPr lang="en-US" smtClean="0"/>
-              <a:t>2025-11-19</a:t>
             </a:fld>
             <a:endParaRPr lang="en-US"/>
           </a:p>
@@ -2141,7 +2148,6 @@
           <a:p>
             <a:fld id="{9B618960-8005-486C-9A75-10CB2AAC16F9}" type="slidenum">
               <a:rPr lang="en-US" smtClean="0"/>
-              <a:t>‹#›</a:t>
             </a:fld>
             <a:endParaRPr lang="en-US"/>
           </a:p>
@@ -2327,6 +2333,7 @@
               <a:rPr lang="en-US" smtClean="0"/>
               <a:t>Click to edit Master text styles</a:t>
             </a:r>
+            <a:endParaRPr lang="en-US" smtClean="0"/>
           </a:p>
         </p:txBody>
       </p:sp>
@@ -2347,7 +2354,6 @@
           <a:p>
             <a:fld id="{63A1C593-65D0-4073-BCC9-577B9352EA97}" type="datetimeFigureOut">
               <a:rPr lang="en-US" smtClean="0"/>
-              <a:t>2025-11-19</a:t>
             </a:fld>
             <a:endParaRPr lang="en-US"/>
           </a:p>
@@ -2389,7 +2395,6 @@
           <a:p>
             <a:fld id="{9B618960-8005-486C-9A75-10CB2AAC16F9}" type="slidenum">
               <a:rPr lang="en-US" smtClean="0"/>
-              <a:t>‹#›</a:t>
             </a:fld>
             <a:endParaRPr lang="en-US"/>
           </a:p>
@@ -2488,6 +2493,7 @@
               <a:rPr lang="en-US" smtClean="0"/>
               <a:t>Click to edit Master text styles</a:t>
             </a:r>
+            <a:endParaRPr lang="en-US" smtClean="0"/>
           </a:p>
           <a:p>
             <a:pPr lvl="1"/>
@@ -2495,6 +2501,7 @@
               <a:rPr lang="en-US" smtClean="0"/>
               <a:t>Second level</a:t>
             </a:r>
+            <a:endParaRPr lang="en-US" smtClean="0"/>
           </a:p>
           <a:p>
             <a:pPr lvl="2"/>
@@ -2502,6 +2509,7 @@
               <a:rPr lang="en-US" smtClean="0"/>
               <a:t>Third level</a:t>
             </a:r>
+            <a:endParaRPr lang="en-US" smtClean="0"/>
           </a:p>
           <a:p>
             <a:pPr lvl="3"/>
@@ -2509,6 +2517,7 @@
               <a:rPr lang="en-US" smtClean="0"/>
               <a:t>Fourth level</a:t>
             </a:r>
+            <a:endParaRPr lang="en-US" smtClean="0"/>
           </a:p>
           <a:p>
             <a:pPr lvl="4"/>
@@ -2555,7 +2564,6 @@
           <a:p>
             <a:fld id="{63A1C593-65D0-4073-BCC9-577B9352EA97}" type="datetimeFigureOut">
               <a:rPr lang="en-US" smtClean="0"/>
-              <a:t>2025-11-19</a:t>
             </a:fld>
             <a:endParaRPr lang="en-US"/>
           </a:p>
@@ -2633,7 +2641,6 @@
           <a:p>
             <a:fld id="{9B618960-8005-486C-9A75-10CB2AAC16F9}" type="slidenum">
               <a:rPr lang="en-US" smtClean="0"/>
-              <a:t>‹#›</a:t>
             </a:fld>
             <a:endParaRPr lang="en-US"/>
           </a:p>
@@ -4272,6 +4279,1037 @@
           <a:p>
             <a:r>
               <a:rPr lang="zh-CN" altLang="en-US" dirty="0" smtClean="0"/>
+              <a:t>响应时延优化方法</a:t>
+            </a:r>
+            <a:r>
+              <a:rPr lang="en-US" altLang="zh-CN" dirty="0" smtClean="0"/>
+              <a:t>-</a:t>
+            </a:r>
+            <a:r>
+              <a:rPr lang="zh-CN" altLang="en-US" dirty="0" smtClean="0"/>
+              <a:t>网络传输时延优化</a:t>
+            </a:r>
+            <a:endParaRPr lang="zh-CN" altLang="en-US" dirty="0"/>
+          </a:p>
+        </p:txBody>
+      </p:sp>
+      <p:sp>
+        <p:nvSpPr>
+          <p:cNvPr id="4" name="矩形 3"/>
+          <p:cNvSpPr/>
+          <p:nvPr/>
+        </p:nvSpPr>
+        <p:spPr>
+          <a:xfrm>
+            <a:off x="250092" y="3618523"/>
+            <a:ext cx="1844431" cy="719015"/>
+          </a:xfrm>
+          <a:prstGeom prst="rect">
+            <a:avLst/>
+          </a:prstGeom>
+        </p:spPr>
+        <p:style>
+          <a:lnRef idx="2">
+            <a:schemeClr val="accent1">
+              <a:shade val="50000"/>
+            </a:schemeClr>
+          </a:lnRef>
+          <a:fillRef idx="1">
+            <a:schemeClr val="accent1"/>
+          </a:fillRef>
+          <a:effectRef idx="0">
+            <a:schemeClr val="accent1"/>
+          </a:effectRef>
+          <a:fontRef idx="minor">
+            <a:schemeClr val="lt1"/>
+          </a:fontRef>
+        </p:style>
+        <p:txBody>
+          <a:bodyPr rtlCol="0" anchor="ctr"/>
+          <a:lstStyle/>
+          <a:p>
+            <a:pPr algn="ctr"/>
+            <a:r>
+              <a:rPr lang="zh-CN" altLang="en-US" dirty="0" smtClean="0"/>
+              <a:t>网络传输优化</a:t>
+            </a:r>
+            <a:endParaRPr lang="zh-CN" altLang="en-US" dirty="0"/>
+          </a:p>
+        </p:txBody>
+      </p:sp>
+      <p:sp>
+        <p:nvSpPr>
+          <p:cNvPr id="5" name="矩形 4"/>
+          <p:cNvSpPr/>
+          <p:nvPr/>
+        </p:nvSpPr>
+        <p:spPr>
+          <a:xfrm>
+            <a:off x="2543906" y="2239963"/>
+            <a:ext cx="1285631" cy="719015"/>
+          </a:xfrm>
+          <a:prstGeom prst="rect">
+            <a:avLst/>
+          </a:prstGeom>
+        </p:spPr>
+        <p:style>
+          <a:lnRef idx="2">
+            <a:schemeClr val="accent1">
+              <a:shade val="50000"/>
+            </a:schemeClr>
+          </a:lnRef>
+          <a:fillRef idx="1">
+            <a:schemeClr val="accent1"/>
+          </a:fillRef>
+          <a:effectRef idx="0">
+            <a:schemeClr val="accent1"/>
+          </a:effectRef>
+          <a:fontRef idx="minor">
+            <a:schemeClr val="lt1"/>
+          </a:fontRef>
+        </p:style>
+        <p:txBody>
+          <a:bodyPr rtlCol="0" anchor="ctr"/>
+          <a:lstStyle/>
+          <a:p>
+            <a:pPr algn="ctr"/>
+            <a:r>
+              <a:rPr lang="zh-CN" altLang="en-US" dirty="0" smtClean="0"/>
+              <a:t>网络</a:t>
+            </a:r>
+            <a:endParaRPr lang="zh-CN" altLang="en-US" dirty="0"/>
+          </a:p>
+        </p:txBody>
+      </p:sp>
+      <p:sp>
+        <p:nvSpPr>
+          <p:cNvPr id="6" name="矩形 5"/>
+          <p:cNvSpPr/>
+          <p:nvPr/>
+        </p:nvSpPr>
+        <p:spPr>
+          <a:xfrm>
+            <a:off x="2543907" y="4626708"/>
+            <a:ext cx="1285631" cy="719015"/>
+          </a:xfrm>
+          <a:prstGeom prst="rect">
+            <a:avLst/>
+          </a:prstGeom>
+        </p:spPr>
+        <p:style>
+          <a:lnRef idx="2">
+            <a:schemeClr val="accent1">
+              <a:shade val="50000"/>
+            </a:schemeClr>
+          </a:lnRef>
+          <a:fillRef idx="1">
+            <a:schemeClr val="accent1"/>
+          </a:fillRef>
+          <a:effectRef idx="0">
+            <a:schemeClr val="accent1"/>
+          </a:effectRef>
+          <a:fontRef idx="minor">
+            <a:schemeClr val="lt1"/>
+          </a:fontRef>
+        </p:style>
+        <p:txBody>
+          <a:bodyPr rtlCol="0" anchor="ctr"/>
+          <a:lstStyle/>
+          <a:p>
+            <a:pPr algn="ctr"/>
+            <a:r>
+              <a:rPr lang="zh-CN" altLang="en-US" dirty="0" smtClean="0"/>
+              <a:t>数据传输优化</a:t>
+            </a:r>
+            <a:endParaRPr lang="zh-CN" altLang="en-US" dirty="0"/>
+          </a:p>
+        </p:txBody>
+      </p:sp>
+      <p:sp>
+        <p:nvSpPr>
+          <p:cNvPr id="7" name="矩形 6"/>
+          <p:cNvSpPr/>
+          <p:nvPr/>
+        </p:nvSpPr>
+        <p:spPr>
+          <a:xfrm>
+            <a:off x="4936391" y="1791616"/>
+            <a:ext cx="1285631" cy="719015"/>
+          </a:xfrm>
+          <a:prstGeom prst="rect">
+            <a:avLst/>
+          </a:prstGeom>
+        </p:spPr>
+        <p:style>
+          <a:lnRef idx="2">
+            <a:schemeClr val="accent1">
+              <a:shade val="50000"/>
+            </a:schemeClr>
+          </a:lnRef>
+          <a:fillRef idx="1">
+            <a:schemeClr val="accent1"/>
+          </a:fillRef>
+          <a:effectRef idx="0">
+            <a:schemeClr val="accent1"/>
+          </a:effectRef>
+          <a:fontRef idx="minor">
+            <a:schemeClr val="lt1"/>
+          </a:fontRef>
+        </p:style>
+        <p:txBody>
+          <a:bodyPr rtlCol="0" anchor="ctr"/>
+          <a:lstStyle/>
+          <a:p>
+            <a:pPr algn="ctr"/>
+            <a:r>
+              <a:rPr lang="zh-CN" altLang="en-US" dirty="0" smtClean="0"/>
+              <a:t>优化</a:t>
+            </a:r>
+            <a:r>
+              <a:rPr lang="en-US" altLang="zh-CN" dirty="0" smtClean="0"/>
+              <a:t>IDC</a:t>
+            </a:r>
+            <a:r>
+              <a:rPr lang="zh-CN" altLang="en-US" dirty="0" smtClean="0"/>
+              <a:t>机房部署</a:t>
+            </a:r>
+            <a:endParaRPr lang="zh-CN" altLang="en-US" dirty="0"/>
+          </a:p>
+        </p:txBody>
+      </p:sp>
+      <p:sp>
+        <p:nvSpPr>
+          <p:cNvPr id="8" name="矩形 7"/>
+          <p:cNvSpPr/>
+          <p:nvPr/>
+        </p:nvSpPr>
+        <p:spPr>
+          <a:xfrm>
+            <a:off x="4810369" y="3047574"/>
+            <a:ext cx="1285631" cy="719015"/>
+          </a:xfrm>
+          <a:prstGeom prst="rect">
+            <a:avLst/>
+          </a:prstGeom>
+        </p:spPr>
+        <p:style>
+          <a:lnRef idx="2">
+            <a:schemeClr val="accent1">
+              <a:shade val="50000"/>
+            </a:schemeClr>
+          </a:lnRef>
+          <a:fillRef idx="1">
+            <a:schemeClr val="accent1"/>
+          </a:fillRef>
+          <a:effectRef idx="0">
+            <a:schemeClr val="accent1"/>
+          </a:effectRef>
+          <a:fontRef idx="minor">
+            <a:schemeClr val="lt1"/>
+          </a:fontRef>
+        </p:style>
+        <p:txBody>
+          <a:bodyPr rtlCol="0" anchor="ctr"/>
+          <a:lstStyle/>
+          <a:p>
+            <a:pPr algn="ctr"/>
+            <a:r>
+              <a:rPr lang="zh-CN" altLang="en-US" dirty="0" smtClean="0"/>
+              <a:t>优化路由策略</a:t>
+            </a:r>
+            <a:endParaRPr lang="zh-CN" altLang="en-US" dirty="0"/>
+          </a:p>
+        </p:txBody>
+      </p:sp>
+      <p:sp>
+        <p:nvSpPr>
+          <p:cNvPr id="9" name="矩形 8"/>
+          <p:cNvSpPr/>
+          <p:nvPr/>
+        </p:nvSpPr>
+        <p:spPr>
+          <a:xfrm>
+            <a:off x="6830644" y="2257302"/>
+            <a:ext cx="1191847" cy="397303"/>
+          </a:xfrm>
+          <a:prstGeom prst="rect">
+            <a:avLst/>
+          </a:prstGeom>
+        </p:spPr>
+        <p:style>
+          <a:lnRef idx="2">
+            <a:schemeClr val="accent1">
+              <a:shade val="50000"/>
+            </a:schemeClr>
+          </a:lnRef>
+          <a:fillRef idx="1">
+            <a:schemeClr val="accent1"/>
+          </a:fillRef>
+          <a:effectRef idx="0">
+            <a:schemeClr val="accent1"/>
+          </a:effectRef>
+          <a:fontRef idx="minor">
+            <a:schemeClr val="lt1"/>
+          </a:fontRef>
+        </p:style>
+        <p:txBody>
+          <a:bodyPr rtlCol="0" anchor="ctr"/>
+          <a:lstStyle/>
+          <a:p>
+            <a:pPr algn="ctr"/>
+            <a:r>
+              <a:rPr lang="zh-CN" altLang="en-US" sz="1000" dirty="0" smtClean="0"/>
+              <a:t>优先选择</a:t>
+            </a:r>
+            <a:r>
+              <a:rPr lang="en-US" altLang="zh-CN" sz="1000" dirty="0" smtClean="0"/>
+              <a:t>RTT</a:t>
+            </a:r>
+            <a:r>
+              <a:rPr lang="zh-CN" altLang="en-US" sz="1000" dirty="0" smtClean="0"/>
+              <a:t>时延小的机房</a:t>
+            </a:r>
+            <a:endParaRPr lang="zh-CN" altLang="en-US" sz="1000" dirty="0"/>
+          </a:p>
+        </p:txBody>
+      </p:sp>
+      <p:sp>
+        <p:nvSpPr>
+          <p:cNvPr id="10" name="矩形 9"/>
+          <p:cNvSpPr/>
+          <p:nvPr/>
+        </p:nvSpPr>
+        <p:spPr>
+          <a:xfrm>
+            <a:off x="6951783" y="1655519"/>
+            <a:ext cx="949571" cy="345219"/>
+          </a:xfrm>
+          <a:prstGeom prst="rect">
+            <a:avLst/>
+          </a:prstGeom>
+        </p:spPr>
+        <p:style>
+          <a:lnRef idx="2">
+            <a:schemeClr val="accent1">
+              <a:shade val="50000"/>
+            </a:schemeClr>
+          </a:lnRef>
+          <a:fillRef idx="1">
+            <a:schemeClr val="accent1"/>
+          </a:fillRef>
+          <a:effectRef idx="0">
+            <a:schemeClr val="accent1"/>
+          </a:effectRef>
+          <a:fontRef idx="minor">
+            <a:schemeClr val="lt1"/>
+          </a:fontRef>
+        </p:style>
+        <p:txBody>
+          <a:bodyPr rtlCol="0" anchor="ctr"/>
+          <a:lstStyle/>
+          <a:p>
+            <a:pPr algn="ctr"/>
+            <a:r>
+              <a:rPr lang="zh-CN" altLang="en-US" sz="1000" dirty="0" smtClean="0"/>
+              <a:t>用户距离</a:t>
+            </a:r>
+            <a:r>
+              <a:rPr lang="en-US" altLang="zh-CN" sz="1000" dirty="0" smtClean="0"/>
+              <a:t>IDC</a:t>
+            </a:r>
+            <a:r>
+              <a:rPr lang="zh-CN" altLang="en-US" sz="1000" dirty="0" smtClean="0"/>
+              <a:t>不超过</a:t>
+            </a:r>
+            <a:r>
+              <a:rPr lang="en-US" altLang="zh-CN" sz="1000" dirty="0" smtClean="0"/>
+              <a:t>400KM</a:t>
+            </a:r>
+            <a:endParaRPr lang="zh-CN" altLang="en-US" sz="1000" dirty="0"/>
+          </a:p>
+        </p:txBody>
+      </p:sp>
+      <p:sp>
+        <p:nvSpPr>
+          <p:cNvPr id="11" name="矩形 10"/>
+          <p:cNvSpPr/>
+          <p:nvPr/>
+        </p:nvSpPr>
+        <p:spPr>
+          <a:xfrm>
+            <a:off x="8979875" y="1729765"/>
+            <a:ext cx="1285631" cy="527538"/>
+          </a:xfrm>
+          <a:prstGeom prst="rect">
+            <a:avLst/>
+          </a:prstGeom>
+        </p:spPr>
+        <p:style>
+          <a:lnRef idx="2">
+            <a:schemeClr val="accent1">
+              <a:shade val="50000"/>
+            </a:schemeClr>
+          </a:lnRef>
+          <a:fillRef idx="1">
+            <a:schemeClr val="accent1"/>
+          </a:fillRef>
+          <a:effectRef idx="0">
+            <a:schemeClr val="accent1"/>
+          </a:effectRef>
+          <a:fontRef idx="minor">
+            <a:schemeClr val="lt1"/>
+          </a:fontRef>
+        </p:style>
+        <p:txBody>
+          <a:bodyPr rtlCol="0" anchor="ctr"/>
+          <a:lstStyle/>
+          <a:p>
+            <a:pPr algn="ctr"/>
+            <a:r>
+              <a:rPr lang="en-US" altLang="zh-CN" sz="1000" dirty="0" smtClean="0"/>
+              <a:t>RTT</a:t>
+            </a:r>
+            <a:r>
+              <a:rPr lang="zh-CN" altLang="en-US" sz="1000" dirty="0" smtClean="0"/>
+              <a:t>延时控制在</a:t>
+            </a:r>
+            <a:r>
+              <a:rPr lang="en-US" altLang="zh-CN" sz="1000" dirty="0" smtClean="0"/>
+              <a:t>40ms</a:t>
+            </a:r>
+            <a:endParaRPr lang="zh-CN" altLang="en-US" sz="1000" dirty="0"/>
+          </a:p>
+        </p:txBody>
+      </p:sp>
+      <p:sp>
+        <p:nvSpPr>
+          <p:cNvPr id="12" name="矩形 11"/>
+          <p:cNvSpPr/>
+          <p:nvPr/>
+        </p:nvSpPr>
+        <p:spPr>
+          <a:xfrm>
+            <a:off x="6783751" y="3154790"/>
+            <a:ext cx="1555264" cy="719015"/>
+          </a:xfrm>
+          <a:prstGeom prst="rect">
+            <a:avLst/>
+          </a:prstGeom>
+        </p:spPr>
+        <p:style>
+          <a:lnRef idx="2">
+            <a:schemeClr val="accent1">
+              <a:shade val="50000"/>
+            </a:schemeClr>
+          </a:lnRef>
+          <a:fillRef idx="1">
+            <a:schemeClr val="accent1"/>
+          </a:fillRef>
+          <a:effectRef idx="0">
+            <a:schemeClr val="accent1"/>
+          </a:effectRef>
+          <a:fontRef idx="minor">
+            <a:schemeClr val="lt1"/>
+          </a:fontRef>
+        </p:style>
+        <p:txBody>
+          <a:bodyPr rtlCol="0" anchor="ctr"/>
+          <a:lstStyle/>
+          <a:p>
+            <a:pPr algn="ctr"/>
+            <a:r>
+              <a:rPr lang="zh-CN" altLang="en-US" dirty="0" smtClean="0"/>
+              <a:t>优先选择</a:t>
+            </a:r>
+            <a:r>
+              <a:rPr lang="en-US" altLang="zh-CN" dirty="0" smtClean="0"/>
+              <a:t>RTT</a:t>
+            </a:r>
+            <a:r>
+              <a:rPr lang="zh-CN" altLang="en-US" dirty="0" smtClean="0"/>
+              <a:t>时延小机房</a:t>
+            </a:r>
+            <a:endParaRPr lang="zh-CN" altLang="en-US" dirty="0"/>
+          </a:p>
+        </p:txBody>
+      </p:sp>
+      <p:sp>
+        <p:nvSpPr>
+          <p:cNvPr id="13" name="矩形 12"/>
+          <p:cNvSpPr/>
+          <p:nvPr/>
+        </p:nvSpPr>
+        <p:spPr>
+          <a:xfrm>
+            <a:off x="4810368" y="4313851"/>
+            <a:ext cx="1285631" cy="719015"/>
+          </a:xfrm>
+          <a:prstGeom prst="rect">
+            <a:avLst/>
+          </a:prstGeom>
+        </p:spPr>
+        <p:style>
+          <a:lnRef idx="2">
+            <a:schemeClr val="accent1">
+              <a:shade val="50000"/>
+            </a:schemeClr>
+          </a:lnRef>
+          <a:fillRef idx="1">
+            <a:schemeClr val="accent1"/>
+          </a:fillRef>
+          <a:effectRef idx="0">
+            <a:schemeClr val="accent1"/>
+          </a:effectRef>
+          <a:fontRef idx="minor">
+            <a:schemeClr val="lt1"/>
+          </a:fontRef>
+        </p:style>
+        <p:txBody>
+          <a:bodyPr rtlCol="0" anchor="ctr"/>
+          <a:lstStyle/>
+          <a:p>
+            <a:pPr algn="ctr"/>
+            <a:r>
+              <a:rPr lang="zh-CN" altLang="en-US" dirty="0" smtClean="0"/>
+              <a:t>增加吞吐量</a:t>
+            </a:r>
+            <a:endParaRPr lang="zh-CN" altLang="en-US" dirty="0"/>
+          </a:p>
+        </p:txBody>
+      </p:sp>
+      <p:sp>
+        <p:nvSpPr>
+          <p:cNvPr id="14" name="矩形 13"/>
+          <p:cNvSpPr/>
+          <p:nvPr/>
+        </p:nvSpPr>
+        <p:spPr>
+          <a:xfrm>
+            <a:off x="4810368" y="5345723"/>
+            <a:ext cx="1285631" cy="719015"/>
+          </a:xfrm>
+          <a:prstGeom prst="rect">
+            <a:avLst/>
+          </a:prstGeom>
+        </p:spPr>
+        <p:style>
+          <a:lnRef idx="2">
+            <a:schemeClr val="accent1">
+              <a:shade val="50000"/>
+            </a:schemeClr>
+          </a:lnRef>
+          <a:fillRef idx="1">
+            <a:schemeClr val="accent1"/>
+          </a:fillRef>
+          <a:effectRef idx="0">
+            <a:schemeClr val="accent1"/>
+          </a:effectRef>
+          <a:fontRef idx="minor">
+            <a:schemeClr val="lt1"/>
+          </a:fontRef>
+        </p:style>
+        <p:txBody>
+          <a:bodyPr rtlCol="0" anchor="ctr"/>
+          <a:lstStyle/>
+          <a:p>
+            <a:pPr algn="ctr"/>
+            <a:r>
+              <a:rPr lang="zh-CN" altLang="en-US" dirty="0" smtClean="0"/>
+              <a:t>减少重传</a:t>
+            </a:r>
+            <a:endParaRPr lang="zh-CN" altLang="en-US" dirty="0"/>
+          </a:p>
+        </p:txBody>
+      </p:sp>
+      <p:sp>
+        <p:nvSpPr>
+          <p:cNvPr id="15" name="矩形 14"/>
+          <p:cNvSpPr/>
+          <p:nvPr/>
+        </p:nvSpPr>
+        <p:spPr>
+          <a:xfrm>
+            <a:off x="7053384" y="4267201"/>
+            <a:ext cx="1285631" cy="476738"/>
+          </a:xfrm>
+          <a:prstGeom prst="rect">
+            <a:avLst/>
+          </a:prstGeom>
+        </p:spPr>
+        <p:style>
+          <a:lnRef idx="2">
+            <a:schemeClr val="accent1">
+              <a:shade val="50000"/>
+            </a:schemeClr>
+          </a:lnRef>
+          <a:fillRef idx="1">
+            <a:schemeClr val="accent1"/>
+          </a:fillRef>
+          <a:effectRef idx="0">
+            <a:schemeClr val="accent1"/>
+          </a:effectRef>
+          <a:fontRef idx="minor">
+            <a:schemeClr val="lt1"/>
+          </a:fontRef>
+        </p:style>
+        <p:txBody>
+          <a:bodyPr rtlCol="0" anchor="ctr"/>
+          <a:lstStyle/>
+          <a:p>
+            <a:pPr algn="ctr"/>
+            <a:r>
+              <a:rPr lang="zh-CN" altLang="en-US" sz="1000" dirty="0" smtClean="0"/>
+              <a:t>优化拥塞控制</a:t>
+            </a:r>
+            <a:endParaRPr lang="zh-CN" altLang="en-US" sz="1000" dirty="0"/>
+          </a:p>
+        </p:txBody>
+      </p:sp>
+      <p:sp>
+        <p:nvSpPr>
+          <p:cNvPr id="16" name="矩形 15"/>
+          <p:cNvSpPr/>
+          <p:nvPr/>
+        </p:nvSpPr>
+        <p:spPr>
+          <a:xfrm>
+            <a:off x="7053384" y="4861169"/>
+            <a:ext cx="1285631" cy="476738"/>
+          </a:xfrm>
+          <a:prstGeom prst="rect">
+            <a:avLst/>
+          </a:prstGeom>
+        </p:spPr>
+        <p:style>
+          <a:lnRef idx="2">
+            <a:schemeClr val="accent1">
+              <a:shade val="50000"/>
+            </a:schemeClr>
+          </a:lnRef>
+          <a:fillRef idx="1">
+            <a:schemeClr val="accent1"/>
+          </a:fillRef>
+          <a:effectRef idx="0">
+            <a:schemeClr val="accent1"/>
+          </a:effectRef>
+          <a:fontRef idx="minor">
+            <a:schemeClr val="lt1"/>
+          </a:fontRef>
+        </p:style>
+        <p:txBody>
+          <a:bodyPr rtlCol="0" anchor="ctr"/>
+          <a:lstStyle/>
+          <a:p>
+            <a:pPr algn="ctr"/>
+            <a:r>
+              <a:rPr lang="zh-CN" altLang="en-US" sz="1000" dirty="0" smtClean="0"/>
+              <a:t>基于</a:t>
+            </a:r>
+            <a:r>
+              <a:rPr lang="en-US" altLang="zh-CN" sz="1000" dirty="0" smtClean="0"/>
+              <a:t>UDP</a:t>
+            </a:r>
+            <a:r>
+              <a:rPr lang="zh-CN" altLang="en-US" sz="1000" dirty="0" smtClean="0"/>
+              <a:t>的传输协议</a:t>
+            </a:r>
+            <a:endParaRPr lang="zh-CN" altLang="en-US" sz="1000" dirty="0"/>
+          </a:p>
+        </p:txBody>
+      </p:sp>
+      <p:sp>
+        <p:nvSpPr>
+          <p:cNvPr id="17" name="矩形 16"/>
+          <p:cNvSpPr/>
+          <p:nvPr/>
+        </p:nvSpPr>
+        <p:spPr>
+          <a:xfrm>
+            <a:off x="7053383" y="5826369"/>
+            <a:ext cx="1285631" cy="476738"/>
+          </a:xfrm>
+          <a:prstGeom prst="rect">
+            <a:avLst/>
+          </a:prstGeom>
+        </p:spPr>
+        <p:style>
+          <a:lnRef idx="2">
+            <a:schemeClr val="accent1">
+              <a:shade val="50000"/>
+            </a:schemeClr>
+          </a:lnRef>
+          <a:fillRef idx="1">
+            <a:schemeClr val="accent1"/>
+          </a:fillRef>
+          <a:effectRef idx="0">
+            <a:schemeClr val="accent1"/>
+          </a:effectRef>
+          <a:fontRef idx="minor">
+            <a:schemeClr val="lt1"/>
+          </a:fontRef>
+        </p:style>
+        <p:txBody>
+          <a:bodyPr rtlCol="0" anchor="ctr"/>
+          <a:lstStyle/>
+          <a:p>
+            <a:pPr algn="ctr"/>
+            <a:r>
+              <a:rPr lang="en-US" altLang="zh-CN" sz="1000" dirty="0" smtClean="0"/>
+              <a:t>ARQ+FEC</a:t>
+            </a:r>
+            <a:r>
+              <a:rPr lang="zh-CN" altLang="en-US" sz="1000" dirty="0" smtClean="0"/>
+              <a:t>的</a:t>
+            </a:r>
+            <a:r>
+              <a:rPr lang="en-US" altLang="zh-CN" sz="1000" dirty="0" err="1" smtClean="0"/>
+              <a:t>Qos</a:t>
+            </a:r>
+            <a:r>
+              <a:rPr lang="zh-CN" altLang="en-US" sz="1000" dirty="0" smtClean="0"/>
+              <a:t>的保护</a:t>
+            </a:r>
+            <a:endParaRPr lang="zh-CN" altLang="en-US" sz="1000" dirty="0"/>
+          </a:p>
+        </p:txBody>
+      </p:sp>
+      <p:sp>
+        <p:nvSpPr>
+          <p:cNvPr id="18" name="左大括号 17"/>
+          <p:cNvSpPr/>
+          <p:nvPr/>
+        </p:nvSpPr>
+        <p:spPr>
+          <a:xfrm>
+            <a:off x="2157047" y="2719754"/>
+            <a:ext cx="250092" cy="2438400"/>
+          </a:xfrm>
+          <a:prstGeom prst="leftBrace">
+            <a:avLst/>
+          </a:prstGeom>
+        </p:spPr>
+        <p:style>
+          <a:lnRef idx="1">
+            <a:schemeClr val="accent1"/>
+          </a:lnRef>
+          <a:fillRef idx="0">
+            <a:schemeClr val="accent1"/>
+          </a:fillRef>
+          <a:effectRef idx="0">
+            <a:schemeClr val="accent1"/>
+          </a:effectRef>
+          <a:fontRef idx="minor">
+            <a:schemeClr val="tx1"/>
+          </a:fontRef>
+        </p:style>
+        <p:txBody>
+          <a:bodyPr rtlCol="0" anchor="ctr"/>
+          <a:lstStyle/>
+          <a:p>
+            <a:pPr algn="ctr"/>
+            <a:endParaRPr lang="zh-CN" altLang="en-US"/>
+          </a:p>
+        </p:txBody>
+      </p:sp>
+      <p:sp>
+        <p:nvSpPr>
+          <p:cNvPr id="19" name="左大括号 18"/>
+          <p:cNvSpPr/>
+          <p:nvPr/>
+        </p:nvSpPr>
+        <p:spPr>
+          <a:xfrm>
+            <a:off x="5968024" y="4421067"/>
+            <a:ext cx="874149" cy="702408"/>
+          </a:xfrm>
+          <a:prstGeom prst="leftBrace">
+            <a:avLst/>
+          </a:prstGeom>
+        </p:spPr>
+        <p:style>
+          <a:lnRef idx="1">
+            <a:schemeClr val="accent1"/>
+          </a:lnRef>
+          <a:fillRef idx="0">
+            <a:schemeClr val="accent1"/>
+          </a:fillRef>
+          <a:effectRef idx="0">
+            <a:schemeClr val="accent1"/>
+          </a:effectRef>
+          <a:fontRef idx="minor">
+            <a:schemeClr val="tx1"/>
+          </a:fontRef>
+        </p:style>
+        <p:txBody>
+          <a:bodyPr rtlCol="0" anchor="ctr"/>
+          <a:lstStyle/>
+          <a:p>
+            <a:pPr algn="ctr"/>
+            <a:endParaRPr lang="zh-CN" altLang="en-US"/>
+          </a:p>
+        </p:txBody>
+      </p:sp>
+      <p:sp>
+        <p:nvSpPr>
+          <p:cNvPr id="20" name="左大括号 19"/>
+          <p:cNvSpPr/>
+          <p:nvPr/>
+        </p:nvSpPr>
+        <p:spPr>
+          <a:xfrm>
+            <a:off x="5956495" y="1860610"/>
+            <a:ext cx="874149" cy="569976"/>
+          </a:xfrm>
+          <a:prstGeom prst="leftBrace">
+            <a:avLst/>
+          </a:prstGeom>
+        </p:spPr>
+        <p:style>
+          <a:lnRef idx="1">
+            <a:schemeClr val="accent1"/>
+          </a:lnRef>
+          <a:fillRef idx="0">
+            <a:schemeClr val="accent1"/>
+          </a:fillRef>
+          <a:effectRef idx="0">
+            <a:schemeClr val="accent1"/>
+          </a:effectRef>
+          <a:fontRef idx="minor">
+            <a:schemeClr val="tx1"/>
+          </a:fontRef>
+        </p:style>
+        <p:txBody>
+          <a:bodyPr rtlCol="0" anchor="ctr"/>
+          <a:lstStyle/>
+          <a:p>
+            <a:pPr algn="ctr"/>
+            <a:endParaRPr lang="zh-CN" altLang="en-US"/>
+          </a:p>
+        </p:txBody>
+      </p:sp>
+      <p:sp>
+        <p:nvSpPr>
+          <p:cNvPr id="21" name="左大括号 20"/>
+          <p:cNvSpPr/>
+          <p:nvPr/>
+        </p:nvSpPr>
+        <p:spPr>
+          <a:xfrm>
+            <a:off x="3882878" y="4505570"/>
+            <a:ext cx="874149" cy="1281723"/>
+          </a:xfrm>
+          <a:prstGeom prst="leftBrace">
+            <a:avLst/>
+          </a:prstGeom>
+        </p:spPr>
+        <p:style>
+          <a:lnRef idx="1">
+            <a:schemeClr val="accent1"/>
+          </a:lnRef>
+          <a:fillRef idx="0">
+            <a:schemeClr val="accent1"/>
+          </a:fillRef>
+          <a:effectRef idx="0">
+            <a:schemeClr val="accent1"/>
+          </a:effectRef>
+          <a:fontRef idx="minor">
+            <a:schemeClr val="tx1"/>
+          </a:fontRef>
+        </p:style>
+        <p:txBody>
+          <a:bodyPr rtlCol="0" anchor="ctr"/>
+          <a:lstStyle/>
+          <a:p>
+            <a:pPr algn="ctr"/>
+            <a:endParaRPr lang="zh-CN" altLang="en-US"/>
+          </a:p>
+        </p:txBody>
+      </p:sp>
+      <p:sp>
+        <p:nvSpPr>
+          <p:cNvPr id="22" name="左大括号 21"/>
+          <p:cNvSpPr/>
+          <p:nvPr/>
+        </p:nvSpPr>
+        <p:spPr>
+          <a:xfrm>
+            <a:off x="4005385" y="2293815"/>
+            <a:ext cx="874149" cy="1281723"/>
+          </a:xfrm>
+          <a:prstGeom prst="leftBrace">
+            <a:avLst/>
+          </a:prstGeom>
+        </p:spPr>
+        <p:style>
+          <a:lnRef idx="1">
+            <a:schemeClr val="accent1"/>
+          </a:lnRef>
+          <a:fillRef idx="0">
+            <a:schemeClr val="accent1"/>
+          </a:fillRef>
+          <a:effectRef idx="0">
+            <a:schemeClr val="accent1"/>
+          </a:effectRef>
+          <a:fontRef idx="minor">
+            <a:schemeClr val="tx1"/>
+          </a:fontRef>
+        </p:style>
+        <p:txBody>
+          <a:bodyPr rtlCol="0" anchor="ctr"/>
+          <a:lstStyle/>
+          <a:p>
+            <a:pPr algn="ctr"/>
+            <a:endParaRPr lang="zh-CN" altLang="en-US"/>
+          </a:p>
+        </p:txBody>
+      </p:sp>
+      <p:cxnSp>
+        <p:nvCxnSpPr>
+          <p:cNvPr id="24" name="直接箭头连接符 23"/>
+          <p:cNvCxnSpPr>
+            <a:endCxn id="12" idx="1"/>
+          </p:cNvCxnSpPr>
+          <p:nvPr/>
+        </p:nvCxnSpPr>
+        <p:spPr>
+          <a:xfrm>
+            <a:off x="6125895" y="3460873"/>
+            <a:ext cx="657856" cy="53425"/>
+          </a:xfrm>
+          <a:prstGeom prst="straightConnector1">
+            <a:avLst/>
+          </a:prstGeom>
+          <a:ln>
+            <a:tailEnd type="triangle"/>
+          </a:ln>
+        </p:spPr>
+        <p:style>
+          <a:lnRef idx="1">
+            <a:schemeClr val="accent1"/>
+          </a:lnRef>
+          <a:fillRef idx="0">
+            <a:schemeClr val="accent1"/>
+          </a:fillRef>
+          <a:effectRef idx="0">
+            <a:schemeClr val="accent1"/>
+          </a:effectRef>
+          <a:fontRef idx="minor">
+            <a:schemeClr val="tx1"/>
+          </a:fontRef>
+        </p:style>
+      </p:cxnSp>
+      <p:cxnSp>
+        <p:nvCxnSpPr>
+          <p:cNvPr id="26" name="直接箭头连接符 25"/>
+          <p:cNvCxnSpPr>
+            <a:stCxn id="10" idx="3"/>
+          </p:cNvCxnSpPr>
+          <p:nvPr/>
+        </p:nvCxnSpPr>
+        <p:spPr>
+          <a:xfrm>
+            <a:off x="7901354" y="1828129"/>
+            <a:ext cx="1016000" cy="165405"/>
+          </a:xfrm>
+          <a:prstGeom prst="straightConnector1">
+            <a:avLst/>
+          </a:prstGeom>
+          <a:ln>
+            <a:tailEnd type="triangle"/>
+          </a:ln>
+        </p:spPr>
+        <p:style>
+          <a:lnRef idx="1">
+            <a:schemeClr val="accent1"/>
+          </a:lnRef>
+          <a:fillRef idx="0">
+            <a:schemeClr val="accent1"/>
+          </a:fillRef>
+          <a:effectRef idx="0">
+            <a:schemeClr val="accent1"/>
+          </a:effectRef>
+          <a:fontRef idx="minor">
+            <a:schemeClr val="tx1"/>
+          </a:fontRef>
+        </p:style>
+      </p:cxnSp>
+      <p:cxnSp>
+        <p:nvCxnSpPr>
+          <p:cNvPr id="28" name="直接箭头连接符 27"/>
+          <p:cNvCxnSpPr>
+            <a:endCxn id="17" idx="1"/>
+          </p:cNvCxnSpPr>
+          <p:nvPr/>
+        </p:nvCxnSpPr>
+        <p:spPr>
+          <a:xfrm>
+            <a:off x="6125895" y="5705230"/>
+            <a:ext cx="927488" cy="359508"/>
+          </a:xfrm>
+          <a:prstGeom prst="straightConnector1">
+            <a:avLst/>
+          </a:prstGeom>
+          <a:ln>
+            <a:tailEnd type="triangle"/>
+          </a:ln>
+        </p:spPr>
+        <p:style>
+          <a:lnRef idx="1">
+            <a:schemeClr val="accent1"/>
+          </a:lnRef>
+          <a:fillRef idx="0">
+            <a:schemeClr val="accent1"/>
+          </a:fillRef>
+          <a:effectRef idx="0">
+            <a:schemeClr val="accent1"/>
+          </a:effectRef>
+          <a:fontRef idx="minor">
+            <a:schemeClr val="tx1"/>
+          </a:fontRef>
+        </p:style>
+      </p:cxnSp>
+    </p:spTree>
+  </p:cSld>
+  <p:clrMapOvr>
+    <a:masterClrMapping/>
+  </p:clrMapOvr>
+</p:sld>
+</file>
+
+<file path=ppt/slides/slide11.xml><?xml version="1.0" encoding="utf-8"?>
+<p:sld xmlns:a="http://schemas.openxmlformats.org/drawingml/2006/main" xmlns:r="http://schemas.openxmlformats.org/officeDocument/2006/relationships" xmlns:p="http://schemas.openxmlformats.org/presentationml/2006/main">
+  <p:cSld>
+    <p:spTree>
+      <p:nvGrpSpPr>
+        <p:cNvPr id="1" name=""/>
+        <p:cNvGrpSpPr/>
+        <p:nvPr/>
+      </p:nvGrpSpPr>
+      <p:grpSpPr>
+        <a:xfrm>
+          <a:off x="0" y="0"/>
+          <a:ext cx="0" cy="0"/>
+          <a:chOff x="0" y="0"/>
+          <a:chExt cx="0" cy="0"/>
+        </a:xfrm>
+      </p:grpSpPr>
+      <p:sp>
+        <p:nvSpPr>
+          <p:cNvPr id="2" name="标题 1"/>
+          <p:cNvSpPr>
+            <a:spLocks noGrp="1"/>
+          </p:cNvSpPr>
+          <p:nvPr>
+            <p:ph type="title"/>
+          </p:nvPr>
+        </p:nvSpPr>
+        <p:spPr/>
+        <p:txBody>
+          <a:bodyPr/>
+          <a:lstStyle/>
+          <a:p>
+            <a:r>
+              <a:rPr lang="zh-CN" altLang="en-US" dirty="0" smtClean="0"/>
               <a:t>响应时延优化方法 </a:t>
             </a:r>
             <a:r>
@@ -5676,11 +6714,6 @@
         </p:style>
       </p:cxnSp>
     </p:spTree>
-    <p:extLst>
-      <p:ext uri="{BB962C8B-B14F-4D97-AF65-F5344CB8AC3E}">
-        <p14:creationId xmlns:p14="http://schemas.microsoft.com/office/powerpoint/2010/main" val="1558953557"/>
-      </p:ext>
-    </p:extLst>
   </p:cSld>
   <p:clrMapOvr>
     <a:masterClrMapping/>
@@ -5738,6 +6771,13 @@
               </a:rPr>
               <a:t>云电脑平台架构</a:t>
             </a:r>
+            <a:endParaRPr lang="zh-HK" altLang="en-US" sz="3555" dirty="0">
+              <a:solidFill>
+                <a:schemeClr val="accent5">
+                  <a:lumMod val="75000"/>
+                </a:schemeClr>
+              </a:solidFill>
+            </a:endParaRPr>
           </a:p>
         </p:txBody>
       </p:sp>
@@ -5839,6 +6879,7 @@
               <a:rPr lang="zh-CN" altLang="en-US" sz="1200" dirty="0"/>
               <a:t>客户主服务</a:t>
             </a:r>
+            <a:endParaRPr lang="zh-CN" altLang="en-US" sz="1200" dirty="0"/>
           </a:p>
         </p:txBody>
       </p:sp>
@@ -5889,6 +6930,7 @@
               <a:rPr lang="en-US" altLang="zh-CN" sz="1200" dirty="0"/>
               <a:t>SDK</a:t>
             </a:r>
+            <a:endParaRPr lang="en-US" altLang="zh-CN" sz="1200" dirty="0"/>
           </a:p>
         </p:txBody>
       </p:sp>
@@ -5939,6 +6981,7 @@
               <a:rPr lang="en-US" altLang="zh-CN" sz="1200" dirty="0"/>
               <a:t>API</a:t>
             </a:r>
+            <a:endParaRPr lang="en-US" altLang="zh-CN" sz="1200" dirty="0"/>
           </a:p>
         </p:txBody>
       </p:sp>
@@ -5989,6 +7032,7 @@
               <a:rPr lang="zh-CN" altLang="zh-HK"/>
               <a:t>管理层</a:t>
             </a:r>
+            <a:endParaRPr lang="zh-CN" altLang="zh-HK"/>
           </a:p>
         </p:txBody>
       </p:sp>
@@ -6039,6 +7083,7 @@
               <a:rPr lang="zh-CN" altLang="en-US" sz="1200" dirty="0"/>
               <a:t>租户管理</a:t>
             </a:r>
+            <a:endParaRPr lang="zh-CN" altLang="en-US" sz="1200" dirty="0"/>
           </a:p>
         </p:txBody>
       </p:sp>
@@ -6089,6 +7134,7 @@
               <a:rPr lang="zh-CN" altLang="en-US" sz="1200" dirty="0"/>
               <a:t>用户管理</a:t>
             </a:r>
+            <a:endParaRPr lang="zh-CN" altLang="en-US" sz="1200" dirty="0"/>
           </a:p>
         </p:txBody>
       </p:sp>
@@ -6139,6 +7185,7 @@
               <a:rPr lang="zh-CN" altLang="en-US" sz="1200" dirty="0"/>
               <a:t>计费管理</a:t>
             </a:r>
+            <a:endParaRPr lang="zh-CN" altLang="en-US" sz="1200" dirty="0"/>
           </a:p>
         </p:txBody>
       </p:sp>
@@ -6189,6 +7236,7 @@
               <a:rPr lang="zh-CN" altLang="en-US" sz="1200" dirty="0"/>
               <a:t>认证管理</a:t>
             </a:r>
+            <a:endParaRPr lang="zh-CN" altLang="en-US" sz="1200" dirty="0"/>
           </a:p>
         </p:txBody>
       </p:sp>
@@ -6239,6 +7287,7 @@
               <a:rPr lang="zh-CN" altLang="zh-HK"/>
               <a:t>微服务平台</a:t>
             </a:r>
+            <a:endParaRPr lang="zh-CN" altLang="zh-HK"/>
           </a:p>
           <a:p>
             <a:pPr algn="ctr">
@@ -6292,6 +7341,7 @@
               <a:rPr lang="zh-CN" altLang="en-US" dirty="0"/>
               <a:t>数据库集群</a:t>
             </a:r>
+            <a:endParaRPr lang="zh-CN" altLang="en-US" dirty="0"/>
           </a:p>
         </p:txBody>
       </p:sp>
@@ -6342,6 +7392,7 @@
               <a:rPr lang="zh-CN" altLang="en-US" dirty="0"/>
               <a:t>消息中心</a:t>
             </a:r>
+            <a:endParaRPr lang="zh-CN" altLang="en-US" dirty="0"/>
           </a:p>
         </p:txBody>
       </p:sp>
@@ -6392,6 +7443,7 @@
               <a:rPr lang="zh-CN" altLang="en-US" dirty="0"/>
               <a:t>路由调度</a:t>
             </a:r>
+            <a:endParaRPr lang="zh-CN" altLang="en-US" dirty="0"/>
           </a:p>
         </p:txBody>
       </p:sp>
@@ -6442,6 +7494,7 @@
               <a:rPr lang="zh-CN" altLang="en-US" dirty="0"/>
               <a:t>微服务治理</a:t>
             </a:r>
+            <a:endParaRPr lang="zh-CN" altLang="en-US" dirty="0"/>
           </a:p>
         </p:txBody>
       </p:sp>
@@ -6492,6 +7545,7 @@
               <a:rPr lang="zh-CN" altLang="en-US" dirty="0"/>
               <a:t>监控警告</a:t>
             </a:r>
+            <a:endParaRPr lang="zh-CN" altLang="en-US" dirty="0"/>
           </a:p>
         </p:txBody>
       </p:sp>
@@ -6542,6 +7596,7 @@
               <a:rPr lang="zh-CN" altLang="en-US" dirty="0"/>
               <a:t>容灾备份</a:t>
             </a:r>
+            <a:endParaRPr lang="zh-CN" altLang="en-US" dirty="0"/>
           </a:p>
         </p:txBody>
       </p:sp>
@@ -6592,6 +7647,7 @@
               <a:rPr lang="zh-CN" altLang="en-US" dirty="0"/>
               <a:t>配置中心</a:t>
             </a:r>
+            <a:endParaRPr lang="zh-CN" altLang="en-US" dirty="0"/>
           </a:p>
         </p:txBody>
       </p:sp>
@@ -6642,6 +7698,7 @@
               <a:rPr lang="zh-CN" altLang="en-US" dirty="0"/>
               <a:t>控制台</a:t>
             </a:r>
+            <a:endParaRPr lang="zh-CN" altLang="en-US" dirty="0"/>
           </a:p>
         </p:txBody>
       </p:sp>
@@ -6692,6 +7749,7 @@
               <a:rPr lang="zh-CN" altLang="en-US" dirty="0"/>
               <a:t>负载均衡</a:t>
             </a:r>
+            <a:endParaRPr lang="zh-CN" altLang="en-US" dirty="0"/>
           </a:p>
         </p:txBody>
       </p:sp>
@@ -6742,6 +7800,7 @@
               <a:rPr lang="zh-CN" altLang="zh-HK"/>
               <a:t>系统层</a:t>
             </a:r>
+            <a:endParaRPr lang="zh-CN" altLang="zh-HK"/>
           </a:p>
           <a:p>
             <a:pPr algn="ctr">
@@ -6840,6 +7899,7 @@
               <a:rPr lang="zh-CN" altLang="zh-HK" sz="1200"/>
               <a:t>编码器</a:t>
             </a:r>
+            <a:endParaRPr lang="zh-CN" altLang="zh-HK" sz="1200"/>
           </a:p>
         </p:txBody>
       </p:sp>
@@ -6851,7 +7911,7 @@
         </p:nvSpPr>
         <p:spPr>
           <a:xfrm>
-            <a:off x="4060825" y="2757170"/>
+            <a:off x="4277360" y="2757170"/>
             <a:ext cx="2595880" cy="325755"/>
           </a:xfrm>
           <a:prstGeom prst="rect">
@@ -6882,6 +7942,11 @@
               </a:rPr>
               <a:t>CRTC</a:t>
             </a:r>
+            <a:endParaRPr lang="en-US" altLang="zh-CN">
+              <a:solidFill>
+                <a:schemeClr val="bg1"/>
+              </a:solidFill>
+            </a:endParaRPr>
           </a:p>
         </p:txBody>
       </p:sp>
@@ -6916,6 +7981,11 @@
               </a:rPr>
               <a:t>Audio/Video</a:t>
             </a:r>
+            <a:endParaRPr lang="en-US" altLang="zh-HK" sz="1200">
+              <a:solidFill>
+                <a:schemeClr val="tx1"/>
+              </a:solidFill>
+            </a:endParaRPr>
           </a:p>
         </p:txBody>
       </p:sp>
@@ -6959,6 +8029,7 @@
               <a:rPr lang="zh-CN" altLang="zh-HK" sz="1200"/>
               <a:t>图像增强</a:t>
             </a:r>
+            <a:endParaRPr lang="zh-CN" altLang="zh-HK" sz="1200"/>
           </a:p>
         </p:txBody>
       </p:sp>
@@ -7002,6 +8073,7 @@
               <a:rPr lang="zh-CN" altLang="zh-HK" sz="1200"/>
               <a:t>抖动控制</a:t>
             </a:r>
+            <a:endParaRPr lang="zh-CN" altLang="zh-HK" sz="1200"/>
           </a:p>
         </p:txBody>
       </p:sp>
@@ -7045,6 +8117,7 @@
               <a:rPr lang="zh-CN" altLang="zh-HK" sz="1200"/>
               <a:t>预处理</a:t>
             </a:r>
+            <a:endParaRPr lang="zh-CN" altLang="zh-HK" sz="1200"/>
           </a:p>
         </p:txBody>
       </p:sp>
@@ -7088,6 +8161,7 @@
               <a:rPr lang="zh-CN" altLang="zh-HK" sz="1200"/>
               <a:t>音视频同步</a:t>
             </a:r>
+            <a:endParaRPr lang="zh-CN" altLang="zh-HK" sz="1200"/>
           </a:p>
         </p:txBody>
       </p:sp>
@@ -7131,6 +8205,7 @@
               <a:rPr lang="zh-CN" altLang="zh-HK" sz="1200"/>
               <a:t>音视频采集</a:t>
             </a:r>
+            <a:endParaRPr lang="zh-CN" altLang="zh-HK" sz="1200"/>
           </a:p>
         </p:txBody>
       </p:sp>
@@ -7174,6 +8249,7 @@
               <a:rPr lang="zh-CN" altLang="zh-HK" sz="1200"/>
               <a:t>渲染</a:t>
             </a:r>
+            <a:endParaRPr lang="zh-CN" altLang="zh-HK" sz="1200"/>
           </a:p>
         </p:txBody>
       </p:sp>
@@ -7203,6 +8279,7 @@
               <a:rPr lang="zh-CN" altLang="zh-HK" sz="1200"/>
               <a:t>网络传输</a:t>
             </a:r>
+            <a:endParaRPr lang="zh-CN" altLang="zh-HK" sz="1200"/>
           </a:p>
         </p:txBody>
       </p:sp>
@@ -7290,6 +8367,7 @@
               <a:rPr lang="zh-CN" altLang="en-US" sz="1200"/>
               <a:t>带宽评估</a:t>
             </a:r>
+            <a:endParaRPr lang="zh-CN" altLang="en-US" sz="1200"/>
           </a:p>
         </p:txBody>
       </p:sp>
@@ -7381,6 +8459,7 @@
               <a:rPr lang="en-US" altLang="zh-CN" sz="1200"/>
               <a:t>IO</a:t>
             </a:r>
+            <a:endParaRPr lang="en-US" altLang="zh-CN" sz="1200"/>
           </a:p>
         </p:txBody>
       </p:sp>
@@ -7458,6 +8537,11 @@
               </a:rPr>
               <a:t>跨平台文件系统</a:t>
             </a:r>
+            <a:endParaRPr lang="zh-CN" altLang="zh-HK">
+              <a:solidFill>
+                <a:schemeClr val="bg1"/>
+              </a:solidFill>
+            </a:endParaRPr>
           </a:p>
         </p:txBody>
       </p:sp>
@@ -7530,6 +8614,7 @@
               <a:rPr lang="zh-CN" altLang="zh-HK"/>
               <a:t>高效文件传输系统</a:t>
             </a:r>
+            <a:endParaRPr lang="zh-CN" altLang="zh-HK"/>
           </a:p>
         </p:txBody>
       </p:sp>
@@ -7580,6 +8665,7 @@
               <a:rPr lang="zh-CN" altLang="en-US" sz="1200" dirty="0"/>
               <a:t>鉴权管理</a:t>
             </a:r>
+            <a:endParaRPr lang="zh-CN" altLang="en-US" sz="1200" dirty="0"/>
           </a:p>
         </p:txBody>
       </p:sp>
@@ -7628,6 +8714,7 @@
               <a:rPr lang="zh-CN" altLang="zh-HK"/>
               <a:t>内核层</a:t>
             </a:r>
+            <a:endParaRPr lang="zh-CN" altLang="zh-HK"/>
           </a:p>
         </p:txBody>
       </p:sp>
@@ -7717,6 +8804,7 @@
               <a:rPr lang="en-US" altLang="zh-HK" sz="1200"/>
               <a:t>TCP</a:t>
             </a:r>
+            <a:endParaRPr lang="en-US" altLang="zh-HK" sz="1200"/>
           </a:p>
         </p:txBody>
       </p:sp>
@@ -7746,6 +8834,7 @@
               <a:rPr lang="zh-CN" altLang="zh-HK" sz="1400"/>
               <a:t>网络传输</a:t>
             </a:r>
+            <a:endParaRPr lang="zh-CN" altLang="zh-HK" sz="1400"/>
           </a:p>
         </p:txBody>
       </p:sp>
@@ -7793,6 +8882,7 @@
               <a:rPr lang="en-US" altLang="zh-CN" sz="1200"/>
               <a:t>IO</a:t>
             </a:r>
+            <a:endParaRPr lang="en-US" altLang="zh-CN" sz="1200"/>
           </a:p>
         </p:txBody>
       </p:sp>
@@ -7822,6 +8912,7 @@
               <a:rPr lang="zh-CN" altLang="zh-HK" sz="1400"/>
               <a:t>协议层</a:t>
             </a:r>
+            <a:endParaRPr lang="zh-CN" altLang="zh-HK" sz="1400"/>
           </a:p>
         </p:txBody>
       </p:sp>
@@ -7920,6 +9011,7 @@
               <a:rPr lang="zh-CN" altLang="zh-HK" sz="1200"/>
               <a:t>高效压缩数据格式</a:t>
             </a:r>
+            <a:endParaRPr lang="zh-CN" altLang="zh-HK" sz="1200"/>
           </a:p>
         </p:txBody>
       </p:sp>
@@ -7950,6 +9042,7 @@
               <a:rPr lang="zh-CN" altLang="zh-HK" sz="1200"/>
               <a:t>网络传输</a:t>
             </a:r>
+            <a:endParaRPr lang="zh-CN" altLang="zh-HK" sz="1200"/>
           </a:p>
         </p:txBody>
       </p:sp>
@@ -8041,6 +9134,7 @@
               <a:rPr lang="en-US" altLang="zh-CN" sz="1200"/>
               <a:t>IO</a:t>
             </a:r>
+            <a:endParaRPr lang="en-US" altLang="zh-CN" sz="1200"/>
           </a:p>
         </p:txBody>
       </p:sp>
@@ -8070,6 +9164,7 @@
               <a:rPr lang="zh-CN" altLang="zh-HK" sz="1400"/>
               <a:t>协议层</a:t>
             </a:r>
+            <a:endParaRPr lang="zh-CN" altLang="zh-HK" sz="1400"/>
           </a:p>
         </p:txBody>
       </p:sp>
@@ -8113,6 +9208,7 @@
               <a:rPr lang="en-US" altLang="zh-HK" sz="1200"/>
               <a:t>P2P</a:t>
             </a:r>
+            <a:endParaRPr lang="en-US" altLang="zh-HK" sz="1200"/>
           </a:p>
         </p:txBody>
       </p:sp>
@@ -8156,6 +9252,7 @@
               <a:rPr lang="zh-CN" altLang="en-US" sz="1200"/>
               <a:t>丢包处理</a:t>
             </a:r>
+            <a:endParaRPr lang="zh-CN" altLang="en-US" sz="1200"/>
           </a:p>
         </p:txBody>
       </p:sp>
@@ -8185,6 +9282,7 @@
               <a:rPr lang="zh-CN" altLang="zh-HK" sz="1200"/>
               <a:t>容器</a:t>
             </a:r>
+            <a:endParaRPr lang="zh-CN" altLang="zh-HK" sz="1200"/>
           </a:p>
         </p:txBody>
       </p:sp>
@@ -8232,6 +9330,7 @@
               <a:rPr lang="zh-CN" altLang="en-US" sz="1200"/>
               <a:t>沙盒</a:t>
             </a:r>
+            <a:endParaRPr lang="zh-CN" altLang="en-US" sz="1200"/>
           </a:p>
         </p:txBody>
       </p:sp>
@@ -8279,6 +9378,7 @@
               <a:rPr lang="zh-CN" altLang="en-US" sz="1200"/>
               <a:t>容器</a:t>
             </a:r>
+            <a:endParaRPr lang="zh-CN" altLang="en-US" sz="1200"/>
           </a:p>
         </p:txBody>
       </p:sp>
@@ -8322,6 +9422,7 @@
               <a:rPr lang="zh-CN" sz="1200"/>
               <a:t>设备多实例化</a:t>
             </a:r>
+            <a:endParaRPr lang="zh-CN" sz="1200"/>
           </a:p>
         </p:txBody>
       </p:sp>
@@ -8365,6 +9466,7 @@
               <a:rPr lang="zh-CN" sz="1200"/>
               <a:t>资源隔离</a:t>
             </a:r>
+            <a:endParaRPr lang="zh-CN" sz="1200"/>
           </a:p>
         </p:txBody>
       </p:sp>
@@ -8440,6 +9542,7 @@
               <a:rPr lang="zh-CN" altLang="zh-HK" sz="1400"/>
               <a:t>云端虚拟设备映射</a:t>
             </a:r>
+            <a:endParaRPr lang="zh-CN" altLang="zh-HK" sz="1400"/>
           </a:p>
         </p:txBody>
       </p:sp>
@@ -8483,6 +9586,7 @@
               <a:rPr lang="zh-CN" altLang="zh-HK" sz="1200"/>
               <a:t>虚拟设备通信协议接口</a:t>
             </a:r>
+            <a:endParaRPr lang="zh-CN" altLang="zh-HK" sz="1200"/>
           </a:p>
         </p:txBody>
       </p:sp>
@@ -8526,6 +9630,7 @@
               <a:rPr lang="zh-CN" altLang="zh-HK" sz="1200"/>
               <a:t>设备虚拟化</a:t>
             </a:r>
+            <a:endParaRPr lang="zh-CN" altLang="zh-HK" sz="1200"/>
           </a:p>
         </p:txBody>
       </p:sp>
@@ -8569,6 +9674,7 @@
               <a:rPr lang="zh-CN" altLang="zh-HK" sz="1200"/>
               <a:t>外设设备数据注入</a:t>
             </a:r>
+            <a:endParaRPr lang="zh-CN" altLang="zh-HK" sz="1200"/>
           </a:p>
         </p:txBody>
       </p:sp>
@@ -8612,6 +9718,7 @@
               <a:rPr lang="zh-CN" altLang="zh-HK" sz="1200"/>
               <a:t>设备地址空间转换</a:t>
             </a:r>
+            <a:endParaRPr lang="zh-CN" altLang="zh-HK" sz="1200"/>
           </a:p>
         </p:txBody>
       </p:sp>
@@ -8690,6 +9797,11 @@
               </a:rPr>
               <a:t>大数据平台</a:t>
             </a:r>
+            <a:endParaRPr lang="zh-CN" altLang="zh-HK" sz="1400">
+              <a:solidFill>
+                <a:schemeClr val="bg1"/>
+              </a:solidFill>
+            </a:endParaRPr>
           </a:p>
         </p:txBody>
       </p:sp>
@@ -8733,6 +9845,7 @@
               <a:rPr lang="zh-CN" altLang="zh-HK" sz="1200"/>
               <a:t>大数据接口层</a:t>
             </a:r>
+            <a:endParaRPr lang="zh-CN" altLang="zh-HK" sz="1200"/>
           </a:p>
         </p:txBody>
       </p:sp>
@@ -8776,6 +9889,7 @@
               <a:rPr lang="zh-CN" altLang="zh-HK" sz="1200"/>
               <a:t>大数据存储</a:t>
             </a:r>
+            <a:endParaRPr lang="zh-CN" altLang="zh-HK" sz="1200"/>
           </a:p>
         </p:txBody>
       </p:sp>
@@ -8819,6 +9933,7 @@
               <a:rPr lang="zh-CN" altLang="zh-HK" sz="1200"/>
               <a:t>数据处理与分析</a:t>
             </a:r>
+            <a:endParaRPr lang="zh-CN" altLang="zh-HK" sz="1200"/>
           </a:p>
         </p:txBody>
       </p:sp>
@@ -8897,6 +10012,11 @@
               </a:rPr>
               <a:t>智能运营平台</a:t>
             </a:r>
+            <a:endParaRPr lang="zh-CN" altLang="zh-HK" sz="1200">
+              <a:solidFill>
+                <a:schemeClr val="bg1"/>
+              </a:solidFill>
+            </a:endParaRPr>
           </a:p>
         </p:txBody>
       </p:sp>
@@ -8940,6 +10060,7 @@
               <a:rPr lang="zh-CN" altLang="zh-HK" sz="1000"/>
               <a:t>统一门户入口</a:t>
             </a:r>
+            <a:endParaRPr lang="zh-CN" altLang="zh-HK" sz="1000"/>
           </a:p>
         </p:txBody>
       </p:sp>
@@ -8983,6 +10104,7 @@
               <a:rPr lang="zh-CN" altLang="zh-HK" sz="1000"/>
               <a:t>集中报警平台</a:t>
             </a:r>
+            <a:endParaRPr lang="zh-CN" altLang="zh-HK" sz="1000"/>
           </a:p>
         </p:txBody>
       </p:sp>
@@ -9026,6 +10148,7 @@
               <a:rPr lang="zh-CN" altLang="zh-HK" sz="1000"/>
               <a:t>服务流程管理</a:t>
             </a:r>
+            <a:endParaRPr lang="zh-CN" altLang="zh-HK" sz="1000"/>
           </a:p>
         </p:txBody>
       </p:sp>
@@ -9069,6 +10192,7 @@
               <a:rPr lang="zh-CN" altLang="zh-HK" sz="1000"/>
               <a:t>配置中心</a:t>
             </a:r>
+            <a:endParaRPr lang="zh-CN" altLang="zh-HK" sz="1000"/>
           </a:p>
         </p:txBody>
       </p:sp>
@@ -9112,6 +10236,7 @@
               <a:rPr lang="zh-CN" altLang="zh-HK" sz="1000"/>
               <a:t>资产管理</a:t>
             </a:r>
+            <a:endParaRPr lang="zh-CN" altLang="zh-HK" sz="1000"/>
           </a:p>
         </p:txBody>
       </p:sp>
@@ -9155,6 +10280,7 @@
               <a:rPr lang="zh-CN" altLang="zh-HK" sz="800"/>
               <a:t>数据及消息中间件</a:t>
             </a:r>
+            <a:endParaRPr lang="zh-CN" altLang="zh-HK" sz="800"/>
           </a:p>
         </p:txBody>
       </p:sp>
@@ -9943,6 +11069,7 @@
               <a:rPr lang="en-US" altLang="zh-CN" dirty="0" smtClean="0"/>
               <a:t>CRTC  Streamer</a:t>
             </a:r>
+            <a:endParaRPr lang="en-US" altLang="zh-CN" dirty="0" smtClean="0"/>
           </a:p>
         </p:txBody>
       </p:sp>
@@ -10659,11 +11786,6 @@
         </p:txBody>
       </p:sp>
     </p:spTree>
-    <p:extLst>
-      <p:ext uri="{BB962C8B-B14F-4D97-AF65-F5344CB8AC3E}">
-        <p14:creationId xmlns:p14="http://schemas.microsoft.com/office/powerpoint/2010/main" val="1500479185"/>
-      </p:ext>
-    </p:extLst>
   </p:cSld>
   <p:clrMapOvr>
     <a:masterClrMapping/>
@@ -10745,7 +11867,11 @@
         <p:nvSpPr>
           <p:cNvPr id="4" name="矩形 3"/>
           <p:cNvSpPr/>
-          <p:nvPr/>
+          <p:nvPr>
+            <p:custDataLst>
+              <p:tags r:id="rId1"/>
+            </p:custDataLst>
+          </p:nvPr>
         </p:nvSpPr>
         <p:spPr>
           <a:xfrm>
@@ -10789,7 +11915,11 @@
         <p:nvSpPr>
           <p:cNvPr id="6" name="矩形 5"/>
           <p:cNvSpPr/>
-          <p:nvPr/>
+          <p:nvPr>
+            <p:custDataLst>
+              <p:tags r:id="rId2"/>
+            </p:custDataLst>
+          </p:nvPr>
         </p:nvSpPr>
         <p:spPr>
           <a:xfrm>
@@ -10833,7 +11963,11 @@
         <p:nvSpPr>
           <p:cNvPr id="8" name="矩形 7"/>
           <p:cNvSpPr/>
-          <p:nvPr/>
+          <p:nvPr>
+            <p:custDataLst>
+              <p:tags r:id="rId3"/>
+            </p:custDataLst>
+          </p:nvPr>
         </p:nvSpPr>
         <p:spPr>
           <a:xfrm>
@@ -10877,7 +12011,11 @@
         <p:nvSpPr>
           <p:cNvPr id="10" name="矩形 9"/>
           <p:cNvSpPr/>
-          <p:nvPr/>
+          <p:nvPr>
+            <p:custDataLst>
+              <p:tags r:id="rId4"/>
+            </p:custDataLst>
+          </p:nvPr>
         </p:nvSpPr>
         <p:spPr>
           <a:xfrm>
@@ -10921,7 +12059,11 @@
         <p:nvSpPr>
           <p:cNvPr id="11" name="矩形 10"/>
           <p:cNvSpPr/>
-          <p:nvPr/>
+          <p:nvPr>
+            <p:custDataLst>
+              <p:tags r:id="rId5"/>
+            </p:custDataLst>
+          </p:nvPr>
         </p:nvSpPr>
         <p:spPr>
           <a:xfrm>
@@ -10965,7 +12107,11 @@
         <p:nvSpPr>
           <p:cNvPr id="12" name="矩形 11"/>
           <p:cNvSpPr/>
-          <p:nvPr/>
+          <p:nvPr>
+            <p:custDataLst>
+              <p:tags r:id="rId6"/>
+            </p:custDataLst>
+          </p:nvPr>
         </p:nvSpPr>
         <p:spPr>
           <a:xfrm>
@@ -11006,11 +12152,6 @@
         </p:txBody>
       </p:sp>
     </p:spTree>
-    <p:extLst>
-      <p:ext uri="{BB962C8B-B14F-4D97-AF65-F5344CB8AC3E}">
-        <p14:creationId xmlns:p14="http://schemas.microsoft.com/office/powerpoint/2010/main" val="1633339700"/>
-      </p:ext>
-    </p:extLst>
   </p:cSld>
   <p:clrMapOvr>
     <a:masterClrMapping/>
@@ -11317,11 +12458,6 @@
         </p:txBody>
       </p:sp>
     </p:spTree>
-    <p:extLst>
-      <p:ext uri="{BB962C8B-B14F-4D97-AF65-F5344CB8AC3E}">
-        <p14:creationId xmlns:p14="http://schemas.microsoft.com/office/powerpoint/2010/main" val="1302003915"/>
-      </p:ext>
-    </p:extLst>
   </p:cSld>
   <p:clrMapOvr>
     <a:masterClrMapping/>
@@ -12141,11 +13277,6 @@
         </p:txBody>
       </p:sp>
     </p:spTree>
-    <p:extLst>
-      <p:ext uri="{BB962C8B-B14F-4D97-AF65-F5344CB8AC3E}">
-        <p14:creationId xmlns:p14="http://schemas.microsoft.com/office/powerpoint/2010/main" val="4068315142"/>
-      </p:ext>
-    </p:extLst>
   </p:cSld>
   <p:clrMapOvr>
     <a:masterClrMapping/>
@@ -13739,11 +14870,6 @@
         </p:txBody>
       </p:sp>
     </p:spTree>
-    <p:extLst>
-      <p:ext uri="{BB962C8B-B14F-4D97-AF65-F5344CB8AC3E}">
-        <p14:creationId xmlns:p14="http://schemas.microsoft.com/office/powerpoint/2010/main" val="4201039141"/>
-      </p:ext>
-    </p:extLst>
   </p:cSld>
   <p:clrMapOvr>
     <a:masterClrMapping/>
@@ -13760,14 +14886,7 @@
         <p:cNvGrpSpPr/>
         <p:nvPr/>
       </p:nvGrpSpPr>
-      <p:grpSpPr>
-        <a:xfrm>
-          <a:off x="0" y="0"/>
-          <a:ext cx="0" cy="0"/>
-          <a:chOff x="0" y="0"/>
-          <a:chExt cx="0" cy="0"/>
-        </a:xfrm>
-      </p:grpSpPr>
+      <p:grpSpPr/>
       <p:sp>
         <p:nvSpPr>
           <p:cNvPr id="2" name="标题 1"/>
@@ -13778,261 +14897,2120 @@
             <p:ph type="title"/>
           </p:nvPr>
         </p:nvSpPr>
-        <p:spPr>
-          <a:xfrm>
-            <a:off x="-1" y="0"/>
-            <a:ext cx="12301415" cy="1813169"/>
-          </a:xfrm>
-          <a:solidFill>
-            <a:srgbClr val="00B050"/>
-          </a:solidFill>
-        </p:spPr>
+        <p:spPr/>
         <p:txBody>
           <a:bodyPr/>
-          <a:lstStyle/>
-          <a:p>
-            <a:r>
-              <a:rPr lang="zh-CN" altLang="en-US" dirty="0" smtClean="0"/>
-              <a:t>影响时延的关键因素</a:t>
-            </a:r>
-            <a:endParaRPr lang="zh-CN" altLang="en-US" dirty="0"/>
-          </a:p>
-        </p:txBody>
-      </p:sp>
-      <p:sp>
-        <p:nvSpPr>
-          <p:cNvPr id="4" name="矩形 3"/>
-          <p:cNvSpPr/>
-          <p:nvPr/>
-        </p:nvSpPr>
-        <p:spPr>
-          <a:xfrm>
-            <a:off x="2258645" y="2563447"/>
-            <a:ext cx="1273907" cy="914400"/>
+          <a:p>
+            <a:endParaRPr lang="zh-CN" altLang="en-US"/>
+          </a:p>
+        </p:txBody>
+      </p:sp>
+      <p:sp>
+        <p:nvSpPr>
+          <p:cNvPr id="3" name="内容占位符 2"/>
+          <p:cNvSpPr>
+            <a:spLocks noGrp="1"/>
+          </p:cNvSpPr>
+          <p:nvPr>
+            <p:ph idx="1"/>
+          </p:nvPr>
+        </p:nvSpPr>
+        <p:spPr/>
+        <p:txBody>
+          <a:bodyPr/>
+          <a:p>
+            <a:endParaRPr lang="zh-CN" altLang="en-US"/>
+          </a:p>
+        </p:txBody>
+      </p:sp>
+      <p:sp>
+        <p:nvSpPr>
+          <p:cNvPr id="5" name="文本框 4"/>
+          <p:cNvSpPr txBox="1"/>
+          <p:nvPr/>
+        </p:nvSpPr>
+        <p:spPr>
+          <a:xfrm>
+            <a:off x="1980565" y="6054090"/>
+            <a:ext cx="5080000" cy="321945"/>
           </a:xfrm>
           <a:prstGeom prst="rect">
             <a:avLst/>
           </a:prstGeom>
         </p:spPr>
-        <p:style>
-          <a:lnRef idx="2">
-            <a:schemeClr val="accent1">
-              <a:shade val="50000"/>
-            </a:schemeClr>
-          </a:lnRef>
-          <a:fillRef idx="1">
-            <a:schemeClr val="accent1"/>
-          </a:fillRef>
-          <a:effectRef idx="0">
-            <a:schemeClr val="accent1"/>
-          </a:effectRef>
-          <a:fontRef idx="minor">
-            <a:schemeClr val="lt1"/>
-          </a:fontRef>
-        </p:style>
-        <p:txBody>
-          <a:bodyPr rtlCol="0" anchor="ctr"/>
-          <a:lstStyle/>
-          <a:p>
-            <a:pPr algn="ctr"/>
-            <a:r>
-              <a:rPr lang="zh-CN" altLang="en-US" dirty="0" smtClean="0"/>
-              <a:t>云电脑渲染时延</a:t>
-            </a:r>
-            <a:endParaRPr lang="zh-CN" altLang="en-US" dirty="0"/>
-          </a:p>
-        </p:txBody>
-      </p:sp>
-      <p:sp>
-        <p:nvSpPr>
-          <p:cNvPr id="5" name="矩形 4"/>
-          <p:cNvSpPr/>
-          <p:nvPr/>
-        </p:nvSpPr>
-        <p:spPr>
-          <a:xfrm>
-            <a:off x="5029199" y="2571262"/>
-            <a:ext cx="1273907" cy="832339"/>
-          </a:xfrm>
-          <a:prstGeom prst="rect">
-            <a:avLst/>
-          </a:prstGeom>
-        </p:spPr>
-        <p:style>
-          <a:lnRef idx="2">
-            <a:schemeClr val="accent1">
-              <a:shade val="50000"/>
-            </a:schemeClr>
-          </a:lnRef>
-          <a:fillRef idx="1">
-            <a:schemeClr val="accent1"/>
-          </a:fillRef>
-          <a:effectRef idx="0">
-            <a:schemeClr val="accent1"/>
-          </a:effectRef>
-          <a:fontRef idx="minor">
-            <a:schemeClr val="lt1"/>
-          </a:fontRef>
-        </p:style>
-        <p:txBody>
-          <a:bodyPr rtlCol="0" anchor="ctr"/>
-          <a:lstStyle/>
-          <a:p>
-            <a:pPr algn="ctr"/>
-            <a:r>
-              <a:rPr lang="zh-CN" altLang="en-US" dirty="0" smtClean="0"/>
-              <a:t>视频编解码时延</a:t>
-            </a:r>
-            <a:endParaRPr lang="zh-CN" altLang="en-US" dirty="0"/>
-          </a:p>
-        </p:txBody>
-      </p:sp>
-      <p:sp>
-        <p:nvSpPr>
-          <p:cNvPr id="6" name="矩形 5"/>
-          <p:cNvSpPr/>
-          <p:nvPr/>
-        </p:nvSpPr>
-        <p:spPr>
-          <a:xfrm>
-            <a:off x="7487137" y="2563447"/>
-            <a:ext cx="1273907" cy="832339"/>
-          </a:xfrm>
-          <a:prstGeom prst="rect">
-            <a:avLst/>
-          </a:prstGeom>
-        </p:spPr>
-        <p:style>
-          <a:lnRef idx="2">
-            <a:schemeClr val="accent1">
-              <a:shade val="50000"/>
-            </a:schemeClr>
-          </a:lnRef>
-          <a:fillRef idx="1">
-            <a:schemeClr val="accent1"/>
-          </a:fillRef>
-          <a:effectRef idx="0">
-            <a:schemeClr val="accent1"/>
-          </a:effectRef>
-          <a:fontRef idx="minor">
-            <a:schemeClr val="lt1"/>
-          </a:fontRef>
-        </p:style>
-        <p:txBody>
-          <a:bodyPr rtlCol="0" anchor="ctr"/>
-          <a:lstStyle/>
-          <a:p>
-            <a:pPr algn="ctr"/>
-            <a:r>
-              <a:rPr lang="zh-CN" altLang="en-US" dirty="0" smtClean="0"/>
-              <a:t>网络时延和掉包</a:t>
-            </a:r>
-            <a:endParaRPr lang="zh-CN" altLang="en-US" dirty="0"/>
-          </a:p>
-        </p:txBody>
-      </p:sp>
-      <p:sp>
-        <p:nvSpPr>
-          <p:cNvPr id="7" name="矩形 6"/>
-          <p:cNvSpPr/>
-          <p:nvPr/>
-        </p:nvSpPr>
-        <p:spPr>
-          <a:xfrm>
-            <a:off x="3755292" y="4280268"/>
-            <a:ext cx="1273907" cy="914400"/>
-          </a:xfrm>
-          <a:prstGeom prst="rect">
-            <a:avLst/>
-          </a:prstGeom>
-        </p:spPr>
-        <p:style>
-          <a:lnRef idx="2">
-            <a:schemeClr val="accent1">
-              <a:shade val="50000"/>
-            </a:schemeClr>
-          </a:lnRef>
-          <a:fillRef idx="1">
-            <a:schemeClr val="accent1"/>
-          </a:fillRef>
-          <a:effectRef idx="0">
-            <a:schemeClr val="accent1"/>
-          </a:effectRef>
-          <a:fontRef idx="minor">
-            <a:schemeClr val="lt1"/>
-          </a:fontRef>
-        </p:style>
-        <p:txBody>
-          <a:bodyPr rtlCol="0" anchor="ctr"/>
-          <a:lstStyle/>
-          <a:p>
-            <a:pPr algn="ctr"/>
-            <a:r>
-              <a:rPr lang="zh-CN" altLang="en-US" dirty="0" smtClean="0"/>
-              <a:t>渲染</a:t>
-            </a:r>
-            <a:r>
-              <a:rPr lang="en-US" altLang="zh-CN" dirty="0" smtClean="0"/>
-              <a:t>/</a:t>
-            </a:r>
-            <a:r>
-              <a:rPr lang="zh-CN" altLang="en-US" dirty="0" smtClean="0"/>
-              <a:t>显示帧率</a:t>
-            </a:r>
-            <a:endParaRPr lang="zh-CN" altLang="en-US" dirty="0"/>
-          </a:p>
-        </p:txBody>
-      </p:sp>
-      <p:sp>
-        <p:nvSpPr>
-          <p:cNvPr id="8" name="矩形 7"/>
-          <p:cNvSpPr/>
-          <p:nvPr/>
-        </p:nvSpPr>
-        <p:spPr>
-          <a:xfrm>
-            <a:off x="6596185" y="4268545"/>
-            <a:ext cx="1273907" cy="914400"/>
-          </a:xfrm>
-          <a:prstGeom prst="rect">
-            <a:avLst/>
-          </a:prstGeom>
-        </p:spPr>
-        <p:style>
-          <a:lnRef idx="2">
-            <a:schemeClr val="accent1">
-              <a:shade val="50000"/>
-            </a:schemeClr>
-          </a:lnRef>
-          <a:fillRef idx="1">
-            <a:schemeClr val="accent1"/>
-          </a:fillRef>
-          <a:effectRef idx="0">
-            <a:schemeClr val="accent1"/>
-          </a:effectRef>
-          <a:fontRef idx="minor">
-            <a:schemeClr val="lt1"/>
-          </a:fontRef>
-        </p:style>
-        <p:txBody>
-          <a:bodyPr rtlCol="0" anchor="ctr"/>
-          <a:lstStyle/>
-          <a:p>
-            <a:pPr algn="ctr"/>
-            <a:r>
-              <a:rPr lang="zh-CN" altLang="en-US" dirty="0" smtClean="0"/>
-              <a:t>按键采集帧率</a:t>
-            </a:r>
-            <a:endParaRPr lang="zh-CN" altLang="en-US" dirty="0"/>
-          </a:p>
-        </p:txBody>
-      </p:sp>
+        <p:txBody>
+          <a:bodyPr>
+            <a:spAutoFit/>
+          </a:bodyPr>
+          <a:p>
+            <a:pPr marL="0" indent="0" algn="just" defTabSz="266700">
+              <a:spcBef>
+                <a:spcPct val="0"/>
+              </a:spcBef>
+              <a:spcAft>
+                <a:spcPct val="0"/>
+              </a:spcAft>
+            </a:pPr>
+            <a:r>
+              <a:rPr lang="en-US" altLang="zh-CN" sz="1500" b="1">
+                <a:solidFill>
+                  <a:srgbClr val="0F1115"/>
+                </a:solidFill>
+                <a:latin typeface="Segoe UI" panose="020B0502040204020203"/>
+                <a:ea typeface="SimSun" panose="02010600030101010101" pitchFamily="2" charset="-122"/>
+              </a:rPr>
+              <a:t> </a:t>
+            </a:r>
+            <a:endParaRPr lang="en-US" altLang="zh-CN"/>
+          </a:p>
+        </p:txBody>
+      </p:sp>
+      <p:graphicFrame>
+        <p:nvGraphicFramePr>
+          <p:cNvPr id="6" name="表格 5"/>
+          <p:cNvGraphicFramePr/>
+          <p:nvPr/>
+        </p:nvGraphicFramePr>
+        <p:xfrm>
+          <a:off x="1432878" y="1463040"/>
+          <a:ext cx="9326245" cy="0"/>
+        </p:xfrm>
+        <a:graphic>
+          <a:graphicData uri="http://schemas.openxmlformats.org/drawingml/2006/table">
+            <a:tbl>
+              <a:tblPr/>
+              <a:tblGrid>
+                <a:gridCol w="847725"/>
+                <a:gridCol w="2743200"/>
+                <a:gridCol w="5735320"/>
+              </a:tblGrid>
+              <a:tr h="0">
+                <a:tc>
+                  <a:txBody>
+                    <a:bodyPr/>
+                    <a:p>
+                      <a:pPr marL="0" indent="0" algn="l">
+                        <a:spcBef>
+                          <a:spcPts val="500"/>
+                        </a:spcBef>
+                        <a:spcAft>
+                          <a:spcPts val="500"/>
+                        </a:spcAft>
+                      </a:pPr>
+                      <a:r>
+                        <a:rPr lang="en-US" altLang="zh-CN" sz="1500" b="1">
+                          <a:solidFill>
+                            <a:srgbClr val="0F1115"/>
+                          </a:solidFill>
+                          <a:latin typeface="Segoe UI" panose="020B0502040204020203"/>
+                          <a:ea typeface="Segoe UI" panose="020B0502040204020203"/>
+                        </a:rPr>
+                        <a:t> </a:t>
+                      </a:r>
+                      <a:r>
+                        <a:rPr lang="zh-CN" altLang="en-US" sz="1100">
+                          <a:solidFill>
+                            <a:srgbClr val="0F1115"/>
+                          </a:solidFill>
+                          <a:latin typeface="Segoe UI" panose="020B0502040204020203"/>
+                          <a:ea typeface="Segoe UI" panose="020B0502040204020203"/>
+                        </a:rPr>
+                        <a:t>组件</a:t>
+                      </a:r>
+                      <a:endParaRPr lang="zh-CN" altLang="en-US" sz="1100">
+                        <a:solidFill>
+                          <a:srgbClr val="0F1115"/>
+                        </a:solidFill>
+                        <a:latin typeface="Segoe UI" panose="020B0502040204020203"/>
+                        <a:ea typeface="Segoe UI" panose="020B0502040204020203"/>
+                      </a:endParaRPr>
+                    </a:p>
+                  </a:txBody>
+                  <a:tcPr marL="0" marR="152400" marT="95250" marB="95250" anchor="ctr" anchorCtr="0">
+                    <a:lnL>
+                      <a:noFill/>
+                    </a:lnL>
+                    <a:lnR>
+                      <a:noFill/>
+                    </a:lnR>
+                    <a:lnT>
+                      <a:noFill/>
+                    </a:lnT>
+                    <a:lnB>
+                      <a:noFill/>
+                    </a:lnB>
+                    <a:solidFill>
+                      <a:srgbClr val="FFFFFF"/>
+                    </a:solidFill>
+                  </a:tcPr>
+                </a:tc>
+                <a:tc>
+                  <a:txBody>
+                    <a:bodyPr/>
+                    <a:p>
+                      <a:pPr marL="0" indent="0" algn="l">
+                        <a:spcBef>
+                          <a:spcPts val="500"/>
+                        </a:spcBef>
+                        <a:spcAft>
+                          <a:spcPts val="500"/>
+                        </a:spcAft>
+                      </a:pPr>
+                      <a:r>
+                        <a:rPr lang="zh-CN" altLang="en-US" sz="1100">
+                          <a:solidFill>
+                            <a:srgbClr val="0F1115"/>
+                          </a:solidFill>
+                          <a:latin typeface="Segoe UI" panose="020B0502040204020203"/>
+                          <a:ea typeface="Segoe UI" panose="020B0502040204020203"/>
+                        </a:rPr>
+                        <a:t>推荐配置</a:t>
+                      </a:r>
+                      <a:endParaRPr lang="zh-CN" altLang="en-US" sz="1100">
+                        <a:solidFill>
+                          <a:srgbClr val="0F1115"/>
+                        </a:solidFill>
+                        <a:latin typeface="Segoe UI" panose="020B0502040204020203"/>
+                        <a:ea typeface="Segoe UI" panose="020B0502040204020203"/>
+                      </a:endParaRPr>
+                    </a:p>
+                  </a:txBody>
+                  <a:tcPr marL="152400" marR="152400" marT="95250" marB="95250" anchor="ctr" anchorCtr="0">
+                    <a:lnL>
+                      <a:noFill/>
+                    </a:lnL>
+                    <a:lnR>
+                      <a:noFill/>
+                    </a:lnR>
+                    <a:lnT>
+                      <a:noFill/>
+                    </a:lnT>
+                    <a:lnB>
+                      <a:noFill/>
+                    </a:lnB>
+                    <a:solidFill>
+                      <a:srgbClr val="FFFFFF"/>
+                    </a:solidFill>
+                  </a:tcPr>
+                </a:tc>
+                <a:tc>
+                  <a:txBody>
+                    <a:bodyPr/>
+                    <a:p>
+                      <a:pPr marL="0" indent="0" algn="l">
+                        <a:spcBef>
+                          <a:spcPts val="500"/>
+                        </a:spcBef>
+                        <a:spcAft>
+                          <a:spcPts val="500"/>
+                        </a:spcAft>
+                      </a:pPr>
+                      <a:r>
+                        <a:rPr lang="zh-CN" altLang="en-US" sz="1100">
+                          <a:solidFill>
+                            <a:srgbClr val="0F1115"/>
+                          </a:solidFill>
+                          <a:latin typeface="Segoe UI" panose="020B0502040204020203"/>
+                          <a:ea typeface="Segoe UI" panose="020B0502040204020203"/>
+                        </a:rPr>
+                        <a:t>说明</a:t>
+                      </a:r>
+                      <a:endParaRPr lang="zh-CN" altLang="en-US" sz="1100">
+                        <a:solidFill>
+                          <a:srgbClr val="0F1115"/>
+                        </a:solidFill>
+                        <a:latin typeface="Segoe UI" panose="020B0502040204020203"/>
+                        <a:ea typeface="Segoe UI" panose="020B0502040204020203"/>
+                      </a:endParaRPr>
+                    </a:p>
+                  </a:txBody>
+                  <a:tcPr marL="152400" marR="152400" marT="95250" marB="95250" anchor="ctr" anchorCtr="0">
+                    <a:lnL>
+                      <a:noFill/>
+                    </a:lnL>
+                    <a:lnR>
+                      <a:noFill/>
+                    </a:lnR>
+                    <a:lnT>
+                      <a:noFill/>
+                    </a:lnT>
+                    <a:lnB>
+                      <a:noFill/>
+                    </a:lnB>
+                    <a:solidFill>
+                      <a:srgbClr val="FFFFFF"/>
+                    </a:solidFill>
+                  </a:tcPr>
+                </a:tc>
+              </a:tr>
+              <a:tr h="0">
+                <a:tc>
+                  <a:txBody>
+                    <a:bodyPr/>
+                    <a:p>
+                      <a:pPr marL="0" indent="0" algn="l">
+                        <a:spcBef>
+                          <a:spcPts val="500"/>
+                        </a:spcBef>
+                        <a:spcAft>
+                          <a:spcPts val="500"/>
+                        </a:spcAft>
+                      </a:pPr>
+                      <a:r>
+                        <a:rPr lang="en-US" altLang="zh-CN" sz="1100" b="1">
+                          <a:solidFill>
+                            <a:srgbClr val="0F1115"/>
+                          </a:solidFill>
+                          <a:latin typeface="Segoe UI" panose="020B0502040204020203"/>
+                          <a:ea typeface="Segoe UI" panose="020B0502040204020203"/>
+                        </a:rPr>
+                        <a:t>CPU</a:t>
+                      </a:r>
+                      <a:endParaRPr lang="en-US" altLang="zh-CN" sz="1100" b="1">
+                        <a:solidFill>
+                          <a:srgbClr val="0F1115"/>
+                        </a:solidFill>
+                        <a:latin typeface="Segoe UI" panose="020B0502040204020203"/>
+                        <a:ea typeface="Segoe UI" panose="020B0502040204020203"/>
+                      </a:endParaRPr>
+                    </a:p>
+                  </a:txBody>
+                  <a:tcPr marL="0" marR="152400" marT="95250" marB="95250" anchor="ctr" anchorCtr="0">
+                    <a:lnL>
+                      <a:noFill/>
+                    </a:lnL>
+                    <a:lnR>
+                      <a:noFill/>
+                    </a:lnR>
+                    <a:lnT>
+                      <a:noFill/>
+                    </a:lnT>
+                    <a:lnB>
+                      <a:noFill/>
+                    </a:lnB>
+                    <a:solidFill>
+                      <a:srgbClr val="FFFFFF"/>
+                    </a:solidFill>
+                  </a:tcPr>
+                </a:tc>
+                <a:tc>
+                  <a:txBody>
+                    <a:bodyPr/>
+                    <a:p>
+                      <a:pPr marL="0" indent="0" algn="l">
+                        <a:spcBef>
+                          <a:spcPts val="500"/>
+                        </a:spcBef>
+                        <a:spcAft>
+                          <a:spcPts val="500"/>
+                        </a:spcAft>
+                      </a:pPr>
+                      <a:r>
+                        <a:rPr lang="en-US" altLang="zh-CN" sz="1100" b="1">
+                          <a:solidFill>
+                            <a:srgbClr val="0F1115"/>
+                          </a:solidFill>
+                          <a:latin typeface="Segoe UI" panose="020B0502040204020203"/>
+                          <a:ea typeface="Segoe UI" panose="020B0502040204020203"/>
+                        </a:rPr>
+                        <a:t>10</a:t>
+                      </a:r>
+                      <a:r>
+                        <a:rPr lang="zh-CN" altLang="en-US" sz="1100" b="1">
+                          <a:solidFill>
+                            <a:srgbClr val="0F1115"/>
+                          </a:solidFill>
+                          <a:latin typeface="Segoe UI" panose="020B0502040204020203"/>
+                          <a:ea typeface="Segoe UI" panose="020B0502040204020203"/>
+                        </a:rPr>
+                        <a:t>核</a:t>
+                      </a:r>
+                      <a:r>
+                        <a:rPr lang="en-US" altLang="zh-CN" sz="1100" b="1">
+                          <a:solidFill>
+                            <a:srgbClr val="0F1115"/>
+                          </a:solidFill>
+                          <a:latin typeface="Segoe UI" panose="020B0502040204020203"/>
+                          <a:ea typeface="Segoe UI" panose="020B0502040204020203"/>
+                        </a:rPr>
+                        <a:t>20</a:t>
+                      </a:r>
+                      <a:r>
+                        <a:rPr lang="zh-CN" altLang="en-US" sz="1100" b="1">
+                          <a:solidFill>
+                            <a:srgbClr val="0F1115"/>
+                          </a:solidFill>
+                          <a:latin typeface="Segoe UI" panose="020B0502040204020203"/>
+                          <a:ea typeface="Segoe UI" panose="020B0502040204020203"/>
+                        </a:rPr>
+                        <a:t>线程及以上</a:t>
+                      </a:r>
+                      <a:r>
+                        <a:rPr lang="zh-CN" altLang="en-US" sz="1100">
+                          <a:solidFill>
+                            <a:srgbClr val="0F1115"/>
+                          </a:solidFill>
+                          <a:latin typeface="Segoe UI" panose="020B0502040204020203"/>
+                          <a:ea typeface="Segoe UI" panose="020B0502040204020203"/>
+                        </a:rPr>
+                        <a:t>（例如</a:t>
+                      </a:r>
+                      <a:r>
+                        <a:rPr lang="en-US" altLang="zh-CN" sz="1100">
+                          <a:solidFill>
+                            <a:srgbClr val="0F1115"/>
+                          </a:solidFill>
+                          <a:latin typeface="Segoe UI" panose="020B0502040204020203"/>
+                          <a:ea typeface="Segoe UI" panose="020B0502040204020203"/>
+                        </a:rPr>
+                        <a:t> Intel Xeon E5-2680 v2 </a:t>
+                      </a:r>
+                      <a:r>
+                        <a:rPr lang="zh-CN" altLang="en-US" sz="1100">
+                          <a:solidFill>
+                            <a:srgbClr val="0F1115"/>
+                          </a:solidFill>
+                          <a:latin typeface="Segoe UI" panose="020B0502040204020203"/>
+                          <a:ea typeface="Segoe UI" panose="020B0502040204020203"/>
+                        </a:rPr>
+                        <a:t>或同等性能的</a:t>
+                      </a:r>
+                      <a:r>
+                        <a:rPr lang="en-US" altLang="zh-CN" sz="1100">
+                          <a:solidFill>
+                            <a:srgbClr val="0F1115"/>
+                          </a:solidFill>
+                          <a:latin typeface="Segoe UI" panose="020B0502040204020203"/>
+                          <a:ea typeface="Segoe UI" panose="020B0502040204020203"/>
+                        </a:rPr>
+                        <a:t> AMD EPYC/Intel </a:t>
+                      </a:r>
+                      <a:r>
+                        <a:rPr lang="zh-CN" altLang="en-US" sz="1100">
+                          <a:solidFill>
+                            <a:srgbClr val="0F1115"/>
+                          </a:solidFill>
+                          <a:latin typeface="Segoe UI" panose="020B0502040204020203"/>
+                          <a:ea typeface="Segoe UI" panose="020B0502040204020203"/>
+                        </a:rPr>
+                        <a:t>至强系列）</a:t>
+                      </a:r>
+                      <a:endParaRPr lang="zh-CN" altLang="en-US" sz="1100">
+                        <a:solidFill>
+                          <a:srgbClr val="0F1115"/>
+                        </a:solidFill>
+                        <a:latin typeface="Segoe UI" panose="020B0502040204020203"/>
+                        <a:ea typeface="Segoe UI" panose="020B0502040204020203"/>
+                      </a:endParaRPr>
+                    </a:p>
+                  </a:txBody>
+                  <a:tcPr marL="152400" marR="152400" marT="95250" marB="95250" anchor="ctr" anchorCtr="0">
+                    <a:lnL>
+                      <a:noFill/>
+                    </a:lnL>
+                    <a:lnR>
+                      <a:noFill/>
+                    </a:lnR>
+                    <a:lnT>
+                      <a:noFill/>
+                    </a:lnT>
+                    <a:lnB>
+                      <a:noFill/>
+                    </a:lnB>
+                    <a:solidFill>
+                      <a:srgbClr val="FFFFFF"/>
+                    </a:solidFill>
+                  </a:tcPr>
+                </a:tc>
+                <a:tc>
+                  <a:txBody>
+                    <a:bodyPr/>
+                    <a:p>
+                      <a:pPr marL="0" indent="0" algn="l">
+                        <a:spcBef>
+                          <a:spcPts val="500"/>
+                        </a:spcBef>
+                        <a:spcAft>
+                          <a:spcPts val="500"/>
+                        </a:spcAft>
+                      </a:pPr>
+                      <a:r>
+                        <a:rPr lang="zh-CN" altLang="en-US" sz="1100">
+                          <a:solidFill>
+                            <a:srgbClr val="0F1115"/>
+                          </a:solidFill>
+                          <a:latin typeface="Segoe UI" panose="020B0502040204020203"/>
+                          <a:ea typeface="Segoe UI" panose="020B0502040204020203"/>
+                        </a:rPr>
+                        <a:t>纯转发场景下，</a:t>
+                      </a:r>
+                      <a:r>
+                        <a:rPr lang="en-US" altLang="zh-CN" sz="1100">
+                          <a:solidFill>
+                            <a:srgbClr val="0F1115"/>
+                          </a:solidFill>
+                          <a:latin typeface="Segoe UI" panose="020B0502040204020203"/>
+                          <a:ea typeface="Segoe UI" panose="020B0502040204020203"/>
+                        </a:rPr>
+                        <a:t>CPU</a:t>
+                      </a:r>
+                      <a:r>
+                        <a:rPr lang="zh-CN" altLang="en-US" sz="1100">
+                          <a:solidFill>
+                            <a:srgbClr val="0F1115"/>
+                          </a:solidFill>
+                          <a:latin typeface="Segoe UI" panose="020B0502040204020203"/>
+                          <a:ea typeface="Segoe UI" panose="020B0502040204020203"/>
+                        </a:rPr>
+                        <a:t>主要负责网络协议处理与流调度。纯粹的推流转发</a:t>
+                      </a:r>
+                      <a:r>
+                        <a:rPr lang="en-US" altLang="zh-CN" sz="1100" b="1">
+                          <a:solidFill>
+                            <a:srgbClr val="0F1115"/>
+                          </a:solidFill>
+                          <a:latin typeface="Segoe UI" panose="020B0502040204020203"/>
+                          <a:ea typeface="Segoe UI" panose="020B0502040204020203"/>
+                        </a:rPr>
+                        <a:t>10</a:t>
+                      </a:r>
+                      <a:r>
+                        <a:rPr lang="zh-CN" altLang="en-US" sz="1100" b="1">
+                          <a:solidFill>
+                            <a:srgbClr val="0F1115"/>
+                          </a:solidFill>
+                          <a:latin typeface="Segoe UI" panose="020B0502040204020203"/>
+                          <a:ea typeface="Segoe UI" panose="020B0502040204020203"/>
+                        </a:rPr>
+                        <a:t>核</a:t>
+                      </a:r>
+                      <a:r>
+                        <a:rPr lang="en-US" altLang="zh-CN" sz="1100" b="1">
+                          <a:solidFill>
+                            <a:srgbClr val="0F1115"/>
+                          </a:solidFill>
+                          <a:latin typeface="Segoe UI" panose="020B0502040204020203"/>
+                          <a:ea typeface="Segoe UI" panose="020B0502040204020203"/>
+                        </a:rPr>
+                        <a:t>20</a:t>
+                      </a:r>
+                      <a:r>
+                        <a:rPr lang="zh-CN" altLang="en-US" sz="1100" b="1">
+                          <a:solidFill>
+                            <a:srgbClr val="0F1115"/>
+                          </a:solidFill>
+                          <a:latin typeface="Segoe UI" panose="020B0502040204020203"/>
+                          <a:ea typeface="Segoe UI" panose="020B0502040204020203"/>
+                        </a:rPr>
+                        <a:t>线程已能满足大部分需求</a:t>
+                      </a:r>
+                      <a:r>
+                        <a:rPr lang="zh-CN" altLang="en-US" sz="1100">
+                          <a:solidFill>
+                            <a:srgbClr val="0F1115"/>
+                          </a:solidFill>
+                          <a:latin typeface="Segoe UI" panose="020B0502040204020203"/>
+                          <a:ea typeface="Segoe UI" panose="020B0502040204020203"/>
+                        </a:rPr>
+                        <a:t>；另一份针对</a:t>
+                      </a:r>
+                      <a:r>
+                        <a:rPr lang="en-US" altLang="zh-CN" sz="1100">
+                          <a:solidFill>
+                            <a:srgbClr val="0F1115"/>
+                          </a:solidFill>
+                          <a:latin typeface="Segoe UI" panose="020B0502040204020203"/>
+                          <a:ea typeface="Segoe UI" panose="020B0502040204020203"/>
+                        </a:rPr>
+                        <a:t>500</a:t>
+                      </a:r>
+                      <a:r>
+                        <a:rPr lang="zh-CN" altLang="en-US" sz="1100">
+                          <a:solidFill>
+                            <a:srgbClr val="0F1115"/>
+                          </a:solidFill>
+                          <a:latin typeface="Segoe UI" panose="020B0502040204020203"/>
+                          <a:ea typeface="Segoe UI" panose="020B0502040204020203"/>
+                        </a:rPr>
+                        <a:t>台终端的推荐配置也采用了</a:t>
+                      </a:r>
+                      <a:r>
+                        <a:rPr lang="en-US" altLang="zh-CN" sz="1100">
+                          <a:solidFill>
+                            <a:srgbClr val="0F1115"/>
+                          </a:solidFill>
+                          <a:latin typeface="Segoe UI" panose="020B0502040204020203"/>
+                          <a:ea typeface="Segoe UI" panose="020B0502040204020203"/>
+                        </a:rPr>
+                        <a:t> </a:t>
+                      </a:r>
+                      <a:r>
+                        <a:rPr lang="en-US" altLang="zh-CN" sz="1100" b="1">
+                          <a:solidFill>
+                            <a:srgbClr val="0F1115"/>
+                          </a:solidFill>
+                          <a:latin typeface="Segoe UI" panose="020B0502040204020203"/>
+                          <a:ea typeface="Segoe UI" panose="020B0502040204020203"/>
+                        </a:rPr>
+                        <a:t>Intel E5-2680 V2</a:t>
+                      </a:r>
+                      <a:r>
+                        <a:rPr lang="en-US" altLang="zh-CN" sz="1100">
+                          <a:solidFill>
+                            <a:srgbClr val="0F1115"/>
+                          </a:solidFill>
+                          <a:latin typeface="Segoe UI" panose="020B0502040204020203"/>
+                          <a:ea typeface="Segoe UI" panose="020B0502040204020203"/>
+                        </a:rPr>
+                        <a:t> </a:t>
+                      </a:r>
+                      <a:r>
+                        <a:rPr lang="zh-CN" altLang="en-US" sz="1100">
+                          <a:solidFill>
+                            <a:srgbClr val="0F1115"/>
+                          </a:solidFill>
+                          <a:latin typeface="Segoe UI" panose="020B0502040204020203"/>
+                          <a:ea typeface="Segoe UI" panose="020B0502040204020203"/>
+                        </a:rPr>
+                        <a:t>处理器</a:t>
+                      </a:r>
+                      <a:endParaRPr lang="zh-CN" altLang="en-US" sz="1100">
+                        <a:solidFill>
+                          <a:srgbClr val="0F1115"/>
+                        </a:solidFill>
+                        <a:latin typeface="Segoe UI" panose="020B0502040204020203"/>
+                        <a:ea typeface="Segoe UI" panose="020B0502040204020203"/>
+                      </a:endParaRPr>
+                    </a:p>
+                  </a:txBody>
+                  <a:tcPr marL="152400" marR="0" marT="95250" marB="95250" anchor="ctr" anchorCtr="0">
+                    <a:lnL>
+                      <a:noFill/>
+                    </a:lnL>
+                    <a:lnR>
+                      <a:noFill/>
+                    </a:lnR>
+                    <a:lnT>
+                      <a:noFill/>
+                    </a:lnT>
+                    <a:lnB>
+                      <a:noFill/>
+                    </a:lnB>
+                    <a:solidFill>
+                      <a:srgbClr val="FFFFFF"/>
+                    </a:solidFill>
+                  </a:tcPr>
+                </a:tc>
+              </a:tr>
+              <a:tr h="0">
+                <a:tc>
+                  <a:txBody>
+                    <a:bodyPr/>
+                    <a:p>
+                      <a:pPr marL="0" indent="0" algn="l">
+                        <a:spcBef>
+                          <a:spcPts val="500"/>
+                        </a:spcBef>
+                        <a:spcAft>
+                          <a:spcPts val="500"/>
+                        </a:spcAft>
+                      </a:pPr>
+                      <a:r>
+                        <a:rPr lang="zh-CN" altLang="en-US" sz="1100" b="1">
+                          <a:solidFill>
+                            <a:srgbClr val="0F1115"/>
+                          </a:solidFill>
+                          <a:latin typeface="Segoe UI" panose="020B0502040204020203"/>
+                          <a:ea typeface="Segoe UI" panose="020B0502040204020203"/>
+                        </a:rPr>
+                        <a:t>内存</a:t>
+                      </a:r>
+                      <a:endParaRPr lang="zh-CN" altLang="en-US" sz="1100" b="1">
+                        <a:solidFill>
+                          <a:srgbClr val="0F1115"/>
+                        </a:solidFill>
+                        <a:latin typeface="Segoe UI" panose="020B0502040204020203"/>
+                        <a:ea typeface="Segoe UI" panose="020B0502040204020203"/>
+                      </a:endParaRPr>
+                    </a:p>
+                  </a:txBody>
+                  <a:tcPr marL="0" marR="152400" marT="95250" marB="95250" anchor="ctr" anchorCtr="0">
+                    <a:lnL>
+                      <a:noFill/>
+                    </a:lnL>
+                    <a:lnR>
+                      <a:noFill/>
+                    </a:lnR>
+                    <a:lnT>
+                      <a:noFill/>
+                    </a:lnT>
+                    <a:lnB>
+                      <a:noFill/>
+                    </a:lnB>
+                    <a:solidFill>
+                      <a:srgbClr val="FFFFFF"/>
+                    </a:solidFill>
+                  </a:tcPr>
+                </a:tc>
+                <a:tc>
+                  <a:txBody>
+                    <a:bodyPr/>
+                    <a:p>
+                      <a:pPr marL="0" indent="0" algn="l">
+                        <a:spcBef>
+                          <a:spcPts val="500"/>
+                        </a:spcBef>
+                        <a:spcAft>
+                          <a:spcPts val="500"/>
+                        </a:spcAft>
+                      </a:pPr>
+                      <a:r>
+                        <a:rPr lang="en-US" altLang="zh-CN" sz="1100" b="1">
+                          <a:solidFill>
+                            <a:srgbClr val="0F1115"/>
+                          </a:solidFill>
+                          <a:latin typeface="Segoe UI" panose="020B0502040204020203"/>
+                          <a:ea typeface="Segoe UI" panose="020B0502040204020203"/>
+                        </a:rPr>
+                        <a:t>64 GB DDR4 ECC</a:t>
+                      </a:r>
+                      <a:r>
+                        <a:rPr lang="zh-CN" altLang="en-US" sz="1100">
+                          <a:solidFill>
+                            <a:srgbClr val="0F1115"/>
+                          </a:solidFill>
+                          <a:latin typeface="Segoe UI" panose="020B0502040204020203"/>
+                          <a:ea typeface="Segoe UI" panose="020B0502040204020203"/>
+                        </a:rPr>
+                        <a:t>（建议</a:t>
+                      </a:r>
+                      <a:r>
+                        <a:rPr lang="en-US" altLang="zh-CN" sz="1100">
+                          <a:solidFill>
+                            <a:srgbClr val="0F1115"/>
+                          </a:solidFill>
+                          <a:latin typeface="Segoe UI" panose="020B0502040204020203"/>
+                          <a:ea typeface="Segoe UI" panose="020B0502040204020203"/>
+                        </a:rPr>
+                        <a:t> 2×32 GB </a:t>
+                      </a:r>
+                      <a:r>
+                        <a:rPr lang="zh-CN" altLang="en-US" sz="1100">
+                          <a:solidFill>
+                            <a:srgbClr val="0F1115"/>
+                          </a:solidFill>
+                          <a:latin typeface="Segoe UI" panose="020B0502040204020203"/>
+                          <a:ea typeface="Segoe UI" panose="020B0502040204020203"/>
+                        </a:rPr>
+                        <a:t>或</a:t>
+                      </a:r>
+                      <a:r>
+                        <a:rPr lang="en-US" altLang="zh-CN" sz="1100">
+                          <a:solidFill>
+                            <a:srgbClr val="0F1115"/>
+                          </a:solidFill>
+                          <a:latin typeface="Segoe UI" panose="020B0502040204020203"/>
+                          <a:ea typeface="Segoe UI" panose="020B0502040204020203"/>
+                        </a:rPr>
+                        <a:t> 4×32 GB</a:t>
+                      </a:r>
+                      <a:r>
+                        <a:rPr lang="zh-CN" altLang="en-US" sz="1100">
+                          <a:solidFill>
+                            <a:srgbClr val="0F1115"/>
+                          </a:solidFill>
+                          <a:latin typeface="Segoe UI" panose="020B0502040204020203"/>
+                          <a:ea typeface="Segoe UI" panose="020B0502040204020203"/>
+                        </a:rPr>
+                        <a:t>，</a:t>
+                      </a:r>
+                      <a:r>
+                        <a:rPr lang="en-US" altLang="zh-CN" sz="1100">
+                          <a:solidFill>
+                            <a:srgbClr val="0F1115"/>
+                          </a:solidFill>
+                          <a:latin typeface="Segoe UI" panose="020B0502040204020203"/>
+                          <a:ea typeface="Segoe UI" panose="020B0502040204020203"/>
+                        </a:rPr>
+                        <a:t> </a:t>
+                      </a:r>
+                      <a:r>
+                        <a:rPr lang="zh-CN" altLang="en-US" sz="1100">
+                          <a:solidFill>
+                            <a:srgbClr val="0F1115"/>
+                          </a:solidFill>
+                          <a:latin typeface="Segoe UI" panose="020B0502040204020203"/>
+                          <a:ea typeface="Segoe UI" panose="020B0502040204020203"/>
+                        </a:rPr>
+                        <a:t>内存条要新）</a:t>
+                      </a:r>
+                      <a:endParaRPr lang="zh-CN" altLang="en-US" sz="1100">
+                        <a:solidFill>
+                          <a:srgbClr val="0F1115"/>
+                        </a:solidFill>
+                        <a:latin typeface="Segoe UI" panose="020B0502040204020203"/>
+                        <a:ea typeface="Segoe UI" panose="020B0502040204020203"/>
+                      </a:endParaRPr>
+                    </a:p>
+                  </a:txBody>
+                  <a:tcPr marL="152400" marR="152400" marT="95250" marB="95250" anchor="ctr" anchorCtr="0">
+                    <a:lnL>
+                      <a:noFill/>
+                    </a:lnL>
+                    <a:lnR>
+                      <a:noFill/>
+                    </a:lnR>
+                    <a:lnT>
+                      <a:noFill/>
+                    </a:lnT>
+                    <a:lnB>
+                      <a:noFill/>
+                    </a:lnB>
+                    <a:solidFill>
+                      <a:srgbClr val="FFFFFF"/>
+                    </a:solidFill>
+                  </a:tcPr>
+                </a:tc>
+                <a:tc>
+                  <a:txBody>
+                    <a:bodyPr/>
+                    <a:p>
+                      <a:pPr marL="0" indent="0" algn="l">
+                        <a:spcBef>
+                          <a:spcPts val="500"/>
+                        </a:spcBef>
+                        <a:spcAft>
+                          <a:spcPts val="500"/>
+                        </a:spcAft>
+                      </a:pPr>
+                      <a:r>
+                        <a:rPr lang="zh-CN" altLang="en-US" sz="1100">
+                          <a:solidFill>
+                            <a:srgbClr val="0F1115"/>
+                          </a:solidFill>
+                          <a:latin typeface="Segoe UI" panose="020B0502040204020203"/>
+                          <a:ea typeface="Segoe UI" panose="020B0502040204020203"/>
+                        </a:rPr>
+                        <a:t>内存用于缓存流数据、维护连接状态。</a:t>
+                      </a:r>
+                      <a:r>
+                        <a:rPr lang="en-US" altLang="zh-CN" sz="1100">
+                          <a:solidFill>
+                            <a:srgbClr val="0F1115"/>
+                          </a:solidFill>
+                          <a:latin typeface="Segoe UI" panose="020B0502040204020203"/>
+                          <a:ea typeface="Segoe UI" panose="020B0502040204020203"/>
+                        </a:rPr>
+                        <a:t>500</a:t>
+                      </a:r>
+                      <a:r>
+                        <a:rPr lang="zh-CN" altLang="en-US" sz="1100">
+                          <a:solidFill>
+                            <a:srgbClr val="0F1115"/>
+                          </a:solidFill>
+                          <a:latin typeface="Segoe UI" panose="020B0502040204020203"/>
+                          <a:ea typeface="Segoe UI" panose="020B0502040204020203"/>
+                        </a:rPr>
+                        <a:t>台终端配置推荐</a:t>
+                      </a:r>
+                      <a:r>
+                        <a:rPr lang="en-US" altLang="zh-CN" sz="1100">
+                          <a:solidFill>
+                            <a:srgbClr val="0F1115"/>
+                          </a:solidFill>
+                          <a:latin typeface="Segoe UI" panose="020B0502040204020203"/>
+                          <a:ea typeface="Segoe UI" panose="020B0502040204020203"/>
+                        </a:rPr>
+                        <a:t> </a:t>
+                      </a:r>
+                      <a:r>
+                        <a:rPr lang="en-US" altLang="zh-CN" sz="1100" b="1">
+                          <a:solidFill>
+                            <a:srgbClr val="0F1115"/>
+                          </a:solidFill>
+                          <a:latin typeface="Segoe UI" panose="020B0502040204020203"/>
+                          <a:ea typeface="Segoe UI" panose="020B0502040204020203"/>
+                        </a:rPr>
+                        <a:t>16Gx2</a:t>
+                      </a:r>
+                      <a:r>
+                        <a:rPr lang="zh-CN" altLang="en-US" sz="1100" b="1">
+                          <a:solidFill>
+                            <a:srgbClr val="0F1115"/>
+                          </a:solidFill>
+                          <a:latin typeface="Segoe UI" panose="020B0502040204020203"/>
+                          <a:ea typeface="Segoe UI" panose="020B0502040204020203"/>
+                        </a:rPr>
+                        <a:t>及以上</a:t>
+                      </a:r>
+                      <a:r>
+                        <a:rPr lang="zh-CN" altLang="en-US" sz="1100">
+                          <a:solidFill>
+                            <a:srgbClr val="0F1115"/>
+                          </a:solidFill>
+                          <a:latin typeface="Segoe UI" panose="020B0502040204020203"/>
+                          <a:ea typeface="Segoe UI" panose="020B0502040204020203"/>
+                        </a:rPr>
+                        <a:t>。考虑到系统冗余与并发稳定性，建议升级至</a:t>
+                      </a:r>
+                      <a:r>
+                        <a:rPr lang="en-US" altLang="zh-CN" sz="1100">
+                          <a:solidFill>
+                            <a:srgbClr val="0F1115"/>
+                          </a:solidFill>
+                          <a:latin typeface="Segoe UI" panose="020B0502040204020203"/>
+                          <a:ea typeface="Segoe UI" panose="020B0502040204020203"/>
+                        </a:rPr>
+                        <a:t>128 GB</a:t>
+                      </a:r>
+                      <a:endParaRPr lang="en-US" altLang="zh-CN" sz="1100">
+                        <a:solidFill>
+                          <a:srgbClr val="0F1115"/>
+                        </a:solidFill>
+                        <a:latin typeface="Segoe UI" panose="020B0502040204020203"/>
+                        <a:ea typeface="Segoe UI" panose="020B0502040204020203"/>
+                      </a:endParaRPr>
+                    </a:p>
+                  </a:txBody>
+                  <a:tcPr marL="152400" marR="0" marT="95250" marB="95250" anchor="ctr" anchorCtr="0">
+                    <a:lnL>
+                      <a:noFill/>
+                    </a:lnL>
+                    <a:lnR>
+                      <a:noFill/>
+                    </a:lnR>
+                    <a:lnT>
+                      <a:noFill/>
+                    </a:lnT>
+                    <a:lnB>
+                      <a:noFill/>
+                    </a:lnB>
+                    <a:solidFill>
+                      <a:srgbClr val="FFFFFF"/>
+                    </a:solidFill>
+                  </a:tcPr>
+                </a:tc>
+              </a:tr>
+              <a:tr h="0">
+                <a:tc>
+                  <a:txBody>
+                    <a:bodyPr/>
+                    <a:p>
+                      <a:pPr marL="0" indent="0" algn="just">
+                        <a:spcBef>
+                          <a:spcPts val="500"/>
+                        </a:spcBef>
+                        <a:spcAft>
+                          <a:spcPts val="500"/>
+                        </a:spcAft>
+                      </a:pPr>
+                      <a:r>
+                        <a:rPr lang="en-US" altLang="zh-CN" sz="1100" b="1">
+                          <a:solidFill>
+                            <a:srgbClr val="0F1115"/>
+                          </a:solidFill>
+                          <a:latin typeface="Segoe UI" panose="020B0502040204020203"/>
+                          <a:ea typeface="Segoe UI" panose="020B0502040204020203"/>
+                        </a:rPr>
+                        <a:t>GPU</a:t>
+                      </a:r>
+                      <a:endParaRPr lang="en-US" altLang="zh-CN" sz="1100" b="1">
+                        <a:solidFill>
+                          <a:srgbClr val="0F1115"/>
+                        </a:solidFill>
+                        <a:latin typeface="Segoe UI" panose="020B0502040204020203"/>
+                        <a:ea typeface="Segoe UI" panose="020B0502040204020203"/>
+                      </a:endParaRPr>
+                    </a:p>
+                  </a:txBody>
+                  <a:tcPr marL="0" marR="152400" marT="95250" marB="95250" anchor="ctr" anchorCtr="0">
+                    <a:lnL>
+                      <a:noFill/>
+                    </a:lnL>
+                    <a:lnR>
+                      <a:noFill/>
+                    </a:lnR>
+                    <a:lnT>
+                      <a:noFill/>
+                    </a:lnT>
+                    <a:lnB>
+                      <a:noFill/>
+                    </a:lnB>
+                    <a:solidFill>
+                      <a:srgbClr val="FFFFFF"/>
+                    </a:solidFill>
+                  </a:tcPr>
+                </a:tc>
+                <a:tc>
+                  <a:txBody>
+                    <a:bodyPr/>
+                    <a:p>
+                      <a:pPr marL="0" indent="0" algn="l">
+                        <a:spcBef>
+                          <a:spcPts val="500"/>
+                        </a:spcBef>
+                        <a:spcAft>
+                          <a:spcPts val="500"/>
+                        </a:spcAft>
+                      </a:pPr>
+                      <a:r>
+                        <a:rPr lang="en-US" altLang="zh-CN" sz="1100" b="1">
+                          <a:solidFill>
+                            <a:srgbClr val="0F1115"/>
+                          </a:solidFill>
+                          <a:latin typeface="Segoe UI" panose="020B0502040204020203"/>
+                          <a:ea typeface="Segoe UI" panose="020B0502040204020203"/>
+                        </a:rPr>
+                        <a:t>RTX 1080</a:t>
+                      </a:r>
+                      <a:r>
+                        <a:rPr lang="zh-CN" altLang="en-US" sz="1100" b="1">
+                          <a:solidFill>
+                            <a:srgbClr val="0F1115"/>
+                          </a:solidFill>
+                          <a:latin typeface="Segoe UI" panose="020B0502040204020203"/>
+                          <a:ea typeface="Segoe UI" panose="020B0502040204020203"/>
+                        </a:rPr>
+                        <a:t>（</a:t>
+                      </a:r>
+                      <a:r>
+                        <a:rPr lang="en-US" altLang="zh-CN" sz="1100" b="1">
+                          <a:solidFill>
+                            <a:srgbClr val="0F1115"/>
+                          </a:solidFill>
+                          <a:latin typeface="Segoe UI" panose="020B0502040204020203"/>
+                          <a:ea typeface="Segoe UI" panose="020B0502040204020203"/>
+                        </a:rPr>
+                        <a:t>8GB</a:t>
+                      </a:r>
+                      <a:r>
+                        <a:rPr lang="zh-CN" altLang="en-US" sz="1100" b="1">
+                          <a:solidFill>
+                            <a:srgbClr val="0F1115"/>
+                          </a:solidFill>
+                          <a:latin typeface="Segoe UI" panose="020B0502040204020203"/>
+                          <a:ea typeface="Segoe UI" panose="020B0502040204020203"/>
+                        </a:rPr>
+                        <a:t>）</a:t>
+                      </a:r>
+                      <a:r>
+                        <a:rPr lang="en-US" altLang="zh-CN" sz="1100" b="1">
+                          <a:solidFill>
+                            <a:srgbClr val="0F1115"/>
+                          </a:solidFill>
+                          <a:latin typeface="Segoe UI" panose="020B0502040204020203"/>
+                          <a:ea typeface="Segoe UI" panose="020B0502040204020203"/>
+                        </a:rPr>
+                        <a:t> </a:t>
+                      </a:r>
+                      <a:endParaRPr lang="en-US" altLang="zh-CN" sz="1100" b="1">
+                        <a:solidFill>
+                          <a:srgbClr val="0F1115"/>
+                        </a:solidFill>
+                        <a:latin typeface="Segoe UI" panose="020B0502040204020203"/>
+                        <a:ea typeface="Segoe UI" panose="020B0502040204020203"/>
+                      </a:endParaRPr>
+                    </a:p>
+                  </a:txBody>
+                  <a:tcPr marL="152400" marR="152400" marT="95250" marB="95250" anchor="ctr" anchorCtr="0">
+                    <a:lnL>
+                      <a:noFill/>
+                    </a:lnL>
+                    <a:lnR>
+                      <a:noFill/>
+                    </a:lnR>
+                    <a:lnT>
+                      <a:noFill/>
+                    </a:lnT>
+                    <a:lnB>
+                      <a:noFill/>
+                    </a:lnB>
+                    <a:solidFill>
+                      <a:srgbClr val="FFFFFF"/>
+                    </a:solidFill>
+                  </a:tcPr>
+                </a:tc>
+                <a:tc>
+                  <a:txBody>
+                    <a:bodyPr/>
+                    <a:p>
+                      <a:pPr marL="0" indent="0" algn="l">
+                        <a:spcBef>
+                          <a:spcPts val="500"/>
+                        </a:spcBef>
+                        <a:spcAft>
+                          <a:spcPts val="500"/>
+                        </a:spcAft>
+                      </a:pPr>
+                      <a:r>
+                        <a:rPr lang="zh-CN" altLang="en-US" sz="1100">
+                          <a:solidFill>
+                            <a:srgbClr val="0F1115"/>
+                          </a:solidFill>
+                          <a:latin typeface="Segoe UI" panose="020B0502040204020203"/>
+                          <a:ea typeface="Segoe UI" panose="020B0502040204020203"/>
+                        </a:rPr>
+                        <a:t>多路视频合并电视墙、算力</a:t>
+                      </a:r>
+                      <a:endParaRPr lang="zh-CN" altLang="en-US" sz="1100">
+                        <a:solidFill>
+                          <a:srgbClr val="0F1115"/>
+                        </a:solidFill>
+                        <a:latin typeface="Segoe UI" panose="020B0502040204020203"/>
+                        <a:ea typeface="Segoe UI" panose="020B0502040204020203"/>
+                      </a:endParaRPr>
+                    </a:p>
+                  </a:txBody>
+                  <a:tcPr marL="152400" marR="0" marT="95250" marB="95250" anchor="ctr" anchorCtr="0">
+                    <a:lnL>
+                      <a:noFill/>
+                    </a:lnL>
+                    <a:lnR>
+                      <a:noFill/>
+                    </a:lnR>
+                    <a:lnT>
+                      <a:noFill/>
+                    </a:lnT>
+                    <a:lnB>
+                      <a:noFill/>
+                    </a:lnB>
+                    <a:solidFill>
+                      <a:srgbClr val="FFFFFF"/>
+                    </a:solidFill>
+                  </a:tcPr>
+                </a:tc>
+              </a:tr>
+              <a:tr h="0">
+                <a:tc>
+                  <a:txBody>
+                    <a:bodyPr/>
+                    <a:p>
+                      <a:pPr marL="0" indent="0" algn="l">
+                        <a:spcBef>
+                          <a:spcPts val="500"/>
+                        </a:spcBef>
+                        <a:spcAft>
+                          <a:spcPts val="500"/>
+                        </a:spcAft>
+                      </a:pPr>
+                      <a:r>
+                        <a:rPr lang="zh-CN" altLang="en-US" sz="1100" b="1">
+                          <a:solidFill>
+                            <a:srgbClr val="0F1115"/>
+                          </a:solidFill>
+                          <a:latin typeface="Segoe UI" panose="020B0502040204020203"/>
+                          <a:ea typeface="Segoe UI" panose="020B0502040204020203"/>
+                        </a:rPr>
+                        <a:t>存储</a:t>
+                      </a:r>
+                      <a:endParaRPr lang="zh-CN" altLang="en-US" sz="1100" b="1">
+                        <a:solidFill>
+                          <a:srgbClr val="0F1115"/>
+                        </a:solidFill>
+                        <a:latin typeface="Segoe UI" panose="020B0502040204020203"/>
+                        <a:ea typeface="Segoe UI" panose="020B0502040204020203"/>
+                      </a:endParaRPr>
+                    </a:p>
+                  </a:txBody>
+                  <a:tcPr marL="0" marR="152400" marT="95250" marB="95250" anchor="ctr" anchorCtr="0">
+                    <a:lnL>
+                      <a:noFill/>
+                    </a:lnL>
+                    <a:lnR>
+                      <a:noFill/>
+                    </a:lnR>
+                    <a:lnT>
+                      <a:noFill/>
+                    </a:lnT>
+                    <a:lnB>
+                      <a:noFill/>
+                    </a:lnB>
+                    <a:solidFill>
+                      <a:srgbClr val="FFFFFF"/>
+                    </a:solidFill>
+                  </a:tcPr>
+                </a:tc>
+                <a:tc>
+                  <a:txBody>
+                    <a:bodyPr/>
+                    <a:p>
+                      <a:pPr marL="0" indent="0" algn="l">
+                        <a:spcBef>
+                          <a:spcPts val="500"/>
+                        </a:spcBef>
+                        <a:spcAft>
+                          <a:spcPts val="500"/>
+                        </a:spcAft>
+                      </a:pPr>
+                      <a:r>
+                        <a:rPr lang="en-US" altLang="zh-CN" sz="1100" b="1">
+                          <a:solidFill>
+                            <a:srgbClr val="0F1115"/>
+                          </a:solidFill>
+                          <a:latin typeface="Segoe UI" panose="020B0502040204020203"/>
+                          <a:ea typeface="Segoe UI" panose="020B0502040204020203"/>
+                        </a:rPr>
+                        <a:t>4 TB SDD</a:t>
+                      </a:r>
+                      <a:r>
+                        <a:rPr lang="zh-CN" altLang="en-US" sz="1100">
+                          <a:solidFill>
+                            <a:srgbClr val="0F1115"/>
+                          </a:solidFill>
+                          <a:latin typeface="Segoe UI" panose="020B0502040204020203"/>
+                          <a:ea typeface="Segoe UI" panose="020B0502040204020203"/>
+                        </a:rPr>
+                        <a:t>（如需录制或缓存）</a:t>
+                      </a:r>
+                      <a:endParaRPr lang="zh-CN" altLang="en-US" sz="1100">
+                        <a:solidFill>
+                          <a:srgbClr val="0F1115"/>
+                        </a:solidFill>
+                        <a:latin typeface="Segoe UI" panose="020B0502040204020203"/>
+                        <a:ea typeface="Segoe UI" panose="020B0502040204020203"/>
+                      </a:endParaRPr>
+                    </a:p>
+                  </a:txBody>
+                  <a:tcPr marL="152400" marR="152400" marT="95250" marB="95250" anchor="ctr" anchorCtr="0">
+                    <a:lnL>
+                      <a:noFill/>
+                    </a:lnL>
+                    <a:lnR>
+                      <a:noFill/>
+                    </a:lnR>
+                    <a:lnT>
+                      <a:noFill/>
+                    </a:lnT>
+                    <a:lnB>
+                      <a:noFill/>
+                    </a:lnB>
+                    <a:solidFill>
+                      <a:srgbClr val="FFFFFF"/>
+                    </a:solidFill>
+                  </a:tcPr>
+                </a:tc>
+                <a:tc>
+                  <a:txBody>
+                    <a:bodyPr/>
+                    <a:p>
+                      <a:pPr marL="0" indent="0" algn="l">
+                        <a:spcBef>
+                          <a:spcPts val="500"/>
+                        </a:spcBef>
+                        <a:spcAft>
+                          <a:spcPts val="500"/>
+                        </a:spcAft>
+                      </a:pPr>
+                      <a:r>
+                        <a:rPr lang="zh-CN" altLang="en-US" sz="1100">
+                          <a:solidFill>
+                            <a:srgbClr val="0F1115"/>
+                          </a:solidFill>
+                          <a:latin typeface="Segoe UI" panose="020B0502040204020203"/>
+                          <a:ea typeface="Segoe UI" panose="020B0502040204020203"/>
+                        </a:rPr>
+                        <a:t>系统盘使用</a:t>
+                      </a:r>
+                      <a:r>
+                        <a:rPr lang="en-US" altLang="zh-CN" sz="1100">
+                          <a:solidFill>
+                            <a:srgbClr val="0F1115"/>
+                          </a:solidFill>
+                          <a:latin typeface="Segoe UI" panose="020B0502040204020203"/>
+                          <a:ea typeface="Segoe UI" panose="020B0502040204020203"/>
+                        </a:rPr>
+                        <a:t>SSD</a:t>
+                      </a:r>
+                      <a:r>
+                        <a:rPr lang="zh-CN" altLang="en-US" sz="1100">
+                          <a:solidFill>
+                            <a:srgbClr val="0F1115"/>
+                          </a:solidFill>
+                          <a:latin typeface="Segoe UI" panose="020B0502040204020203"/>
+                          <a:ea typeface="Segoe UI" panose="020B0502040204020203"/>
+                        </a:rPr>
+                        <a:t>可提升</a:t>
+                      </a:r>
+                      <a:r>
+                        <a:rPr lang="en-US" altLang="zh-CN" sz="1100">
+                          <a:solidFill>
+                            <a:srgbClr val="0F1115"/>
+                          </a:solidFill>
+                          <a:latin typeface="Segoe UI" panose="020B0502040204020203"/>
+                          <a:ea typeface="Segoe UI" panose="020B0502040204020203"/>
+                        </a:rPr>
+                        <a:t>IO</a:t>
+                      </a:r>
+                      <a:r>
+                        <a:rPr lang="zh-CN" altLang="en-US" sz="1100">
+                          <a:solidFill>
+                            <a:srgbClr val="0F1115"/>
+                          </a:solidFill>
+                          <a:latin typeface="Segoe UI" panose="020B0502040204020203"/>
+                          <a:ea typeface="Segoe UI" panose="020B0502040204020203"/>
+                        </a:rPr>
+                        <a:t>性能；数据盘文档资料、录制视频等等选择大容量</a:t>
+                      </a:r>
+                      <a:r>
+                        <a:rPr lang="en-US" altLang="zh-CN" sz="1100">
+                          <a:solidFill>
+                            <a:srgbClr val="0F1115"/>
+                          </a:solidFill>
+                          <a:latin typeface="Segoe UI" panose="020B0502040204020203"/>
+                          <a:ea typeface="Segoe UI" panose="020B0502040204020203"/>
+                        </a:rPr>
+                        <a:t>SDD</a:t>
+                      </a:r>
+                      <a:r>
+                        <a:rPr lang="zh-CN" altLang="en-US" sz="1100">
+                          <a:solidFill>
+                            <a:srgbClr val="0F1115"/>
+                          </a:solidFill>
+                          <a:latin typeface="Segoe UI" panose="020B0502040204020203"/>
+                          <a:ea typeface="Segoe UI" panose="020B0502040204020203"/>
+                        </a:rPr>
+                        <a:t>、基础配置要求</a:t>
+                      </a:r>
+                      <a:r>
+                        <a:rPr lang="en-US" altLang="zh-CN" sz="1100">
+                          <a:solidFill>
+                            <a:srgbClr val="0F1115"/>
+                          </a:solidFill>
+                          <a:latin typeface="Segoe UI" panose="020B0502040204020203"/>
+                          <a:ea typeface="Segoe UI" panose="020B0502040204020203"/>
+                        </a:rPr>
+                        <a:t> </a:t>
+                      </a:r>
+                      <a:r>
+                        <a:rPr lang="en-US" altLang="zh-CN" sz="1100" b="1">
+                          <a:solidFill>
+                            <a:srgbClr val="0F1115"/>
+                          </a:solidFill>
+                          <a:latin typeface="Segoe UI" panose="020B0502040204020203"/>
+                          <a:ea typeface="Segoe UI" panose="020B0502040204020203"/>
+                        </a:rPr>
+                        <a:t>4T</a:t>
+                      </a:r>
+                      <a:r>
+                        <a:rPr lang="zh-CN" altLang="en-US" sz="1100" b="1">
+                          <a:solidFill>
+                            <a:srgbClr val="0F1115"/>
+                          </a:solidFill>
+                          <a:latin typeface="Segoe UI" panose="020B0502040204020203"/>
+                          <a:ea typeface="Segoe UI" panose="020B0502040204020203"/>
+                        </a:rPr>
+                        <a:t>以上</a:t>
+                      </a:r>
+                      <a:r>
+                        <a:rPr lang="zh-CN" altLang="en-US" sz="1100">
+                          <a:solidFill>
+                            <a:srgbClr val="0F1115"/>
+                          </a:solidFill>
+                          <a:latin typeface="Segoe UI" panose="020B0502040204020203"/>
+                          <a:ea typeface="Segoe UI" panose="020B0502040204020203"/>
+                        </a:rPr>
+                        <a:t>硬盘</a:t>
+                      </a:r>
+                      <a:endParaRPr lang="zh-CN" altLang="en-US" sz="1100">
+                        <a:solidFill>
+                          <a:srgbClr val="0F1115"/>
+                        </a:solidFill>
+                        <a:latin typeface="Segoe UI" panose="020B0502040204020203"/>
+                        <a:ea typeface="Segoe UI" panose="020B0502040204020203"/>
+                      </a:endParaRPr>
+                    </a:p>
+                  </a:txBody>
+                  <a:tcPr marL="152400" marR="0" marT="95250" marB="95250" anchor="ctr" anchorCtr="0">
+                    <a:lnL>
+                      <a:noFill/>
+                    </a:lnL>
+                    <a:lnR>
+                      <a:noFill/>
+                    </a:lnR>
+                    <a:lnT>
+                      <a:noFill/>
+                    </a:lnT>
+                    <a:lnB>
+                      <a:noFill/>
+                    </a:lnB>
+                    <a:solidFill>
+                      <a:srgbClr val="FFFFFF"/>
+                    </a:solidFill>
+                  </a:tcPr>
+                </a:tc>
+              </a:tr>
+              <a:tr h="0">
+                <a:tc>
+                  <a:txBody>
+                    <a:bodyPr/>
+                    <a:p>
+                      <a:pPr marL="0" indent="0" algn="l">
+                        <a:spcBef>
+                          <a:spcPts val="500"/>
+                        </a:spcBef>
+                        <a:spcAft>
+                          <a:spcPts val="500"/>
+                        </a:spcAft>
+                      </a:pPr>
+                      <a:r>
+                        <a:rPr lang="zh-CN" altLang="en-US" sz="1100" b="1">
+                          <a:solidFill>
+                            <a:srgbClr val="0F1115"/>
+                          </a:solidFill>
+                          <a:latin typeface="Segoe UI" panose="020B0502040204020203"/>
+                          <a:ea typeface="Segoe UI" panose="020B0502040204020203"/>
+                        </a:rPr>
+                        <a:t>网络</a:t>
+                      </a:r>
+                      <a:endParaRPr lang="zh-CN" altLang="en-US" sz="1100" b="1">
+                        <a:solidFill>
+                          <a:srgbClr val="0F1115"/>
+                        </a:solidFill>
+                        <a:latin typeface="Segoe UI" panose="020B0502040204020203"/>
+                        <a:ea typeface="Segoe UI" panose="020B0502040204020203"/>
+                      </a:endParaRPr>
+                    </a:p>
+                  </a:txBody>
+                  <a:tcPr marL="0" marR="152400" marT="95250" marB="95250" anchor="ctr" anchorCtr="0">
+                    <a:lnL>
+                      <a:noFill/>
+                    </a:lnL>
+                    <a:lnR>
+                      <a:noFill/>
+                    </a:lnR>
+                    <a:lnT>
+                      <a:noFill/>
+                    </a:lnT>
+                    <a:lnB>
+                      <a:noFill/>
+                    </a:lnB>
+                    <a:solidFill>
+                      <a:srgbClr val="FFFFFF"/>
+                    </a:solidFill>
+                  </a:tcPr>
+                </a:tc>
+                <a:tc>
+                  <a:txBody>
+                    <a:bodyPr/>
+                    <a:p>
+                      <a:pPr marL="0" indent="0" algn="l">
+                        <a:spcBef>
+                          <a:spcPts val="500"/>
+                        </a:spcBef>
+                        <a:spcAft>
+                          <a:spcPts val="500"/>
+                        </a:spcAft>
+                      </a:pPr>
+                      <a:r>
+                        <a:rPr lang="zh-CN" altLang="en-US" sz="1100" b="1">
+                          <a:solidFill>
+                            <a:srgbClr val="0F1115"/>
+                          </a:solidFill>
+                          <a:latin typeface="Segoe UI" panose="020B0502040204020203"/>
+                          <a:ea typeface="Segoe UI" panose="020B0502040204020203"/>
+                        </a:rPr>
+                        <a:t>至少</a:t>
+                      </a:r>
+                      <a:r>
+                        <a:rPr lang="en-US" altLang="zh-CN" sz="1100" b="1">
+                          <a:solidFill>
+                            <a:srgbClr val="0F1115"/>
+                          </a:solidFill>
+                          <a:latin typeface="Segoe UI" panose="020B0502040204020203"/>
+                          <a:ea typeface="Segoe UI" panose="020B0502040204020203"/>
+                        </a:rPr>
+                        <a:t> 2×1 Gbps </a:t>
+                      </a:r>
+                      <a:r>
+                        <a:rPr lang="zh-CN" altLang="en-US" sz="1100" b="1">
+                          <a:solidFill>
+                            <a:srgbClr val="0F1115"/>
+                          </a:solidFill>
+                          <a:latin typeface="Segoe UI" panose="020B0502040204020203"/>
+                          <a:ea typeface="Segoe UI" panose="020B0502040204020203"/>
+                        </a:rPr>
+                        <a:t>网口</a:t>
+                      </a:r>
+                      <a:r>
+                        <a:rPr lang="zh-CN" altLang="en-US" sz="1100">
+                          <a:solidFill>
+                            <a:srgbClr val="0F1115"/>
+                          </a:solidFill>
+                          <a:latin typeface="Segoe UI" panose="020B0502040204020203"/>
+                          <a:ea typeface="Segoe UI" panose="020B0502040204020203"/>
+                        </a:rPr>
+                        <a:t>（建议</a:t>
+                      </a:r>
+                      <a:r>
+                        <a:rPr lang="en-US" altLang="zh-CN" sz="1100">
+                          <a:solidFill>
+                            <a:srgbClr val="0F1115"/>
+                          </a:solidFill>
+                          <a:latin typeface="Segoe UI" panose="020B0502040204020203"/>
+                          <a:ea typeface="Segoe UI" panose="020B0502040204020203"/>
+                        </a:rPr>
+                        <a:t> </a:t>
+                      </a:r>
+                      <a:r>
+                        <a:rPr lang="en-US" altLang="zh-CN" sz="1100" b="1">
+                          <a:solidFill>
+                            <a:srgbClr val="0F1115"/>
+                          </a:solidFill>
+                          <a:latin typeface="Segoe UI" panose="020B0502040204020203"/>
+                          <a:ea typeface="Segoe UI" panose="020B0502040204020203"/>
+                        </a:rPr>
+                        <a:t>10 Gbps </a:t>
+                      </a:r>
+                      <a:r>
+                        <a:rPr lang="zh-CN" altLang="en-US" sz="1100" b="1">
+                          <a:solidFill>
+                            <a:srgbClr val="0F1115"/>
+                          </a:solidFill>
+                          <a:latin typeface="Segoe UI" panose="020B0502040204020203"/>
+                          <a:ea typeface="Segoe UI" panose="020B0502040204020203"/>
+                        </a:rPr>
+                        <a:t>网口，</a:t>
+                      </a:r>
+                      <a:r>
+                        <a:rPr lang="en-US" altLang="zh-CN" sz="1100" b="1">
+                          <a:solidFill>
+                            <a:srgbClr val="0F1115"/>
+                          </a:solidFill>
+                          <a:latin typeface="Segoe UI" panose="020B0502040204020203"/>
+                          <a:ea typeface="Segoe UI" panose="020B0502040204020203"/>
+                        </a:rPr>
+                        <a:t> </a:t>
+                      </a:r>
+                      <a:r>
+                        <a:rPr lang="zh-CN" altLang="en-US" sz="1100" b="1">
+                          <a:solidFill>
+                            <a:srgbClr val="0F1115"/>
+                          </a:solidFill>
+                          <a:latin typeface="Segoe UI" panose="020B0502040204020203"/>
+                          <a:ea typeface="Segoe UI" panose="020B0502040204020203"/>
+                        </a:rPr>
+                        <a:t>至少两个网口</a:t>
+                      </a:r>
+                      <a:r>
+                        <a:rPr lang="zh-CN" altLang="en-US" sz="1100">
+                          <a:solidFill>
+                            <a:srgbClr val="0F1115"/>
+                          </a:solidFill>
+                          <a:latin typeface="Segoe UI" panose="020B0502040204020203"/>
+                          <a:ea typeface="Segoe UI" panose="020B0502040204020203"/>
+                        </a:rPr>
+                        <a:t>）</a:t>
+                      </a:r>
+                      <a:endParaRPr lang="zh-CN" altLang="en-US" sz="1100">
+                        <a:solidFill>
+                          <a:srgbClr val="0F1115"/>
+                        </a:solidFill>
+                        <a:latin typeface="Segoe UI" panose="020B0502040204020203"/>
+                        <a:ea typeface="Segoe UI" panose="020B0502040204020203"/>
+                      </a:endParaRPr>
+                    </a:p>
+                  </a:txBody>
+                  <a:tcPr marL="152400" marR="152400" marT="95250" marB="95250" anchor="ctr" anchorCtr="0">
+                    <a:lnL>
+                      <a:noFill/>
+                    </a:lnL>
+                    <a:lnR>
+                      <a:noFill/>
+                    </a:lnR>
+                    <a:lnT>
+                      <a:noFill/>
+                    </a:lnT>
+                    <a:lnB>
+                      <a:noFill/>
+                    </a:lnB>
+                    <a:solidFill>
+                      <a:srgbClr val="FFFFFF"/>
+                    </a:solidFill>
+                  </a:tcPr>
+                </a:tc>
+                <a:tc>
+                  <a:txBody>
+                    <a:bodyPr/>
+                    <a:p>
+                      <a:pPr marL="0" indent="0" algn="l">
+                        <a:spcBef>
+                          <a:spcPts val="500"/>
+                        </a:spcBef>
+                        <a:spcAft>
+                          <a:spcPts val="500"/>
+                        </a:spcAft>
+                      </a:pPr>
+                      <a:r>
+                        <a:rPr lang="zh-CN" altLang="en-US" sz="1100">
+                          <a:solidFill>
+                            <a:srgbClr val="0F1115"/>
+                          </a:solidFill>
+                          <a:latin typeface="Segoe UI" panose="020B0502040204020203"/>
+                          <a:ea typeface="Segoe UI" panose="020B0502040204020203"/>
+                        </a:rPr>
+                        <a:t>带宽是视频转发的关键。按每路</a:t>
+                      </a:r>
+                      <a:r>
+                        <a:rPr lang="en-US" altLang="zh-CN" sz="1100">
+                          <a:solidFill>
+                            <a:srgbClr val="0F1115"/>
+                          </a:solidFill>
+                          <a:latin typeface="Segoe UI" panose="020B0502040204020203"/>
+                          <a:ea typeface="Segoe UI" panose="020B0502040204020203"/>
+                        </a:rPr>
+                        <a:t>720P</a:t>
+                      </a:r>
+                      <a:r>
+                        <a:rPr lang="zh-CN" altLang="en-US" sz="1100">
+                          <a:solidFill>
+                            <a:srgbClr val="0F1115"/>
+                          </a:solidFill>
+                          <a:latin typeface="Segoe UI" panose="020B0502040204020203"/>
+                          <a:ea typeface="Segoe UI" panose="020B0502040204020203"/>
+                        </a:rPr>
+                        <a:t>流约</a:t>
+                      </a:r>
+                      <a:r>
+                        <a:rPr lang="en-US" altLang="zh-CN" sz="1100">
+                          <a:solidFill>
+                            <a:srgbClr val="0F1115"/>
+                          </a:solidFill>
+                          <a:latin typeface="Segoe UI" panose="020B0502040204020203"/>
+                          <a:ea typeface="Segoe UI" panose="020B0502040204020203"/>
+                        </a:rPr>
+                        <a:t>2 Mbps</a:t>
+                      </a:r>
+                      <a:r>
+                        <a:rPr lang="zh-CN" altLang="en-US" sz="1100">
+                          <a:solidFill>
+                            <a:srgbClr val="0F1115"/>
+                          </a:solidFill>
+                          <a:latin typeface="Segoe UI" panose="020B0502040204020203"/>
+                          <a:ea typeface="Segoe UI" panose="020B0502040204020203"/>
+                        </a:rPr>
+                        <a:t>计算，</a:t>
+                      </a:r>
+                      <a:r>
+                        <a:rPr lang="en-US" altLang="zh-CN" sz="1100">
+                          <a:solidFill>
+                            <a:srgbClr val="0F1115"/>
+                          </a:solidFill>
+                          <a:latin typeface="Segoe UI" panose="020B0502040204020203"/>
+                          <a:ea typeface="Segoe UI" panose="020B0502040204020203"/>
+                        </a:rPr>
+                        <a:t>500</a:t>
+                      </a:r>
+                      <a:r>
+                        <a:rPr lang="zh-CN" altLang="en-US" sz="1100">
+                          <a:solidFill>
+                            <a:srgbClr val="0F1115"/>
+                          </a:solidFill>
+                          <a:latin typeface="Segoe UI" panose="020B0502040204020203"/>
+                          <a:ea typeface="Segoe UI" panose="020B0502040204020203"/>
+                        </a:rPr>
+                        <a:t>路并发需</a:t>
+                      </a:r>
+                      <a:r>
+                        <a:rPr lang="en-US" altLang="zh-CN" sz="1100">
+                          <a:solidFill>
+                            <a:srgbClr val="0F1115"/>
+                          </a:solidFill>
+                          <a:latin typeface="Segoe UI" panose="020B0502040204020203"/>
+                          <a:ea typeface="Segoe UI" panose="020B0502040204020203"/>
+                        </a:rPr>
+                        <a:t> </a:t>
+                      </a:r>
+                      <a:r>
+                        <a:rPr lang="zh-CN" altLang="en-US" sz="1100" b="1">
+                          <a:solidFill>
+                            <a:srgbClr val="0F1115"/>
+                          </a:solidFill>
+                          <a:latin typeface="Segoe UI" panose="020B0502040204020203"/>
+                          <a:ea typeface="Segoe UI" panose="020B0502040204020203"/>
+                        </a:rPr>
+                        <a:t>约</a:t>
+                      </a:r>
+                      <a:r>
+                        <a:rPr lang="en-US" altLang="zh-CN" sz="1100" b="1">
+                          <a:solidFill>
+                            <a:srgbClr val="0F1115"/>
+                          </a:solidFill>
+                          <a:latin typeface="Segoe UI" panose="020B0502040204020203"/>
+                          <a:ea typeface="Segoe UI" panose="020B0502040204020203"/>
+                        </a:rPr>
+                        <a:t> 1 Gbps</a:t>
+                      </a:r>
+                      <a:r>
+                        <a:rPr lang="en-US" altLang="zh-CN" sz="1100">
+                          <a:solidFill>
+                            <a:srgbClr val="0F1115"/>
+                          </a:solidFill>
+                          <a:latin typeface="Segoe UI" panose="020B0502040204020203"/>
+                          <a:ea typeface="Segoe UI" panose="020B0502040204020203"/>
+                        </a:rPr>
+                        <a:t> </a:t>
+                      </a:r>
+                      <a:r>
+                        <a:rPr lang="zh-CN" altLang="en-US" sz="1100">
+                          <a:solidFill>
+                            <a:srgbClr val="0F1115"/>
+                          </a:solidFill>
+                          <a:latin typeface="Segoe UI" panose="020B0502040204020203"/>
+                          <a:ea typeface="Segoe UI" panose="020B0502040204020203"/>
+                        </a:rPr>
+                        <a:t>带宽。为应对码率波动和突发流量，建议预留</a:t>
+                      </a:r>
+                      <a:r>
+                        <a:rPr lang="en-US" altLang="zh-CN" sz="1100">
+                          <a:solidFill>
+                            <a:srgbClr val="0F1115"/>
+                          </a:solidFill>
+                          <a:latin typeface="Segoe UI" panose="020B0502040204020203"/>
+                          <a:ea typeface="Segoe UI" panose="020B0502040204020203"/>
+                        </a:rPr>
+                        <a:t> </a:t>
+                      </a:r>
+                      <a:r>
+                        <a:rPr lang="en-US" altLang="zh-CN" sz="1100" b="1">
+                          <a:solidFill>
+                            <a:srgbClr val="0F1115"/>
+                          </a:solidFill>
+                          <a:latin typeface="Segoe UI" panose="020B0502040204020203"/>
+                          <a:ea typeface="Segoe UI" panose="020B0502040204020203"/>
+                        </a:rPr>
+                        <a:t>2-3 Gbps</a:t>
+                      </a:r>
+                      <a:r>
+                        <a:rPr lang="en-US" altLang="zh-CN" sz="1100">
+                          <a:solidFill>
+                            <a:srgbClr val="0F1115"/>
+                          </a:solidFill>
+                          <a:latin typeface="Segoe UI" panose="020B0502040204020203"/>
+                          <a:ea typeface="Segoe UI" panose="020B0502040204020203"/>
+                        </a:rPr>
+                        <a:t> </a:t>
+                      </a:r>
+                      <a:r>
+                        <a:rPr lang="zh-CN" altLang="en-US" sz="1100">
+                          <a:solidFill>
+                            <a:srgbClr val="0F1115"/>
+                          </a:solidFill>
+                          <a:latin typeface="Segoe UI" panose="020B0502040204020203"/>
+                          <a:ea typeface="Segoe UI" panose="020B0502040204020203"/>
+                        </a:rPr>
+                        <a:t>的出口带宽，并直接配置</a:t>
+                      </a:r>
+                      <a:r>
+                        <a:rPr lang="en-US" altLang="zh-CN" sz="1100">
+                          <a:solidFill>
+                            <a:srgbClr val="0F1115"/>
+                          </a:solidFill>
+                          <a:latin typeface="Segoe UI" panose="020B0502040204020203"/>
+                          <a:ea typeface="Segoe UI" panose="020B0502040204020203"/>
+                        </a:rPr>
+                        <a:t> </a:t>
+                      </a:r>
+                      <a:r>
+                        <a:rPr lang="en-US" altLang="zh-CN" sz="1100" b="1">
+                          <a:solidFill>
+                            <a:srgbClr val="0F1115"/>
+                          </a:solidFill>
+                          <a:latin typeface="Segoe UI" panose="020B0502040204020203"/>
+                          <a:ea typeface="Segoe UI" panose="020B0502040204020203"/>
+                        </a:rPr>
+                        <a:t>10 Gbps </a:t>
+                      </a:r>
+                      <a:r>
+                        <a:rPr lang="zh-CN" altLang="en-US" sz="1100" b="1">
+                          <a:solidFill>
+                            <a:srgbClr val="0F1115"/>
+                          </a:solidFill>
+                          <a:latin typeface="Segoe UI" panose="020B0502040204020203"/>
+                          <a:ea typeface="Segoe UI" panose="020B0502040204020203"/>
+                        </a:rPr>
+                        <a:t>网口</a:t>
+                      </a:r>
+                      <a:r>
+                        <a:rPr lang="zh-CN" altLang="en-US" sz="1100">
+                          <a:solidFill>
+                            <a:srgbClr val="0F1115"/>
+                          </a:solidFill>
+                          <a:latin typeface="Segoe UI" panose="020B0502040204020203"/>
+                          <a:ea typeface="Segoe UI" panose="020B0502040204020203"/>
+                        </a:rPr>
+                        <a:t>以适应未来扩展</a:t>
+                      </a:r>
+                      <a:endParaRPr lang="zh-CN" altLang="en-US" sz="1100">
+                        <a:solidFill>
+                          <a:srgbClr val="0F1115"/>
+                        </a:solidFill>
+                        <a:latin typeface="Segoe UI" panose="020B0502040204020203"/>
+                        <a:ea typeface="Segoe UI" panose="020B0502040204020203"/>
+                      </a:endParaRPr>
+                    </a:p>
+                  </a:txBody>
+                  <a:tcPr marL="152400" marR="0" marT="95250" marB="95250" anchor="ctr" anchorCtr="0">
+                    <a:lnL>
+                      <a:noFill/>
+                    </a:lnL>
+                    <a:lnR>
+                      <a:noFill/>
+                    </a:lnR>
+                    <a:lnT>
+                      <a:noFill/>
+                    </a:lnT>
+                    <a:lnB>
+                      <a:noFill/>
+                    </a:lnB>
+                    <a:solidFill>
+                      <a:srgbClr val="FFFFFF"/>
+                    </a:solidFill>
+                  </a:tcPr>
+                </a:tc>
+              </a:tr>
+              <a:tr h="0">
+                <a:tc>
+                  <a:txBody>
+                    <a:bodyPr/>
+                    <a:p>
+                      <a:pPr marL="0" indent="0" algn="l">
+                        <a:spcBef>
+                          <a:spcPts val="500"/>
+                        </a:spcBef>
+                        <a:spcAft>
+                          <a:spcPts val="500"/>
+                        </a:spcAft>
+                      </a:pPr>
+                      <a:r>
+                        <a:rPr lang="zh-CN" altLang="en-US" sz="1100" b="1">
+                          <a:solidFill>
+                            <a:srgbClr val="0F1115"/>
+                          </a:solidFill>
+                          <a:latin typeface="Segoe UI" panose="020B0502040204020203"/>
+                          <a:ea typeface="Segoe UI" panose="020B0502040204020203"/>
+                        </a:rPr>
+                        <a:t>电源</a:t>
+                      </a:r>
+                      <a:endParaRPr lang="zh-CN" altLang="en-US" sz="1100" b="1">
+                        <a:solidFill>
+                          <a:srgbClr val="0F1115"/>
+                        </a:solidFill>
+                        <a:latin typeface="Segoe UI" panose="020B0502040204020203"/>
+                        <a:ea typeface="Segoe UI" panose="020B0502040204020203"/>
+                      </a:endParaRPr>
+                    </a:p>
+                  </a:txBody>
+                  <a:tcPr marL="0" marR="152400" marT="95250" marB="95250" anchor="ctr" anchorCtr="0">
+                    <a:lnL>
+                      <a:noFill/>
+                    </a:lnL>
+                    <a:lnR>
+                      <a:noFill/>
+                    </a:lnR>
+                    <a:lnT>
+                      <a:noFill/>
+                    </a:lnT>
+                    <a:lnB>
+                      <a:noFill/>
+                    </a:lnB>
+                    <a:solidFill>
+                      <a:srgbClr val="FFFFFF"/>
+                    </a:solidFill>
+                  </a:tcPr>
+                </a:tc>
+                <a:tc>
+                  <a:txBody>
+                    <a:bodyPr/>
+                    <a:p>
+                      <a:pPr marL="0" indent="0" algn="l">
+                        <a:spcBef>
+                          <a:spcPts val="500"/>
+                        </a:spcBef>
+                        <a:spcAft>
+                          <a:spcPts val="500"/>
+                        </a:spcAft>
+                      </a:pPr>
+                      <a:r>
+                        <a:rPr lang="en-US" altLang="zh-CN" sz="1100" b="1">
+                          <a:solidFill>
+                            <a:srgbClr val="0F1115"/>
+                          </a:solidFill>
+                          <a:latin typeface="Segoe UI" panose="020B0502040204020203"/>
+                          <a:ea typeface="Segoe UI" panose="020B0502040204020203"/>
+                        </a:rPr>
+                        <a:t>800 W 80+ Gold</a:t>
+                      </a:r>
+                      <a:r>
+                        <a:rPr lang="en-US" altLang="zh-CN" sz="1100">
+                          <a:solidFill>
+                            <a:srgbClr val="0F1115"/>
+                          </a:solidFill>
+                          <a:latin typeface="Segoe UI" panose="020B0502040204020203"/>
+                          <a:ea typeface="Segoe UI" panose="020B0502040204020203"/>
+                        </a:rPr>
+                        <a:t> </a:t>
+                      </a:r>
+                      <a:r>
+                        <a:rPr lang="zh-CN" altLang="en-US" sz="1100">
+                          <a:solidFill>
+                            <a:srgbClr val="0F1115"/>
+                          </a:solidFill>
+                          <a:latin typeface="Segoe UI" panose="020B0502040204020203"/>
+                          <a:ea typeface="Segoe UI" panose="020B0502040204020203"/>
+                        </a:rPr>
+                        <a:t>及以上</a:t>
+                      </a:r>
+                      <a:endParaRPr lang="zh-CN" altLang="en-US" sz="1100">
+                        <a:solidFill>
+                          <a:srgbClr val="0F1115"/>
+                        </a:solidFill>
+                        <a:latin typeface="Segoe UI" panose="020B0502040204020203"/>
+                        <a:ea typeface="Segoe UI" panose="020B0502040204020203"/>
+                      </a:endParaRPr>
+                    </a:p>
+                  </a:txBody>
+                  <a:tcPr marL="152400" marR="152400" marT="95250" marB="95250" anchor="ctr" anchorCtr="0">
+                    <a:lnL>
+                      <a:noFill/>
+                    </a:lnL>
+                    <a:lnR>
+                      <a:noFill/>
+                    </a:lnR>
+                    <a:lnT>
+                      <a:noFill/>
+                    </a:lnT>
+                    <a:lnB>
+                      <a:noFill/>
+                    </a:lnB>
+                    <a:solidFill>
+                      <a:srgbClr val="FFFFFF"/>
+                    </a:solidFill>
+                  </a:tcPr>
+                </a:tc>
+                <a:tc>
+                  <a:txBody>
+                    <a:bodyPr/>
+                    <a:p>
+                      <a:pPr marL="0" indent="0" algn="l">
+                        <a:spcBef>
+                          <a:spcPts val="500"/>
+                        </a:spcBef>
+                        <a:spcAft>
+                          <a:spcPts val="500"/>
+                        </a:spcAft>
+                      </a:pPr>
+                      <a:r>
+                        <a:rPr lang="zh-CN" altLang="en-US" sz="1100">
+                          <a:solidFill>
+                            <a:srgbClr val="0F1115"/>
+                          </a:solidFill>
+                          <a:latin typeface="Segoe UI" panose="020B0502040204020203"/>
+                          <a:ea typeface="Segoe UI" panose="020B0502040204020203"/>
+                        </a:rPr>
+                        <a:t>确保稳定供电，并为后续硬件升级留有余量</a:t>
+                      </a:r>
+                      <a:endParaRPr lang="zh-CN" altLang="en-US" sz="1100">
+                        <a:solidFill>
+                          <a:srgbClr val="0F1115"/>
+                        </a:solidFill>
+                        <a:latin typeface="Segoe UI" panose="020B0502040204020203"/>
+                        <a:ea typeface="Segoe UI" panose="020B0502040204020203"/>
+                      </a:endParaRPr>
+                    </a:p>
+                  </a:txBody>
+                  <a:tcPr marL="152400" marR="0" marT="95250" marB="95250" anchor="ctr" anchorCtr="0">
+                    <a:lnL>
+                      <a:noFill/>
+                    </a:lnL>
+                    <a:lnR>
+                      <a:noFill/>
+                    </a:lnR>
+                    <a:lnT>
+                      <a:noFill/>
+                    </a:lnT>
+                    <a:lnB>
+                      <a:noFill/>
+                    </a:lnB>
+                    <a:solidFill>
+                      <a:srgbClr val="FFFFFF"/>
+                    </a:solidFill>
+                  </a:tcPr>
+                </a:tc>
+              </a:tr>
+              <a:tr h="0">
+                <a:tc>
+                  <a:txBody>
+                    <a:bodyPr/>
+                    <a:p>
+                      <a:pPr marL="0" indent="0" algn="l">
+                        <a:spcBef>
+                          <a:spcPts val="500"/>
+                        </a:spcBef>
+                        <a:spcAft>
+                          <a:spcPts val="500"/>
+                        </a:spcAft>
+                      </a:pPr>
+                      <a:r>
+                        <a:rPr lang="zh-CN" altLang="en-US" sz="1100" b="1">
+                          <a:solidFill>
+                            <a:srgbClr val="0F1115"/>
+                          </a:solidFill>
+                          <a:latin typeface="Segoe UI" panose="020B0502040204020203"/>
+                          <a:ea typeface="Segoe UI" panose="020B0502040204020203"/>
+                        </a:rPr>
+                        <a:t>机箱</a:t>
+                      </a:r>
+                      <a:endParaRPr lang="zh-CN" altLang="en-US" sz="1100" b="1">
+                        <a:solidFill>
+                          <a:srgbClr val="0F1115"/>
+                        </a:solidFill>
+                        <a:latin typeface="Segoe UI" panose="020B0502040204020203"/>
+                        <a:ea typeface="Segoe UI" panose="020B0502040204020203"/>
+                      </a:endParaRPr>
+                    </a:p>
+                  </a:txBody>
+                  <a:tcPr marL="0" marR="152400" marT="95250" marB="95250" anchor="ctr" anchorCtr="0">
+                    <a:lnL>
+                      <a:noFill/>
+                    </a:lnL>
+                    <a:lnR>
+                      <a:noFill/>
+                    </a:lnR>
+                    <a:lnT>
+                      <a:noFill/>
+                    </a:lnT>
+                    <a:lnB>
+                      <a:noFill/>
+                    </a:lnB>
+                    <a:solidFill>
+                      <a:srgbClr val="FFFFFF"/>
+                    </a:solidFill>
+                  </a:tcPr>
+                </a:tc>
+                <a:tc>
+                  <a:txBody>
+                    <a:bodyPr/>
+                    <a:p>
+                      <a:pPr marL="0" indent="0" algn="l">
+                        <a:spcBef>
+                          <a:spcPts val="500"/>
+                        </a:spcBef>
+                        <a:spcAft>
+                          <a:spcPts val="500"/>
+                        </a:spcAft>
+                      </a:pPr>
+                      <a:r>
+                        <a:rPr lang="en-US" altLang="zh-CN" sz="1100" b="1">
+                          <a:solidFill>
+                            <a:srgbClr val="0F1115"/>
+                          </a:solidFill>
+                          <a:latin typeface="Segoe UI" panose="020B0502040204020203"/>
+                          <a:ea typeface="Segoe UI" panose="020B0502040204020203"/>
+                        </a:rPr>
+                        <a:t>1U/2U </a:t>
+                      </a:r>
+                      <a:r>
+                        <a:rPr lang="zh-CN" altLang="en-US" sz="1100" b="1">
+                          <a:solidFill>
+                            <a:srgbClr val="0F1115"/>
+                          </a:solidFill>
+                          <a:latin typeface="Segoe UI" panose="020B0502040204020203"/>
+                          <a:ea typeface="Segoe UI" panose="020B0502040204020203"/>
+                        </a:rPr>
+                        <a:t>机架式服务器</a:t>
+                      </a:r>
+                      <a:r>
+                        <a:rPr lang="zh-CN" altLang="en-US" sz="1100">
+                          <a:solidFill>
+                            <a:srgbClr val="0F1115"/>
+                          </a:solidFill>
+                          <a:latin typeface="Segoe UI" panose="020B0502040204020203"/>
+                          <a:ea typeface="Segoe UI" panose="020B0502040204020203"/>
+                        </a:rPr>
+                        <a:t>（具备良好散热）</a:t>
+                      </a:r>
+                      <a:endParaRPr lang="zh-CN" altLang="en-US" sz="1100">
+                        <a:solidFill>
+                          <a:srgbClr val="0F1115"/>
+                        </a:solidFill>
+                        <a:latin typeface="Segoe UI" panose="020B0502040204020203"/>
+                        <a:ea typeface="Segoe UI" panose="020B0502040204020203"/>
+                      </a:endParaRPr>
+                    </a:p>
+                  </a:txBody>
+                  <a:tcPr marL="152400" marR="152400" marT="95250" marB="95250" anchor="ctr" anchorCtr="0">
+                    <a:lnL>
+                      <a:noFill/>
+                    </a:lnL>
+                    <a:lnR>
+                      <a:noFill/>
+                    </a:lnR>
+                    <a:lnT>
+                      <a:noFill/>
+                    </a:lnT>
+                    <a:lnB>
+                      <a:noFill/>
+                    </a:lnB>
+                    <a:solidFill>
+                      <a:srgbClr val="FFFFFF"/>
+                    </a:solidFill>
+                  </a:tcPr>
+                </a:tc>
+                <a:tc>
+                  <a:txBody>
+                    <a:bodyPr/>
+                    <a:p>
+                      <a:pPr marL="0" indent="0" algn="l">
+                        <a:spcBef>
+                          <a:spcPts val="500"/>
+                        </a:spcBef>
+                        <a:spcAft>
+                          <a:spcPts val="500"/>
+                        </a:spcAft>
+                      </a:pPr>
+                      <a:r>
+                        <a:rPr lang="zh-CN" altLang="en-US" sz="1100">
+                          <a:solidFill>
+                            <a:srgbClr val="0F1115"/>
+                          </a:solidFill>
+                          <a:latin typeface="Segoe UI" panose="020B0502040204020203"/>
+                          <a:ea typeface="Segoe UI" panose="020B0502040204020203"/>
+                        </a:rPr>
+                        <a:t>便于在机房部署，保证长时间高负载运行</a:t>
+                      </a:r>
+                      <a:endParaRPr lang="zh-CN" altLang="en-US" sz="1100">
+                        <a:solidFill>
+                          <a:srgbClr val="0F1115"/>
+                        </a:solidFill>
+                        <a:latin typeface="Segoe UI" panose="020B0502040204020203"/>
+                        <a:ea typeface="Segoe UI" panose="020B0502040204020203"/>
+                      </a:endParaRPr>
+                    </a:p>
+                  </a:txBody>
+                  <a:tcPr marL="152400" marR="0" marT="95250" marB="95250" anchor="ctr" anchorCtr="0">
+                    <a:lnL>
+                      <a:noFill/>
+                    </a:lnL>
+                    <a:lnR>
+                      <a:noFill/>
+                    </a:lnR>
+                    <a:lnT>
+                      <a:noFill/>
+                    </a:lnT>
+                    <a:lnB>
+                      <a:noFill/>
+                    </a:lnB>
+                    <a:solidFill>
+                      <a:srgbClr val="FFFFFF"/>
+                    </a:solidFill>
+                  </a:tcPr>
+                </a:tc>
+              </a:tr>
+            </a:tbl>
+          </a:graphicData>
+        </a:graphic>
+      </p:graphicFrame>
     </p:spTree>
-    <p:extLst>
-      <p:ext uri="{BB962C8B-B14F-4D97-AF65-F5344CB8AC3E}">
-        <p14:creationId xmlns:p14="http://schemas.microsoft.com/office/powerpoint/2010/main" val="357523687"/>
-      </p:ext>
-    </p:extLst>
   </p:cSld>
   <p:clrMapOvr>
     <a:masterClrMapping/>
@@ -14067,22 +17045,206 @@
             <p:ph type="title"/>
           </p:nvPr>
         </p:nvSpPr>
-        <p:spPr/>
+        <p:spPr>
+          <a:xfrm>
+            <a:off x="-1" y="0"/>
+            <a:ext cx="12301415" cy="1813169"/>
+          </a:xfrm>
+          <a:solidFill>
+            <a:srgbClr val="00B050"/>
+          </a:solidFill>
+        </p:spPr>
         <p:txBody>
           <a:bodyPr/>
           <a:lstStyle/>
           <a:p>
             <a:r>
               <a:rPr lang="zh-CN" altLang="en-US" dirty="0" smtClean="0"/>
-              <a:t>响应时延优化方法</a:t>
+              <a:t>影响时延的关键因素</a:t>
+            </a:r>
+            <a:endParaRPr lang="zh-CN" altLang="en-US" dirty="0"/>
+          </a:p>
+        </p:txBody>
+      </p:sp>
+      <p:sp>
+        <p:nvSpPr>
+          <p:cNvPr id="4" name="矩形 3"/>
+          <p:cNvSpPr/>
+          <p:nvPr/>
+        </p:nvSpPr>
+        <p:spPr>
+          <a:xfrm>
+            <a:off x="2258645" y="2563447"/>
+            <a:ext cx="1273907" cy="914400"/>
+          </a:xfrm>
+          <a:prstGeom prst="rect">
+            <a:avLst/>
+          </a:prstGeom>
+        </p:spPr>
+        <p:style>
+          <a:lnRef idx="2">
+            <a:schemeClr val="accent1">
+              <a:shade val="50000"/>
+            </a:schemeClr>
+          </a:lnRef>
+          <a:fillRef idx="1">
+            <a:schemeClr val="accent1"/>
+          </a:fillRef>
+          <a:effectRef idx="0">
+            <a:schemeClr val="accent1"/>
+          </a:effectRef>
+          <a:fontRef idx="minor">
+            <a:schemeClr val="lt1"/>
+          </a:fontRef>
+        </p:style>
+        <p:txBody>
+          <a:bodyPr rtlCol="0" anchor="ctr"/>
+          <a:lstStyle/>
+          <a:p>
+            <a:pPr algn="ctr"/>
+            <a:r>
+              <a:rPr lang="zh-CN" altLang="en-US" dirty="0" smtClean="0"/>
+              <a:t>云电脑渲染时延</a:t>
+            </a:r>
+            <a:endParaRPr lang="zh-CN" altLang="en-US" dirty="0"/>
+          </a:p>
+        </p:txBody>
+      </p:sp>
+      <p:sp>
+        <p:nvSpPr>
+          <p:cNvPr id="5" name="矩形 4"/>
+          <p:cNvSpPr/>
+          <p:nvPr/>
+        </p:nvSpPr>
+        <p:spPr>
+          <a:xfrm>
+            <a:off x="5029199" y="2571262"/>
+            <a:ext cx="1273907" cy="832339"/>
+          </a:xfrm>
+          <a:prstGeom prst="rect">
+            <a:avLst/>
+          </a:prstGeom>
+        </p:spPr>
+        <p:style>
+          <a:lnRef idx="2">
+            <a:schemeClr val="accent1">
+              <a:shade val="50000"/>
+            </a:schemeClr>
+          </a:lnRef>
+          <a:fillRef idx="1">
+            <a:schemeClr val="accent1"/>
+          </a:fillRef>
+          <a:effectRef idx="0">
+            <a:schemeClr val="accent1"/>
+          </a:effectRef>
+          <a:fontRef idx="minor">
+            <a:schemeClr val="lt1"/>
+          </a:fontRef>
+        </p:style>
+        <p:txBody>
+          <a:bodyPr rtlCol="0" anchor="ctr"/>
+          <a:lstStyle/>
+          <a:p>
+            <a:pPr algn="ctr"/>
+            <a:r>
+              <a:rPr lang="zh-CN" altLang="en-US" dirty="0" smtClean="0"/>
+              <a:t>视频编解码时延</a:t>
+            </a:r>
+            <a:endParaRPr lang="zh-CN" altLang="en-US" dirty="0"/>
+          </a:p>
+        </p:txBody>
+      </p:sp>
+      <p:sp>
+        <p:nvSpPr>
+          <p:cNvPr id="6" name="矩形 5"/>
+          <p:cNvSpPr/>
+          <p:nvPr/>
+        </p:nvSpPr>
+        <p:spPr>
+          <a:xfrm>
+            <a:off x="7487137" y="2563447"/>
+            <a:ext cx="1273907" cy="832339"/>
+          </a:xfrm>
+          <a:prstGeom prst="rect">
+            <a:avLst/>
+          </a:prstGeom>
+        </p:spPr>
+        <p:style>
+          <a:lnRef idx="2">
+            <a:schemeClr val="accent1">
+              <a:shade val="50000"/>
+            </a:schemeClr>
+          </a:lnRef>
+          <a:fillRef idx="1">
+            <a:schemeClr val="accent1"/>
+          </a:fillRef>
+          <a:effectRef idx="0">
+            <a:schemeClr val="accent1"/>
+          </a:effectRef>
+          <a:fontRef idx="minor">
+            <a:schemeClr val="lt1"/>
+          </a:fontRef>
+        </p:style>
+        <p:txBody>
+          <a:bodyPr rtlCol="0" anchor="ctr"/>
+          <a:lstStyle/>
+          <a:p>
+            <a:pPr algn="ctr"/>
+            <a:r>
+              <a:rPr lang="zh-CN" altLang="en-US" dirty="0" smtClean="0"/>
+              <a:t>网络时延和掉包</a:t>
+            </a:r>
+            <a:endParaRPr lang="zh-CN" altLang="en-US" dirty="0"/>
+          </a:p>
+        </p:txBody>
+      </p:sp>
+      <p:sp>
+        <p:nvSpPr>
+          <p:cNvPr id="7" name="矩形 6"/>
+          <p:cNvSpPr/>
+          <p:nvPr/>
+        </p:nvSpPr>
+        <p:spPr>
+          <a:xfrm>
+            <a:off x="3755292" y="4280268"/>
+            <a:ext cx="1273907" cy="914400"/>
+          </a:xfrm>
+          <a:prstGeom prst="rect">
+            <a:avLst/>
+          </a:prstGeom>
+        </p:spPr>
+        <p:style>
+          <a:lnRef idx="2">
+            <a:schemeClr val="accent1">
+              <a:shade val="50000"/>
+            </a:schemeClr>
+          </a:lnRef>
+          <a:fillRef idx="1">
+            <a:schemeClr val="accent1"/>
+          </a:fillRef>
+          <a:effectRef idx="0">
+            <a:schemeClr val="accent1"/>
+          </a:effectRef>
+          <a:fontRef idx="minor">
+            <a:schemeClr val="lt1"/>
+          </a:fontRef>
+        </p:style>
+        <p:txBody>
+          <a:bodyPr rtlCol="0" anchor="ctr"/>
+          <a:lstStyle/>
+          <a:p>
+            <a:pPr algn="ctr"/>
+            <a:r>
+              <a:rPr lang="zh-CN" altLang="en-US" dirty="0" smtClean="0"/>
+              <a:t>渲染</a:t>
             </a:r>
             <a:r>
               <a:rPr lang="en-US" altLang="zh-CN" dirty="0" smtClean="0"/>
-              <a:t>-</a:t>
+              <a:t>/</a:t>
             </a:r>
             <a:r>
               <a:rPr lang="zh-CN" altLang="en-US" dirty="0" smtClean="0"/>
-              <a:t>网络传输时延优化</a:t>
+              <a:t>显示帧率</a:t>
             </a:r>
             <a:endParaRPr lang="zh-CN" altLang="en-US" dirty="0"/>
           </a:p>
@@ -14090,14 +17252,14 @@
       </p:sp>
       <p:sp>
         <p:nvSpPr>
-          <p:cNvPr id="4" name="矩形 3"/>
-          <p:cNvSpPr/>
-          <p:nvPr/>
-        </p:nvSpPr>
-        <p:spPr>
-          <a:xfrm>
-            <a:off x="250092" y="3618523"/>
-            <a:ext cx="1844431" cy="719015"/>
+          <p:cNvPr id="8" name="矩形 7"/>
+          <p:cNvSpPr/>
+          <p:nvPr/>
+        </p:nvSpPr>
+        <p:spPr>
+          <a:xfrm>
+            <a:off x="6596185" y="4268545"/>
+            <a:ext cx="1273907" cy="914400"/>
           </a:xfrm>
           <a:prstGeom prst="rect">
             <a:avLst/>
@@ -14126,949 +17288,13 @@
             <a:pPr algn="ctr"/>
             <a:r>
               <a:rPr lang="zh-CN" altLang="en-US" dirty="0" smtClean="0"/>
-              <a:t>网络传输优化</a:t>
+              <a:t>按键采集帧率</a:t>
             </a:r>
             <a:endParaRPr lang="zh-CN" altLang="en-US" dirty="0"/>
           </a:p>
         </p:txBody>
       </p:sp>
-      <p:sp>
-        <p:nvSpPr>
-          <p:cNvPr id="5" name="矩形 4"/>
-          <p:cNvSpPr/>
-          <p:nvPr/>
-        </p:nvSpPr>
-        <p:spPr>
-          <a:xfrm>
-            <a:off x="2543906" y="2239963"/>
-            <a:ext cx="1285631" cy="719015"/>
-          </a:xfrm>
-          <a:prstGeom prst="rect">
-            <a:avLst/>
-          </a:prstGeom>
-        </p:spPr>
-        <p:style>
-          <a:lnRef idx="2">
-            <a:schemeClr val="accent1">
-              <a:shade val="50000"/>
-            </a:schemeClr>
-          </a:lnRef>
-          <a:fillRef idx="1">
-            <a:schemeClr val="accent1"/>
-          </a:fillRef>
-          <a:effectRef idx="0">
-            <a:schemeClr val="accent1"/>
-          </a:effectRef>
-          <a:fontRef idx="minor">
-            <a:schemeClr val="lt1"/>
-          </a:fontRef>
-        </p:style>
-        <p:txBody>
-          <a:bodyPr rtlCol="0" anchor="ctr"/>
-          <a:lstStyle/>
-          <a:p>
-            <a:pPr algn="ctr"/>
-            <a:r>
-              <a:rPr lang="zh-CN" altLang="en-US" dirty="0" smtClean="0"/>
-              <a:t>网络</a:t>
-            </a:r>
-            <a:endParaRPr lang="zh-CN" altLang="en-US" dirty="0"/>
-          </a:p>
-        </p:txBody>
-      </p:sp>
-      <p:sp>
-        <p:nvSpPr>
-          <p:cNvPr id="6" name="矩形 5"/>
-          <p:cNvSpPr/>
-          <p:nvPr/>
-        </p:nvSpPr>
-        <p:spPr>
-          <a:xfrm>
-            <a:off x="2543907" y="4626708"/>
-            <a:ext cx="1285631" cy="719015"/>
-          </a:xfrm>
-          <a:prstGeom prst="rect">
-            <a:avLst/>
-          </a:prstGeom>
-        </p:spPr>
-        <p:style>
-          <a:lnRef idx="2">
-            <a:schemeClr val="accent1">
-              <a:shade val="50000"/>
-            </a:schemeClr>
-          </a:lnRef>
-          <a:fillRef idx="1">
-            <a:schemeClr val="accent1"/>
-          </a:fillRef>
-          <a:effectRef idx="0">
-            <a:schemeClr val="accent1"/>
-          </a:effectRef>
-          <a:fontRef idx="minor">
-            <a:schemeClr val="lt1"/>
-          </a:fontRef>
-        </p:style>
-        <p:txBody>
-          <a:bodyPr rtlCol="0" anchor="ctr"/>
-          <a:lstStyle/>
-          <a:p>
-            <a:pPr algn="ctr"/>
-            <a:r>
-              <a:rPr lang="zh-CN" altLang="en-US" dirty="0" smtClean="0"/>
-              <a:t>数据传输优化</a:t>
-            </a:r>
-            <a:endParaRPr lang="zh-CN" altLang="en-US" dirty="0"/>
-          </a:p>
-        </p:txBody>
-      </p:sp>
-      <p:sp>
-        <p:nvSpPr>
-          <p:cNvPr id="7" name="矩形 6"/>
-          <p:cNvSpPr/>
-          <p:nvPr/>
-        </p:nvSpPr>
-        <p:spPr>
-          <a:xfrm>
-            <a:off x="4936391" y="1791616"/>
-            <a:ext cx="1285631" cy="719015"/>
-          </a:xfrm>
-          <a:prstGeom prst="rect">
-            <a:avLst/>
-          </a:prstGeom>
-        </p:spPr>
-        <p:style>
-          <a:lnRef idx="2">
-            <a:schemeClr val="accent1">
-              <a:shade val="50000"/>
-            </a:schemeClr>
-          </a:lnRef>
-          <a:fillRef idx="1">
-            <a:schemeClr val="accent1"/>
-          </a:fillRef>
-          <a:effectRef idx="0">
-            <a:schemeClr val="accent1"/>
-          </a:effectRef>
-          <a:fontRef idx="minor">
-            <a:schemeClr val="lt1"/>
-          </a:fontRef>
-        </p:style>
-        <p:txBody>
-          <a:bodyPr rtlCol="0" anchor="ctr"/>
-          <a:lstStyle/>
-          <a:p>
-            <a:pPr algn="ctr"/>
-            <a:r>
-              <a:rPr lang="zh-CN" altLang="en-US" dirty="0" smtClean="0"/>
-              <a:t>优化</a:t>
-            </a:r>
-            <a:r>
-              <a:rPr lang="en-US" altLang="zh-CN" dirty="0" smtClean="0"/>
-              <a:t>IDC</a:t>
-            </a:r>
-            <a:r>
-              <a:rPr lang="zh-CN" altLang="en-US" dirty="0" smtClean="0"/>
-              <a:t>机房部署</a:t>
-            </a:r>
-            <a:endParaRPr lang="zh-CN" altLang="en-US" dirty="0"/>
-          </a:p>
-        </p:txBody>
-      </p:sp>
-      <p:sp>
-        <p:nvSpPr>
-          <p:cNvPr id="8" name="矩形 7"/>
-          <p:cNvSpPr/>
-          <p:nvPr/>
-        </p:nvSpPr>
-        <p:spPr>
-          <a:xfrm>
-            <a:off x="4810369" y="3047574"/>
-            <a:ext cx="1285631" cy="719015"/>
-          </a:xfrm>
-          <a:prstGeom prst="rect">
-            <a:avLst/>
-          </a:prstGeom>
-        </p:spPr>
-        <p:style>
-          <a:lnRef idx="2">
-            <a:schemeClr val="accent1">
-              <a:shade val="50000"/>
-            </a:schemeClr>
-          </a:lnRef>
-          <a:fillRef idx="1">
-            <a:schemeClr val="accent1"/>
-          </a:fillRef>
-          <a:effectRef idx="0">
-            <a:schemeClr val="accent1"/>
-          </a:effectRef>
-          <a:fontRef idx="minor">
-            <a:schemeClr val="lt1"/>
-          </a:fontRef>
-        </p:style>
-        <p:txBody>
-          <a:bodyPr rtlCol="0" anchor="ctr"/>
-          <a:lstStyle/>
-          <a:p>
-            <a:pPr algn="ctr"/>
-            <a:r>
-              <a:rPr lang="zh-CN" altLang="en-US" dirty="0" smtClean="0"/>
-              <a:t>优化路由策略</a:t>
-            </a:r>
-            <a:endParaRPr lang="zh-CN" altLang="en-US" dirty="0"/>
-          </a:p>
-        </p:txBody>
-      </p:sp>
-      <p:sp>
-        <p:nvSpPr>
-          <p:cNvPr id="9" name="矩形 8"/>
-          <p:cNvSpPr/>
-          <p:nvPr/>
-        </p:nvSpPr>
-        <p:spPr>
-          <a:xfrm>
-            <a:off x="6830644" y="2257302"/>
-            <a:ext cx="1191847" cy="397303"/>
-          </a:xfrm>
-          <a:prstGeom prst="rect">
-            <a:avLst/>
-          </a:prstGeom>
-        </p:spPr>
-        <p:style>
-          <a:lnRef idx="2">
-            <a:schemeClr val="accent1">
-              <a:shade val="50000"/>
-            </a:schemeClr>
-          </a:lnRef>
-          <a:fillRef idx="1">
-            <a:schemeClr val="accent1"/>
-          </a:fillRef>
-          <a:effectRef idx="0">
-            <a:schemeClr val="accent1"/>
-          </a:effectRef>
-          <a:fontRef idx="minor">
-            <a:schemeClr val="lt1"/>
-          </a:fontRef>
-        </p:style>
-        <p:txBody>
-          <a:bodyPr rtlCol="0" anchor="ctr"/>
-          <a:lstStyle/>
-          <a:p>
-            <a:pPr algn="ctr"/>
-            <a:r>
-              <a:rPr lang="zh-CN" altLang="en-US" sz="1000" dirty="0" smtClean="0"/>
-              <a:t>优先选择</a:t>
-            </a:r>
-            <a:r>
-              <a:rPr lang="en-US" altLang="zh-CN" sz="1000" dirty="0" smtClean="0"/>
-              <a:t>RTT</a:t>
-            </a:r>
-            <a:r>
-              <a:rPr lang="zh-CN" altLang="en-US" sz="1000" dirty="0" smtClean="0"/>
-              <a:t>时延小的机房</a:t>
-            </a:r>
-            <a:endParaRPr lang="zh-CN" altLang="en-US" sz="1000" dirty="0"/>
-          </a:p>
-        </p:txBody>
-      </p:sp>
-      <p:sp>
-        <p:nvSpPr>
-          <p:cNvPr id="10" name="矩形 9"/>
-          <p:cNvSpPr/>
-          <p:nvPr/>
-        </p:nvSpPr>
-        <p:spPr>
-          <a:xfrm>
-            <a:off x="6951783" y="1655519"/>
-            <a:ext cx="949571" cy="345219"/>
-          </a:xfrm>
-          <a:prstGeom prst="rect">
-            <a:avLst/>
-          </a:prstGeom>
-        </p:spPr>
-        <p:style>
-          <a:lnRef idx="2">
-            <a:schemeClr val="accent1">
-              <a:shade val="50000"/>
-            </a:schemeClr>
-          </a:lnRef>
-          <a:fillRef idx="1">
-            <a:schemeClr val="accent1"/>
-          </a:fillRef>
-          <a:effectRef idx="0">
-            <a:schemeClr val="accent1"/>
-          </a:effectRef>
-          <a:fontRef idx="minor">
-            <a:schemeClr val="lt1"/>
-          </a:fontRef>
-        </p:style>
-        <p:txBody>
-          <a:bodyPr rtlCol="0" anchor="ctr"/>
-          <a:lstStyle/>
-          <a:p>
-            <a:pPr algn="ctr"/>
-            <a:r>
-              <a:rPr lang="zh-CN" altLang="en-US" sz="1000" dirty="0" smtClean="0"/>
-              <a:t>用户距离</a:t>
-            </a:r>
-            <a:r>
-              <a:rPr lang="en-US" altLang="zh-CN" sz="1000" dirty="0" smtClean="0"/>
-              <a:t>IDC</a:t>
-            </a:r>
-            <a:r>
-              <a:rPr lang="zh-CN" altLang="en-US" sz="1000" dirty="0" smtClean="0"/>
-              <a:t>不超过</a:t>
-            </a:r>
-            <a:r>
-              <a:rPr lang="en-US" altLang="zh-CN" sz="1000" dirty="0" smtClean="0"/>
-              <a:t>400KM</a:t>
-            </a:r>
-            <a:endParaRPr lang="zh-CN" altLang="en-US" sz="1000" dirty="0"/>
-          </a:p>
-        </p:txBody>
-      </p:sp>
-      <p:sp>
-        <p:nvSpPr>
-          <p:cNvPr id="11" name="矩形 10"/>
-          <p:cNvSpPr/>
-          <p:nvPr/>
-        </p:nvSpPr>
-        <p:spPr>
-          <a:xfrm>
-            <a:off x="8979875" y="1729765"/>
-            <a:ext cx="1285631" cy="527538"/>
-          </a:xfrm>
-          <a:prstGeom prst="rect">
-            <a:avLst/>
-          </a:prstGeom>
-        </p:spPr>
-        <p:style>
-          <a:lnRef idx="2">
-            <a:schemeClr val="accent1">
-              <a:shade val="50000"/>
-            </a:schemeClr>
-          </a:lnRef>
-          <a:fillRef idx="1">
-            <a:schemeClr val="accent1"/>
-          </a:fillRef>
-          <a:effectRef idx="0">
-            <a:schemeClr val="accent1"/>
-          </a:effectRef>
-          <a:fontRef idx="minor">
-            <a:schemeClr val="lt1"/>
-          </a:fontRef>
-        </p:style>
-        <p:txBody>
-          <a:bodyPr rtlCol="0" anchor="ctr"/>
-          <a:lstStyle/>
-          <a:p>
-            <a:pPr algn="ctr"/>
-            <a:r>
-              <a:rPr lang="en-US" altLang="zh-CN" sz="1000" dirty="0" smtClean="0"/>
-              <a:t>RTT</a:t>
-            </a:r>
-            <a:r>
-              <a:rPr lang="zh-CN" altLang="en-US" sz="1000" dirty="0" smtClean="0"/>
-              <a:t>延时控制在</a:t>
-            </a:r>
-            <a:r>
-              <a:rPr lang="en-US" altLang="zh-CN" sz="1000" dirty="0" smtClean="0"/>
-              <a:t>40ms</a:t>
-            </a:r>
-            <a:endParaRPr lang="zh-CN" altLang="en-US" sz="1000" dirty="0"/>
-          </a:p>
-        </p:txBody>
-      </p:sp>
-      <p:sp>
-        <p:nvSpPr>
-          <p:cNvPr id="12" name="矩形 11"/>
-          <p:cNvSpPr/>
-          <p:nvPr/>
-        </p:nvSpPr>
-        <p:spPr>
-          <a:xfrm>
-            <a:off x="6783751" y="3154790"/>
-            <a:ext cx="1555264" cy="719015"/>
-          </a:xfrm>
-          <a:prstGeom prst="rect">
-            <a:avLst/>
-          </a:prstGeom>
-        </p:spPr>
-        <p:style>
-          <a:lnRef idx="2">
-            <a:schemeClr val="accent1">
-              <a:shade val="50000"/>
-            </a:schemeClr>
-          </a:lnRef>
-          <a:fillRef idx="1">
-            <a:schemeClr val="accent1"/>
-          </a:fillRef>
-          <a:effectRef idx="0">
-            <a:schemeClr val="accent1"/>
-          </a:effectRef>
-          <a:fontRef idx="minor">
-            <a:schemeClr val="lt1"/>
-          </a:fontRef>
-        </p:style>
-        <p:txBody>
-          <a:bodyPr rtlCol="0" anchor="ctr"/>
-          <a:lstStyle/>
-          <a:p>
-            <a:pPr algn="ctr"/>
-            <a:r>
-              <a:rPr lang="zh-CN" altLang="en-US" dirty="0" smtClean="0"/>
-              <a:t>优先选择</a:t>
-            </a:r>
-            <a:r>
-              <a:rPr lang="en-US" altLang="zh-CN" dirty="0" smtClean="0"/>
-              <a:t>RTT</a:t>
-            </a:r>
-            <a:r>
-              <a:rPr lang="zh-CN" altLang="en-US" dirty="0" smtClean="0"/>
-              <a:t>时延小机房</a:t>
-            </a:r>
-            <a:endParaRPr lang="zh-CN" altLang="en-US" dirty="0"/>
-          </a:p>
-        </p:txBody>
-      </p:sp>
-      <p:sp>
-        <p:nvSpPr>
-          <p:cNvPr id="13" name="矩形 12"/>
-          <p:cNvSpPr/>
-          <p:nvPr/>
-        </p:nvSpPr>
-        <p:spPr>
-          <a:xfrm>
-            <a:off x="4810368" y="4313851"/>
-            <a:ext cx="1285631" cy="719015"/>
-          </a:xfrm>
-          <a:prstGeom prst="rect">
-            <a:avLst/>
-          </a:prstGeom>
-        </p:spPr>
-        <p:style>
-          <a:lnRef idx="2">
-            <a:schemeClr val="accent1">
-              <a:shade val="50000"/>
-            </a:schemeClr>
-          </a:lnRef>
-          <a:fillRef idx="1">
-            <a:schemeClr val="accent1"/>
-          </a:fillRef>
-          <a:effectRef idx="0">
-            <a:schemeClr val="accent1"/>
-          </a:effectRef>
-          <a:fontRef idx="minor">
-            <a:schemeClr val="lt1"/>
-          </a:fontRef>
-        </p:style>
-        <p:txBody>
-          <a:bodyPr rtlCol="0" anchor="ctr"/>
-          <a:lstStyle/>
-          <a:p>
-            <a:pPr algn="ctr"/>
-            <a:r>
-              <a:rPr lang="zh-CN" altLang="en-US" dirty="0" smtClean="0"/>
-              <a:t>增加吞吐量</a:t>
-            </a:r>
-            <a:endParaRPr lang="zh-CN" altLang="en-US" dirty="0"/>
-          </a:p>
-        </p:txBody>
-      </p:sp>
-      <p:sp>
-        <p:nvSpPr>
-          <p:cNvPr id="14" name="矩形 13"/>
-          <p:cNvSpPr/>
-          <p:nvPr/>
-        </p:nvSpPr>
-        <p:spPr>
-          <a:xfrm>
-            <a:off x="4810368" y="5345723"/>
-            <a:ext cx="1285631" cy="719015"/>
-          </a:xfrm>
-          <a:prstGeom prst="rect">
-            <a:avLst/>
-          </a:prstGeom>
-        </p:spPr>
-        <p:style>
-          <a:lnRef idx="2">
-            <a:schemeClr val="accent1">
-              <a:shade val="50000"/>
-            </a:schemeClr>
-          </a:lnRef>
-          <a:fillRef idx="1">
-            <a:schemeClr val="accent1"/>
-          </a:fillRef>
-          <a:effectRef idx="0">
-            <a:schemeClr val="accent1"/>
-          </a:effectRef>
-          <a:fontRef idx="minor">
-            <a:schemeClr val="lt1"/>
-          </a:fontRef>
-        </p:style>
-        <p:txBody>
-          <a:bodyPr rtlCol="0" anchor="ctr"/>
-          <a:lstStyle/>
-          <a:p>
-            <a:pPr algn="ctr"/>
-            <a:r>
-              <a:rPr lang="zh-CN" altLang="en-US" dirty="0" smtClean="0"/>
-              <a:t>减少重传</a:t>
-            </a:r>
-            <a:endParaRPr lang="zh-CN" altLang="en-US" dirty="0"/>
-          </a:p>
-        </p:txBody>
-      </p:sp>
-      <p:sp>
-        <p:nvSpPr>
-          <p:cNvPr id="15" name="矩形 14"/>
-          <p:cNvSpPr/>
-          <p:nvPr/>
-        </p:nvSpPr>
-        <p:spPr>
-          <a:xfrm>
-            <a:off x="7053384" y="4267201"/>
-            <a:ext cx="1285631" cy="476738"/>
-          </a:xfrm>
-          <a:prstGeom prst="rect">
-            <a:avLst/>
-          </a:prstGeom>
-        </p:spPr>
-        <p:style>
-          <a:lnRef idx="2">
-            <a:schemeClr val="accent1">
-              <a:shade val="50000"/>
-            </a:schemeClr>
-          </a:lnRef>
-          <a:fillRef idx="1">
-            <a:schemeClr val="accent1"/>
-          </a:fillRef>
-          <a:effectRef idx="0">
-            <a:schemeClr val="accent1"/>
-          </a:effectRef>
-          <a:fontRef idx="minor">
-            <a:schemeClr val="lt1"/>
-          </a:fontRef>
-        </p:style>
-        <p:txBody>
-          <a:bodyPr rtlCol="0" anchor="ctr"/>
-          <a:lstStyle/>
-          <a:p>
-            <a:pPr algn="ctr"/>
-            <a:r>
-              <a:rPr lang="zh-CN" altLang="en-US" sz="1000" dirty="0" smtClean="0"/>
-              <a:t>优化拥塞控制</a:t>
-            </a:r>
-            <a:endParaRPr lang="zh-CN" altLang="en-US" sz="1000" dirty="0"/>
-          </a:p>
-        </p:txBody>
-      </p:sp>
-      <p:sp>
-        <p:nvSpPr>
-          <p:cNvPr id="16" name="矩形 15"/>
-          <p:cNvSpPr/>
-          <p:nvPr/>
-        </p:nvSpPr>
-        <p:spPr>
-          <a:xfrm>
-            <a:off x="7053384" y="4861169"/>
-            <a:ext cx="1285631" cy="476738"/>
-          </a:xfrm>
-          <a:prstGeom prst="rect">
-            <a:avLst/>
-          </a:prstGeom>
-        </p:spPr>
-        <p:style>
-          <a:lnRef idx="2">
-            <a:schemeClr val="accent1">
-              <a:shade val="50000"/>
-            </a:schemeClr>
-          </a:lnRef>
-          <a:fillRef idx="1">
-            <a:schemeClr val="accent1"/>
-          </a:fillRef>
-          <a:effectRef idx="0">
-            <a:schemeClr val="accent1"/>
-          </a:effectRef>
-          <a:fontRef idx="minor">
-            <a:schemeClr val="lt1"/>
-          </a:fontRef>
-        </p:style>
-        <p:txBody>
-          <a:bodyPr rtlCol="0" anchor="ctr"/>
-          <a:lstStyle/>
-          <a:p>
-            <a:pPr algn="ctr"/>
-            <a:r>
-              <a:rPr lang="zh-CN" altLang="en-US" sz="1000" dirty="0" smtClean="0"/>
-              <a:t>基于</a:t>
-            </a:r>
-            <a:r>
-              <a:rPr lang="en-US" altLang="zh-CN" sz="1000" dirty="0" smtClean="0"/>
-              <a:t>UDP</a:t>
-            </a:r>
-            <a:r>
-              <a:rPr lang="zh-CN" altLang="en-US" sz="1000" dirty="0" smtClean="0"/>
-              <a:t>的传输协议</a:t>
-            </a:r>
-            <a:endParaRPr lang="zh-CN" altLang="en-US" sz="1000" dirty="0"/>
-          </a:p>
-        </p:txBody>
-      </p:sp>
-      <p:sp>
-        <p:nvSpPr>
-          <p:cNvPr id="17" name="矩形 16"/>
-          <p:cNvSpPr/>
-          <p:nvPr/>
-        </p:nvSpPr>
-        <p:spPr>
-          <a:xfrm>
-            <a:off x="7053383" y="5826369"/>
-            <a:ext cx="1285631" cy="476738"/>
-          </a:xfrm>
-          <a:prstGeom prst="rect">
-            <a:avLst/>
-          </a:prstGeom>
-        </p:spPr>
-        <p:style>
-          <a:lnRef idx="2">
-            <a:schemeClr val="accent1">
-              <a:shade val="50000"/>
-            </a:schemeClr>
-          </a:lnRef>
-          <a:fillRef idx="1">
-            <a:schemeClr val="accent1"/>
-          </a:fillRef>
-          <a:effectRef idx="0">
-            <a:schemeClr val="accent1"/>
-          </a:effectRef>
-          <a:fontRef idx="minor">
-            <a:schemeClr val="lt1"/>
-          </a:fontRef>
-        </p:style>
-        <p:txBody>
-          <a:bodyPr rtlCol="0" anchor="ctr"/>
-          <a:lstStyle/>
-          <a:p>
-            <a:pPr algn="ctr"/>
-            <a:r>
-              <a:rPr lang="en-US" altLang="zh-CN" sz="1000" dirty="0" smtClean="0"/>
-              <a:t>ARQ+FEC</a:t>
-            </a:r>
-            <a:r>
-              <a:rPr lang="zh-CN" altLang="en-US" sz="1000" dirty="0" smtClean="0"/>
-              <a:t>的</a:t>
-            </a:r>
-            <a:r>
-              <a:rPr lang="en-US" altLang="zh-CN" sz="1000" dirty="0" err="1" smtClean="0"/>
-              <a:t>Qos</a:t>
-            </a:r>
-            <a:r>
-              <a:rPr lang="zh-CN" altLang="en-US" sz="1000" dirty="0" smtClean="0"/>
-              <a:t>的保护</a:t>
-            </a:r>
-            <a:endParaRPr lang="zh-CN" altLang="en-US" sz="1000" dirty="0"/>
-          </a:p>
-        </p:txBody>
-      </p:sp>
-      <p:sp>
-        <p:nvSpPr>
-          <p:cNvPr id="18" name="左大括号 17"/>
-          <p:cNvSpPr/>
-          <p:nvPr/>
-        </p:nvSpPr>
-        <p:spPr>
-          <a:xfrm>
-            <a:off x="2157047" y="2719754"/>
-            <a:ext cx="250092" cy="2438400"/>
-          </a:xfrm>
-          <a:prstGeom prst="leftBrace">
-            <a:avLst/>
-          </a:prstGeom>
-        </p:spPr>
-        <p:style>
-          <a:lnRef idx="1">
-            <a:schemeClr val="accent1"/>
-          </a:lnRef>
-          <a:fillRef idx="0">
-            <a:schemeClr val="accent1"/>
-          </a:fillRef>
-          <a:effectRef idx="0">
-            <a:schemeClr val="accent1"/>
-          </a:effectRef>
-          <a:fontRef idx="minor">
-            <a:schemeClr val="tx1"/>
-          </a:fontRef>
-        </p:style>
-        <p:txBody>
-          <a:bodyPr rtlCol="0" anchor="ctr"/>
-          <a:lstStyle/>
-          <a:p>
-            <a:pPr algn="ctr"/>
-            <a:endParaRPr lang="zh-CN" altLang="en-US"/>
-          </a:p>
-        </p:txBody>
-      </p:sp>
-      <p:sp>
-        <p:nvSpPr>
-          <p:cNvPr id="19" name="左大括号 18"/>
-          <p:cNvSpPr/>
-          <p:nvPr/>
-        </p:nvSpPr>
-        <p:spPr>
-          <a:xfrm>
-            <a:off x="5968024" y="4421067"/>
-            <a:ext cx="874149" cy="702408"/>
-          </a:xfrm>
-          <a:prstGeom prst="leftBrace">
-            <a:avLst/>
-          </a:prstGeom>
-        </p:spPr>
-        <p:style>
-          <a:lnRef idx="1">
-            <a:schemeClr val="accent1"/>
-          </a:lnRef>
-          <a:fillRef idx="0">
-            <a:schemeClr val="accent1"/>
-          </a:fillRef>
-          <a:effectRef idx="0">
-            <a:schemeClr val="accent1"/>
-          </a:effectRef>
-          <a:fontRef idx="minor">
-            <a:schemeClr val="tx1"/>
-          </a:fontRef>
-        </p:style>
-        <p:txBody>
-          <a:bodyPr rtlCol="0" anchor="ctr"/>
-          <a:lstStyle/>
-          <a:p>
-            <a:pPr algn="ctr"/>
-            <a:endParaRPr lang="zh-CN" altLang="en-US"/>
-          </a:p>
-        </p:txBody>
-      </p:sp>
-      <p:sp>
-        <p:nvSpPr>
-          <p:cNvPr id="20" name="左大括号 19"/>
-          <p:cNvSpPr/>
-          <p:nvPr/>
-        </p:nvSpPr>
-        <p:spPr>
-          <a:xfrm>
-            <a:off x="5956495" y="1860610"/>
-            <a:ext cx="874149" cy="569976"/>
-          </a:xfrm>
-          <a:prstGeom prst="leftBrace">
-            <a:avLst/>
-          </a:prstGeom>
-        </p:spPr>
-        <p:style>
-          <a:lnRef idx="1">
-            <a:schemeClr val="accent1"/>
-          </a:lnRef>
-          <a:fillRef idx="0">
-            <a:schemeClr val="accent1"/>
-          </a:fillRef>
-          <a:effectRef idx="0">
-            <a:schemeClr val="accent1"/>
-          </a:effectRef>
-          <a:fontRef idx="minor">
-            <a:schemeClr val="tx1"/>
-          </a:fontRef>
-        </p:style>
-        <p:txBody>
-          <a:bodyPr rtlCol="0" anchor="ctr"/>
-          <a:lstStyle/>
-          <a:p>
-            <a:pPr algn="ctr"/>
-            <a:endParaRPr lang="zh-CN" altLang="en-US"/>
-          </a:p>
-        </p:txBody>
-      </p:sp>
-      <p:sp>
-        <p:nvSpPr>
-          <p:cNvPr id="21" name="左大括号 20"/>
-          <p:cNvSpPr/>
-          <p:nvPr/>
-        </p:nvSpPr>
-        <p:spPr>
-          <a:xfrm>
-            <a:off x="3882878" y="4505570"/>
-            <a:ext cx="874149" cy="1281723"/>
-          </a:xfrm>
-          <a:prstGeom prst="leftBrace">
-            <a:avLst/>
-          </a:prstGeom>
-        </p:spPr>
-        <p:style>
-          <a:lnRef idx="1">
-            <a:schemeClr val="accent1"/>
-          </a:lnRef>
-          <a:fillRef idx="0">
-            <a:schemeClr val="accent1"/>
-          </a:fillRef>
-          <a:effectRef idx="0">
-            <a:schemeClr val="accent1"/>
-          </a:effectRef>
-          <a:fontRef idx="minor">
-            <a:schemeClr val="tx1"/>
-          </a:fontRef>
-        </p:style>
-        <p:txBody>
-          <a:bodyPr rtlCol="0" anchor="ctr"/>
-          <a:lstStyle/>
-          <a:p>
-            <a:pPr algn="ctr"/>
-            <a:endParaRPr lang="zh-CN" altLang="en-US"/>
-          </a:p>
-        </p:txBody>
-      </p:sp>
-      <p:sp>
-        <p:nvSpPr>
-          <p:cNvPr id="22" name="左大括号 21"/>
-          <p:cNvSpPr/>
-          <p:nvPr/>
-        </p:nvSpPr>
-        <p:spPr>
-          <a:xfrm>
-            <a:off x="4005385" y="2293815"/>
-            <a:ext cx="874149" cy="1281723"/>
-          </a:xfrm>
-          <a:prstGeom prst="leftBrace">
-            <a:avLst/>
-          </a:prstGeom>
-        </p:spPr>
-        <p:style>
-          <a:lnRef idx="1">
-            <a:schemeClr val="accent1"/>
-          </a:lnRef>
-          <a:fillRef idx="0">
-            <a:schemeClr val="accent1"/>
-          </a:fillRef>
-          <a:effectRef idx="0">
-            <a:schemeClr val="accent1"/>
-          </a:effectRef>
-          <a:fontRef idx="minor">
-            <a:schemeClr val="tx1"/>
-          </a:fontRef>
-        </p:style>
-        <p:txBody>
-          <a:bodyPr rtlCol="0" anchor="ctr"/>
-          <a:lstStyle/>
-          <a:p>
-            <a:pPr algn="ctr"/>
-            <a:endParaRPr lang="zh-CN" altLang="en-US"/>
-          </a:p>
-        </p:txBody>
-      </p:sp>
-      <p:cxnSp>
-        <p:nvCxnSpPr>
-          <p:cNvPr id="24" name="直接箭头连接符 23"/>
-          <p:cNvCxnSpPr>
-            <a:endCxn id="12" idx="1"/>
-          </p:cNvCxnSpPr>
-          <p:nvPr/>
-        </p:nvCxnSpPr>
-        <p:spPr>
-          <a:xfrm>
-            <a:off x="6125895" y="3460873"/>
-            <a:ext cx="657856" cy="53425"/>
-          </a:xfrm>
-          <a:prstGeom prst="straightConnector1">
-            <a:avLst/>
-          </a:prstGeom>
-          <a:ln>
-            <a:tailEnd type="triangle"/>
-          </a:ln>
-        </p:spPr>
-        <p:style>
-          <a:lnRef idx="1">
-            <a:schemeClr val="accent1"/>
-          </a:lnRef>
-          <a:fillRef idx="0">
-            <a:schemeClr val="accent1"/>
-          </a:fillRef>
-          <a:effectRef idx="0">
-            <a:schemeClr val="accent1"/>
-          </a:effectRef>
-          <a:fontRef idx="minor">
-            <a:schemeClr val="tx1"/>
-          </a:fontRef>
-        </p:style>
-      </p:cxnSp>
-      <p:cxnSp>
-        <p:nvCxnSpPr>
-          <p:cNvPr id="26" name="直接箭头连接符 25"/>
-          <p:cNvCxnSpPr>
-            <a:stCxn id="10" idx="3"/>
-          </p:cNvCxnSpPr>
-          <p:nvPr/>
-        </p:nvCxnSpPr>
-        <p:spPr>
-          <a:xfrm>
-            <a:off x="7901354" y="1828129"/>
-            <a:ext cx="1016000" cy="165405"/>
-          </a:xfrm>
-          <a:prstGeom prst="straightConnector1">
-            <a:avLst/>
-          </a:prstGeom>
-          <a:ln>
-            <a:tailEnd type="triangle"/>
-          </a:ln>
-        </p:spPr>
-        <p:style>
-          <a:lnRef idx="1">
-            <a:schemeClr val="accent1"/>
-          </a:lnRef>
-          <a:fillRef idx="0">
-            <a:schemeClr val="accent1"/>
-          </a:fillRef>
-          <a:effectRef idx="0">
-            <a:schemeClr val="accent1"/>
-          </a:effectRef>
-          <a:fontRef idx="minor">
-            <a:schemeClr val="tx1"/>
-          </a:fontRef>
-        </p:style>
-      </p:cxnSp>
-      <p:cxnSp>
-        <p:nvCxnSpPr>
-          <p:cNvPr id="28" name="直接箭头连接符 27"/>
-          <p:cNvCxnSpPr>
-            <a:endCxn id="17" idx="1"/>
-          </p:cNvCxnSpPr>
-          <p:nvPr/>
-        </p:nvCxnSpPr>
-        <p:spPr>
-          <a:xfrm>
-            <a:off x="6125895" y="5705230"/>
-            <a:ext cx="927488" cy="359508"/>
-          </a:xfrm>
-          <a:prstGeom prst="straightConnector1">
-            <a:avLst/>
-          </a:prstGeom>
-          <a:ln>
-            <a:tailEnd type="triangle"/>
-          </a:ln>
-        </p:spPr>
-        <p:style>
-          <a:lnRef idx="1">
-            <a:schemeClr val="accent1"/>
-          </a:lnRef>
-          <a:fillRef idx="0">
-            <a:schemeClr val="accent1"/>
-          </a:fillRef>
-          <a:effectRef idx="0">
-            <a:schemeClr val="accent1"/>
-          </a:effectRef>
-          <a:fontRef idx="minor">
-            <a:schemeClr val="tx1"/>
-          </a:fontRef>
-        </p:style>
-      </p:cxnSp>
     </p:spTree>
-    <p:extLst>
-      <p:ext uri="{BB962C8B-B14F-4D97-AF65-F5344CB8AC3E}">
-        <p14:creationId xmlns:p14="http://schemas.microsoft.com/office/powerpoint/2010/main" val="2696973339"/>
-      </p:ext>
-    </p:extLst>
   </p:cSld>
   <p:clrMapOvr>
     <a:masterClrMapping/>
@@ -15077,103 +17303,139 @@
 </file>
 
 <file path=ppt/tags/tag1.xml><?xml version="1.0" encoding="utf-8"?>
-<p:tagLst xmlns:a="http://schemas.openxmlformats.org/drawingml/2006/main" xmlns:r="http://schemas.openxmlformats.org/officeDocument/2006/relationships" xmlns:p="http://schemas.openxmlformats.org/presentationml/2006/main">
+<p:tagLst xmlns:p="http://schemas.openxmlformats.org/presentationml/2006/main">
   <p:tag name="KSO_WM_DIAGRAM_VIRTUALLY_FRAME" val="{&quot;height&quot;:277.12511811023626,&quot;left&quot;:295.6359842519685,&quot;top&quot;:183.5567716535433,&quot;width&quot;:344.1822834645669}"/>
 </p:tagLst>
 </file>
 
 <file path=ppt/tags/tag10.xml><?xml version="1.0" encoding="utf-8"?>
-<p:tagLst xmlns:a="http://schemas.openxmlformats.org/drawingml/2006/main" xmlns:r="http://schemas.openxmlformats.org/officeDocument/2006/relationships" xmlns:p="http://schemas.openxmlformats.org/presentationml/2006/main">
+<p:tagLst xmlns:p="http://schemas.openxmlformats.org/presentationml/2006/main">
   <p:tag name="KSO_WM_DIAGRAM_VIRTUALLY_FRAME" val="{&quot;height&quot;:277.12511811023626,&quot;left&quot;:295.6359842519685,&quot;top&quot;:183.5567716535433,&quot;width&quot;:344.1822834645669}"/>
 </p:tagLst>
 </file>
 
 <file path=ppt/tags/tag11.xml><?xml version="1.0" encoding="utf-8"?>
-<p:tagLst xmlns:a="http://schemas.openxmlformats.org/drawingml/2006/main" xmlns:r="http://schemas.openxmlformats.org/officeDocument/2006/relationships" xmlns:p="http://schemas.openxmlformats.org/presentationml/2006/main">
+<p:tagLst xmlns:p="http://schemas.openxmlformats.org/presentationml/2006/main">
   <p:tag name="KSO_WM_DIAGRAM_VIRTUALLY_FRAME" val="{&quot;height&quot;:277.12511811023626,&quot;left&quot;:295.6359842519685,&quot;top&quot;:183.5567716535433,&quot;width&quot;:344.1822834645669}"/>
 </p:tagLst>
 </file>
 
 <file path=ppt/tags/tag12.xml><?xml version="1.0" encoding="utf-8"?>
-<p:tagLst xmlns:a="http://schemas.openxmlformats.org/drawingml/2006/main" xmlns:r="http://schemas.openxmlformats.org/officeDocument/2006/relationships" xmlns:p="http://schemas.openxmlformats.org/presentationml/2006/main">
+<p:tagLst xmlns:p="http://schemas.openxmlformats.org/presentationml/2006/main">
   <p:tag name="KSO_WM_DIAGRAM_VIRTUALLY_FRAME" val="{&quot;height&quot;:277.12511811023626,&quot;left&quot;:295.6359842519685,&quot;top&quot;:183.5567716535433,&quot;width&quot;:344.1822834645669}"/>
 </p:tagLst>
 </file>
 
 <file path=ppt/tags/tag13.xml><?xml version="1.0" encoding="utf-8"?>
-<p:tagLst xmlns:a="http://schemas.openxmlformats.org/drawingml/2006/main" xmlns:r="http://schemas.openxmlformats.org/officeDocument/2006/relationships" xmlns:p="http://schemas.openxmlformats.org/presentationml/2006/main">
+<p:tagLst xmlns:p="http://schemas.openxmlformats.org/presentationml/2006/main">
   <p:tag name="KSO_WM_DIAGRAM_VIRTUALLY_FRAME" val="{&quot;height&quot;:277.12511811023626,&quot;left&quot;:295.6359842519685,&quot;top&quot;:183.5567716535433,&quot;width&quot;:344.1822834645669}"/>
 </p:tagLst>
 </file>
 
 <file path=ppt/tags/tag14.xml><?xml version="1.0" encoding="utf-8"?>
-<p:tagLst xmlns:a="http://schemas.openxmlformats.org/drawingml/2006/main" xmlns:r="http://schemas.openxmlformats.org/officeDocument/2006/relationships" xmlns:p="http://schemas.openxmlformats.org/presentationml/2006/main">
+<p:tagLst xmlns:p="http://schemas.openxmlformats.org/presentationml/2006/main">
   <p:tag name="KSO_WM_DIAGRAM_VIRTUALLY_FRAME" val="{&quot;height&quot;:277.12511811023626,&quot;left&quot;:295.6359842519685,&quot;top&quot;:183.5567716535433,&quot;width&quot;:344.1822834645669}"/>
 </p:tagLst>
 </file>
 
 <file path=ppt/tags/tag15.xml><?xml version="1.0" encoding="utf-8"?>
-<p:tagLst xmlns:a="http://schemas.openxmlformats.org/drawingml/2006/main" xmlns:r="http://schemas.openxmlformats.org/officeDocument/2006/relationships" xmlns:p="http://schemas.openxmlformats.org/presentationml/2006/main">
+<p:tagLst xmlns:p="http://schemas.openxmlformats.org/presentationml/2006/main">
   <p:tag name="KSO_WM_DIAGRAM_VIRTUALLY_FRAME" val="{&quot;height&quot;:277.12511811023626,&quot;left&quot;:295.6359842519685,&quot;top&quot;:183.5567716535433,&quot;width&quot;:344.1822834645669}"/>
 </p:tagLst>
 </file>
 
 <file path=ppt/tags/tag16.xml><?xml version="1.0" encoding="utf-8"?>
-<p:tagLst xmlns:a="http://schemas.openxmlformats.org/drawingml/2006/main" xmlns:r="http://schemas.openxmlformats.org/officeDocument/2006/relationships" xmlns:p="http://schemas.openxmlformats.org/presentationml/2006/main">
+<p:tagLst xmlns:p="http://schemas.openxmlformats.org/presentationml/2006/main">
   <p:tag name="KSO_WM_DIAGRAM_VIRTUALLY_FRAME" val="{&quot;height&quot;:277.12511811023626,&quot;left&quot;:295.6359842519685,&quot;top&quot;:183.5567716535433,&quot;width&quot;:344.1822834645669}"/>
 </p:tagLst>
 </file>
 
 <file path=ppt/tags/tag17.xml><?xml version="1.0" encoding="utf-8"?>
-<p:tagLst xmlns:a="http://schemas.openxmlformats.org/drawingml/2006/main" xmlns:r="http://schemas.openxmlformats.org/officeDocument/2006/relationships" xmlns:p="http://schemas.openxmlformats.org/presentationml/2006/main">
+<p:tagLst xmlns:p="http://schemas.openxmlformats.org/presentationml/2006/main">
   <p:tag name="KSO_WM_DIAGRAM_VIRTUALLY_FRAME" val="{&quot;height&quot;:277.12511811023626,&quot;left&quot;:295.6359842519685,&quot;top&quot;:183.5567716535433,&quot;width&quot;:344.1822834645669}"/>
 </p:tagLst>
 </file>
 
+<file path=ppt/tags/tag18.xml><?xml version="1.0" encoding="utf-8"?>
+<p:tagLst xmlns:p="http://schemas.openxmlformats.org/presentationml/2006/main">
+  <p:tag name="KSO_WM_DIAGRAM_VIRTUALLY_FRAME" val="{&quot;height&quot;:229.54724409448818,&quot;left&quot;:96.32433070866142,&quot;top&quot;:181.94590551181102,&quot;width&quot;:733.053937007874}"/>
+</p:tagLst>
+</file>
+
+<file path=ppt/tags/tag19.xml><?xml version="1.0" encoding="utf-8"?>
+<p:tagLst xmlns:p="http://schemas.openxmlformats.org/presentationml/2006/main">
+  <p:tag name="KSO_WM_DIAGRAM_VIRTUALLY_FRAME" val="{&quot;height&quot;:229.54724409448818,&quot;left&quot;:96.32433070866142,&quot;top&quot;:181.94590551181102,&quot;width&quot;:733.053937007874}"/>
+</p:tagLst>
+</file>
+
 <file path=ppt/tags/tag2.xml><?xml version="1.0" encoding="utf-8"?>
-<p:tagLst xmlns:a="http://schemas.openxmlformats.org/drawingml/2006/main" xmlns:r="http://schemas.openxmlformats.org/officeDocument/2006/relationships" xmlns:p="http://schemas.openxmlformats.org/presentationml/2006/main">
+<p:tagLst xmlns:p="http://schemas.openxmlformats.org/presentationml/2006/main">
   <p:tag name="KSO_WM_DIAGRAM_VIRTUALLY_FRAME" val="{&quot;height&quot;:277.12511811023626,&quot;left&quot;:295.6359842519685,&quot;top&quot;:183.5567716535433,&quot;width&quot;:344.1822834645669}"/>
 </p:tagLst>
 </file>
 
+<file path=ppt/tags/tag20.xml><?xml version="1.0" encoding="utf-8"?>
+<p:tagLst xmlns:p="http://schemas.openxmlformats.org/presentationml/2006/main">
+  <p:tag name="KSO_WM_DIAGRAM_VIRTUALLY_FRAME" val="{&quot;height&quot;:229.54724409448818,&quot;left&quot;:96.32433070866142,&quot;top&quot;:181.94590551181102,&quot;width&quot;:733.053937007874}"/>
+</p:tagLst>
+</file>
+
+<file path=ppt/tags/tag21.xml><?xml version="1.0" encoding="utf-8"?>
+<p:tagLst xmlns:p="http://schemas.openxmlformats.org/presentationml/2006/main">
+  <p:tag name="KSO_WM_DIAGRAM_VIRTUALLY_FRAME" val="{&quot;height&quot;:229.54724409448818,&quot;left&quot;:96.32433070866142,&quot;top&quot;:181.94590551181102,&quot;width&quot;:733.053937007874}"/>
+</p:tagLst>
+</file>
+
+<file path=ppt/tags/tag22.xml><?xml version="1.0" encoding="utf-8"?>
+<p:tagLst xmlns:p="http://schemas.openxmlformats.org/presentationml/2006/main">
+  <p:tag name="KSO_WM_DIAGRAM_VIRTUALLY_FRAME" val="{&quot;height&quot;:229.54724409448818,&quot;left&quot;:96.32433070866142,&quot;top&quot;:181.94590551181102,&quot;width&quot;:733.053937007874}"/>
+</p:tagLst>
+</file>
+
+<file path=ppt/tags/tag23.xml><?xml version="1.0" encoding="utf-8"?>
+<p:tagLst xmlns:p="http://schemas.openxmlformats.org/presentationml/2006/main">
+  <p:tag name="KSO_WM_DIAGRAM_VIRTUALLY_FRAME" val="{&quot;height&quot;:229.54724409448818,&quot;left&quot;:96.32433070866142,&quot;top&quot;:181.94590551181102,&quot;width&quot;:733.053937007874}"/>
+</p:tagLst>
+</file>
+
 <file path=ppt/tags/tag3.xml><?xml version="1.0" encoding="utf-8"?>
-<p:tagLst xmlns:a="http://schemas.openxmlformats.org/drawingml/2006/main" xmlns:r="http://schemas.openxmlformats.org/officeDocument/2006/relationships" xmlns:p="http://schemas.openxmlformats.org/presentationml/2006/main">
+<p:tagLst xmlns:p="http://schemas.openxmlformats.org/presentationml/2006/main">
   <p:tag name="KSO_WM_DIAGRAM_VIRTUALLY_FRAME" val="{&quot;height&quot;:277.12511811023626,&quot;left&quot;:295.6359842519685,&quot;top&quot;:183.5567716535433,&quot;width&quot;:344.1822834645669}"/>
 </p:tagLst>
 </file>
 
 <file path=ppt/tags/tag4.xml><?xml version="1.0" encoding="utf-8"?>
-<p:tagLst xmlns:a="http://schemas.openxmlformats.org/drawingml/2006/main" xmlns:r="http://schemas.openxmlformats.org/officeDocument/2006/relationships" xmlns:p="http://schemas.openxmlformats.org/presentationml/2006/main">
+<p:tagLst xmlns:p="http://schemas.openxmlformats.org/presentationml/2006/main">
   <p:tag name="KSO_WM_DIAGRAM_VIRTUALLY_FRAME" val="{&quot;height&quot;:277.12511811023626,&quot;left&quot;:295.6359842519685,&quot;top&quot;:183.5567716535433,&quot;width&quot;:344.1822834645669}"/>
 </p:tagLst>
 </file>
 
 <file path=ppt/tags/tag5.xml><?xml version="1.0" encoding="utf-8"?>
-<p:tagLst xmlns:a="http://schemas.openxmlformats.org/drawingml/2006/main" xmlns:r="http://schemas.openxmlformats.org/officeDocument/2006/relationships" xmlns:p="http://schemas.openxmlformats.org/presentationml/2006/main">
+<p:tagLst xmlns:p="http://schemas.openxmlformats.org/presentationml/2006/main">
   <p:tag name="KSO_WM_DIAGRAM_VIRTUALLY_FRAME" val="{&quot;height&quot;:277.12511811023626,&quot;left&quot;:295.6359842519685,&quot;top&quot;:183.5567716535433,&quot;width&quot;:344.1822834645669}"/>
 </p:tagLst>
 </file>
 
 <file path=ppt/tags/tag6.xml><?xml version="1.0" encoding="utf-8"?>
-<p:tagLst xmlns:a="http://schemas.openxmlformats.org/drawingml/2006/main" xmlns:r="http://schemas.openxmlformats.org/officeDocument/2006/relationships" xmlns:p="http://schemas.openxmlformats.org/presentationml/2006/main">
+<p:tagLst xmlns:p="http://schemas.openxmlformats.org/presentationml/2006/main">
   <p:tag name="KSO_WM_DIAGRAM_VIRTUALLY_FRAME" val="{&quot;height&quot;:277.12511811023626,&quot;left&quot;:295.6359842519685,&quot;top&quot;:183.5567716535433,&quot;width&quot;:344.1822834645669}"/>
 </p:tagLst>
 </file>
 
 <file path=ppt/tags/tag7.xml><?xml version="1.0" encoding="utf-8"?>
-<p:tagLst xmlns:a="http://schemas.openxmlformats.org/drawingml/2006/main" xmlns:r="http://schemas.openxmlformats.org/officeDocument/2006/relationships" xmlns:p="http://schemas.openxmlformats.org/presentationml/2006/main">
+<p:tagLst xmlns:p="http://schemas.openxmlformats.org/presentationml/2006/main">
   <p:tag name="KSO_WM_DIAGRAM_VIRTUALLY_FRAME" val="{&quot;height&quot;:277.12511811023626,&quot;left&quot;:295.6359842519685,&quot;top&quot;:183.5567716535433,&quot;width&quot;:344.1822834645669}"/>
 </p:tagLst>
 </file>
 
 <file path=ppt/tags/tag8.xml><?xml version="1.0" encoding="utf-8"?>
-<p:tagLst xmlns:a="http://schemas.openxmlformats.org/drawingml/2006/main" xmlns:r="http://schemas.openxmlformats.org/officeDocument/2006/relationships" xmlns:p="http://schemas.openxmlformats.org/presentationml/2006/main">
+<p:tagLst xmlns:p="http://schemas.openxmlformats.org/presentationml/2006/main">
   <p:tag name="KSO_WM_DIAGRAM_VIRTUALLY_FRAME" val="{&quot;height&quot;:277.12511811023626,&quot;left&quot;:295.6359842519685,&quot;top&quot;:183.5567716535433,&quot;width&quot;:344.1822834645669}"/>
 </p:tagLst>
 </file>
 
 <file path=ppt/tags/tag9.xml><?xml version="1.0" encoding="utf-8"?>
-<p:tagLst xmlns:a="http://schemas.openxmlformats.org/drawingml/2006/main" xmlns:r="http://schemas.openxmlformats.org/officeDocument/2006/relationships" xmlns:p="http://schemas.openxmlformats.org/presentationml/2006/main">
+<p:tagLst xmlns:p="http://schemas.openxmlformats.org/presentationml/2006/main">
   <p:tag name="KSO_WM_DIAGRAM_VIRTUALLY_FRAME" val="{&quot;height&quot;:277.12511811023626,&quot;left&quot;:295.6359842519685,&quot;top&quot;:183.5567716535433,&quot;width&quot;:344.1822834645669}"/>
 </p:tagLst>
 </file>
@@ -15429,8 +17691,6 @@
       </a:bgFillStyleLst>
     </a:fmtScheme>
   </a:themeElements>
-  <a:objectDefaults/>
-  <a:extraClrSchemeLst/>
   <a:extLst>
     <a:ext uri="{05A4C25C-085E-4340-85A3-A5531E510DB2}">
       <thm15:themeFamily xmlns:thm15="http://schemas.microsoft.com/office/thememl/2012/main" name="Office Theme" id="{62F939B6-93AF-4DB8-9C6B-D6C7DFDC589F}" vid="{4A3C46E8-61CC-4603-A589-7422A47A8E4A}"/>
